--- a/output/wordlabs-endo-3day.pptx
+++ b/output/wordlabs-endo-3day.pptx
@@ -4240,7 +4240,7 @@
                 <a:ea typeface="Calibri" pitchFamily="34" charset="-122"/>
                 <a:cs typeface="Calibri" pitchFamily="34" charset="-120"/>
               </a:rPr>
-              <a:t>"within, inside, inner"</a:t>
+              <a:t>"within, inside, internal"</a:t>
             </a:r>
             <a:endParaRPr lang="en-US" sz="2200" dirty="0"/>
           </a:p>
@@ -5288,7 +5288,7 @@
                 <a:ea typeface="Calibri" pitchFamily="34" charset="-122"/>
                 <a:cs typeface="Calibri" pitchFamily="34" charset="-120"/>
               </a:rPr>
-              <a:t>Word Labs  •  wordlabs.app  •  Root: 'endo' = within, inside, inner</a:t>
+              <a:t>Word Labs  •  wordlabs.app  •  Root: 'endo' = within, inside, internal</a:t>
             </a:r>
             <a:endParaRPr lang="en-US" sz="800" dirty="0"/>
           </a:p>
@@ -5622,7 +5622,7 @@
                 <a:ea typeface="Trebuchet MS" pitchFamily="34" charset="-122"/>
                 <a:cs typeface="Trebuchet MS" pitchFamily="34" charset="-120"/>
               </a:rPr>
-              <a:t>0</a:t>
+              <a:t>1</a:t>
             </a:r>
             <a:pPr algn="ctr" indent="0" marL="0">
               <a:buNone/>
@@ -5928,7 +5928,7 @@
                 <a:ea typeface="Calibri" pitchFamily="34" charset="-122"/>
                 <a:cs typeface="Calibri" pitchFamily="34" charset="-120"/>
               </a:rPr>
-              <a:t>Word Labs  •  wordlabs.app  •  Root: 'endo' = within, inside, inner</a:t>
+              <a:t>Word Labs  •  wordlabs.app  •  Root: 'endo' = within, inside, internal</a:t>
             </a:r>
             <a:endParaRPr lang="en-US" sz="800" dirty="0"/>
           </a:p>
@@ -6040,7 +6040,7 @@
                 <a:ea typeface="Calibri" pitchFamily="34" charset="-122"/>
                 <a:cs typeface="Calibri" pitchFamily="34" charset="-120"/>
               </a:rPr>
-              <a:t>The doctor used an </a:t>
+              <a:t>The </a:t>
             </a:r>
             <a:pPr algn="l" indent="0" marL="0">
               <a:buNone/>
@@ -6071,7 +6071,7 @@
                 <a:ea typeface="Calibri" pitchFamily="34" charset="-122"/>
                 <a:cs typeface="Calibri" pitchFamily="34" charset="-120"/>
               </a:rPr>
-              <a:t> to examine the </a:t>
+              <a:t> helped the doctor examine the patient's insides, and the </a:t>
             </a:r>
             <a:pPr algn="l" indent="0" marL="0">
               <a:buNone/>
@@ -6102,7 +6102,7 @@
                 <a:ea typeface="Calibri" pitchFamily="34" charset="-122"/>
                 <a:cs typeface="Calibri" pitchFamily="34" charset="-120"/>
               </a:rPr>
-              <a:t> layer during the procedure.</a:t>
+              <a:t> was clearly visible on the screen.</a:t>
             </a:r>
             <a:endParaRPr lang="en-US" sz="1800" dirty="0"/>
           </a:p>
@@ -6716,7 +6716,7 @@
                 <a:ea typeface="Calibri" pitchFamily="34" charset="-122"/>
                 <a:cs typeface="Calibri" pitchFamily="34" charset="-120"/>
               </a:rPr>
-              <a:t>Word Labs  •  wordlabs.app  •  Root: 'endo' = within, inside, inner</a:t>
+              <a:t>Word Labs  •  wordlabs.app  •  Root: 'endo' = within, inside, internal</a:t>
             </a:r>
             <a:endParaRPr lang="en-US" sz="800" dirty="0"/>
           </a:p>
@@ -7543,7 +7543,7 @@
                 <a:ea typeface="Calibri" pitchFamily="34" charset="-122"/>
                 <a:cs typeface="Calibri" pitchFamily="34" charset="-120"/>
               </a:rPr>
-              <a:t>Word Labs  •  wordlabs.app  •  Root: 'endo' = within, inside, inner</a:t>
+              <a:t>Word Labs  •  wordlabs.app  •  Root: 'endo' = within, inside, internal</a:t>
             </a:r>
             <a:endParaRPr lang="en-US" sz="800" dirty="0"/>
           </a:p>
@@ -7972,7 +7972,7 @@
                 <a:ea typeface="Calibri" pitchFamily="34" charset="-122"/>
                 <a:cs typeface="Calibri" pitchFamily="34" charset="-120"/>
               </a:rPr>
-              <a:t>to look at, observe</a:t>
+              <a:t>instrument for viewing</a:t>
             </a:r>
             <a:endParaRPr lang="en-US" sz="850" dirty="0"/>
           </a:p>
@@ -8528,7 +8528,7 @@
                 <a:ea typeface="Calibri" pitchFamily="34" charset="-122"/>
                 <a:cs typeface="Calibri" pitchFamily="34" charset="-120"/>
               </a:rPr>
-              <a:t>Word Labs  •  wordlabs.app  •  Root: 'endo' = within, inside, inner</a:t>
+              <a:t>Word Labs  •  wordlabs.app  •  Root: 'endo' = within, inside, internal</a:t>
             </a:r>
             <a:endParaRPr lang="en-US" sz="800" dirty="0"/>
           </a:p>
@@ -8957,7 +8957,7 @@
                 <a:ea typeface="Calibri" pitchFamily="34" charset="-122"/>
                 <a:cs typeface="Calibri" pitchFamily="34" charset="-120"/>
               </a:rPr>
-              <a:t>to look at, observe</a:t>
+              <a:t>instrument for viewing</a:t>
             </a:r>
             <a:endParaRPr lang="en-US" sz="850" dirty="0"/>
           </a:p>
@@ -9750,7 +9750,7 @@
                 <a:ea typeface="Calibri" pitchFamily="34" charset="-122"/>
                 <a:cs typeface="Calibri" pitchFamily="34" charset="-120"/>
               </a:rPr>
-              <a:t>Word Labs  •  wordlabs.app  •  Root: 'endo' = within, inside, inner</a:t>
+              <a:t>Word Labs  •  wordlabs.app  •  Root: 'endo' = within, inside, internal</a:t>
             </a:r>
             <a:endParaRPr lang="en-US" sz="800" dirty="0"/>
           </a:p>
@@ -10179,7 +10179,7 @@
                 <a:ea typeface="Calibri" pitchFamily="34" charset="-122"/>
                 <a:cs typeface="Calibri" pitchFamily="34" charset="-120"/>
               </a:rPr>
-              <a:t>to look at, observe</a:t>
+              <a:t>instrument for viewing</a:t>
             </a:r>
             <a:endParaRPr lang="en-US" sz="850" dirty="0"/>
           </a:p>
@@ -10655,7 +10655,7 @@
         </p:nvSpPr>
         <p:spPr>
           <a:xfrm>
-            <a:off x="2124837" y="4169664"/>
+            <a:off x="2023872" y="4169664"/>
             <a:ext cx="685800" cy="384048"/>
           </a:xfrm>
           <a:prstGeom prst="rect">
@@ -10682,7 +10682,7 @@
         </p:nvSpPr>
         <p:spPr>
           <a:xfrm>
-            <a:off x="2124837" y="4169664"/>
+            <a:off x="2023872" y="4169664"/>
             <a:ext cx="685800" cy="384048"/>
           </a:xfrm>
           <a:prstGeom prst="rect">
@@ -10721,7 +10721,7 @@
         </p:nvSpPr>
         <p:spPr>
           <a:xfrm>
-            <a:off x="3033522" y="4169664"/>
+            <a:off x="2831592" y="4169664"/>
             <a:ext cx="685800" cy="384048"/>
           </a:xfrm>
           <a:prstGeom prst="rect">
@@ -10748,7 +10748,7 @@
         </p:nvSpPr>
         <p:spPr>
           <a:xfrm>
-            <a:off x="3033522" y="4169664"/>
+            <a:off x="2831592" y="4169664"/>
             <a:ext cx="685800" cy="384048"/>
           </a:xfrm>
           <a:prstGeom prst="rect">
@@ -10787,7 +10787,7 @@
         </p:nvSpPr>
         <p:spPr>
           <a:xfrm>
-            <a:off x="3942207" y="4169664"/>
+            <a:off x="3639312" y="4169664"/>
             <a:ext cx="685800" cy="384048"/>
           </a:xfrm>
           <a:prstGeom prst="rect">
@@ -10814,7 +10814,7 @@
         </p:nvSpPr>
         <p:spPr>
           <a:xfrm>
-            <a:off x="3942207" y="4169664"/>
+            <a:off x="3639312" y="4169664"/>
             <a:ext cx="685800" cy="384048"/>
           </a:xfrm>
           <a:prstGeom prst="rect">
@@ -10853,7 +10853,7 @@
         </p:nvSpPr>
         <p:spPr>
           <a:xfrm>
-            <a:off x="4850892" y="4169664"/>
+            <a:off x="4447032" y="4169664"/>
             <a:ext cx="685800" cy="384048"/>
           </a:xfrm>
           <a:prstGeom prst="rect">
@@ -10880,7 +10880,7 @@
         </p:nvSpPr>
         <p:spPr>
           <a:xfrm>
-            <a:off x="4850892" y="4169664"/>
+            <a:off x="4447032" y="4169664"/>
             <a:ext cx="685800" cy="384048"/>
           </a:xfrm>
           <a:prstGeom prst="rect">
@@ -10919,7 +10919,7 @@
         </p:nvSpPr>
         <p:spPr>
           <a:xfrm>
-            <a:off x="5759577" y="4169664"/>
+            <a:off x="5254752" y="4169664"/>
             <a:ext cx="685800" cy="384048"/>
           </a:xfrm>
           <a:prstGeom prst="rect">
@@ -10946,7 +10946,7 @@
         </p:nvSpPr>
         <p:spPr>
           <a:xfrm>
-            <a:off x="5759577" y="4169664"/>
+            <a:off x="5254752" y="4169664"/>
             <a:ext cx="685800" cy="384048"/>
           </a:xfrm>
           <a:prstGeom prst="rect">
@@ -10971,7 +10971,7 @@
                 <a:ea typeface="Trebuchet MS" pitchFamily="34" charset="-122"/>
                 <a:cs typeface="Trebuchet MS" pitchFamily="34" charset="-120"/>
               </a:rPr>
-              <a:t>sc</a:t>
+              <a:t>s</a:t>
             </a:r>
             <a:endParaRPr lang="en-US" sz="900" dirty="0"/>
           </a:p>
@@ -10979,13 +10979,79 @@
       </p:sp>
       <p:sp>
         <p:nvSpPr>
-          <p:cNvPr id="46" name="Text 44"/>
-          <p:cNvSpPr/>
-          <p:nvPr/>
-        </p:nvSpPr>
-        <p:spPr>
-          <a:xfrm>
-            <a:off x="5759577" y="4572000"/>
+          <p:cNvPr id="46" name="Shape 44"/>
+          <p:cNvSpPr/>
+          <p:nvPr/>
+        </p:nvSpPr>
+        <p:spPr>
+          <a:xfrm>
+            <a:off x="6062472" y="4169664"/>
+            <a:ext cx="685800" cy="384048"/>
+          </a:xfrm>
+          <a:prstGeom prst="rect">
+            <a:avLst>
+              <a:gd name="adj" fmla="val 9524"/>
+            </a:avLst>
+          </a:prstGeom>
+          <a:solidFill>
+            <a:srgbClr val="FFFFFF"/>
+          </a:solidFill>
+          <a:ln w="12700">
+            <a:solidFill>
+              <a:srgbClr val="DB2777"/>
+            </a:solidFill>
+            <a:prstDash val="solid"/>
+          </a:ln>
+        </p:spPr>
+      </p:sp>
+      <p:sp>
+        <p:nvSpPr>
+          <p:cNvPr id="47" name="Text 45"/>
+          <p:cNvSpPr/>
+          <p:nvPr/>
+        </p:nvSpPr>
+        <p:spPr>
+          <a:xfrm>
+            <a:off x="6062472" y="4169664"/>
+            <a:ext cx="685800" cy="384048"/>
+          </a:xfrm>
+          <a:prstGeom prst="rect">
+            <a:avLst/>
+          </a:prstGeom>
+          <a:noFill/>
+          <a:ln/>
+        </p:spPr>
+        <p:txBody>
+          <a:bodyPr wrap="square" lIns="0" tIns="0" rIns="0" bIns="0" rtlCol="0" anchor="ctr"/>
+          <a:lstStyle/>
+          <a:p>
+            <a:pPr algn="ctr" indent="0" marL="0">
+              <a:buNone/>
+            </a:pPr>
+            <a:r>
+              <a:rPr lang="en-US" sz="900" b="1" dirty="0">
+                <a:solidFill>
+                  <a:srgbClr val="9D174D"/>
+                </a:solidFill>
+                <a:latin typeface="Trebuchet MS" pitchFamily="34" charset="0"/>
+                <a:ea typeface="Trebuchet MS" pitchFamily="34" charset="-122"/>
+                <a:cs typeface="Trebuchet MS" pitchFamily="34" charset="-120"/>
+              </a:rPr>
+              <a:t>c</a:t>
+            </a:r>
+            <a:endParaRPr lang="en-US" sz="900" dirty="0"/>
+          </a:p>
+        </p:txBody>
+      </p:sp>
+      <p:sp>
+        <p:nvSpPr>
+          <p:cNvPr id="48" name="Text 46"/>
+          <p:cNvSpPr/>
+          <p:nvPr/>
+        </p:nvSpPr>
+        <p:spPr>
+          <a:xfrm>
+            <a:off x="6062472" y="4572000"/>
             <a:ext cx="685800" cy="219456"/>
           </a:xfrm>
           <a:prstGeom prst="rect">
@@ -11010,7 +11076,7 @@
                 <a:ea typeface="Calibri" pitchFamily="34" charset="-122"/>
                 <a:cs typeface="Calibri" pitchFamily="34" charset="-120"/>
               </a:rPr>
-              <a:t>/sk/</a:t>
+              <a:t>/k/</a:t>
             </a:r>
             <a:endParaRPr lang="en-US" sz="750" dirty="0"/>
           </a:p>
@@ -11018,13 +11084,13 @@
       </p:sp>
       <p:sp>
         <p:nvSpPr>
-          <p:cNvPr id="47" name="Shape 45"/>
-          <p:cNvSpPr/>
-          <p:nvPr/>
-        </p:nvSpPr>
-        <p:spPr>
-          <a:xfrm>
-            <a:off x="6668262" y="4169664"/>
+          <p:cNvPr id="49" name="Shape 47"/>
+          <p:cNvSpPr/>
+          <p:nvPr/>
+        </p:nvSpPr>
+        <p:spPr>
+          <a:xfrm>
+            <a:off x="6870192" y="4169664"/>
             <a:ext cx="685800" cy="384048"/>
           </a:xfrm>
           <a:prstGeom prst="rect">
@@ -11045,13 +11111,13 @@
       </p:sp>
       <p:sp>
         <p:nvSpPr>
-          <p:cNvPr id="48" name="Text 46"/>
-          <p:cNvSpPr/>
-          <p:nvPr/>
-        </p:nvSpPr>
-        <p:spPr>
-          <a:xfrm>
-            <a:off x="6668262" y="4169664"/>
+          <p:cNvPr id="50" name="Text 48"/>
+          <p:cNvSpPr/>
+          <p:nvPr/>
+        </p:nvSpPr>
+        <p:spPr>
+          <a:xfrm>
+            <a:off x="6870192" y="4169664"/>
             <a:ext cx="685800" cy="384048"/>
           </a:xfrm>
           <a:prstGeom prst="rect">
@@ -11084,13 +11150,13 @@
       </p:sp>
       <p:sp>
         <p:nvSpPr>
-          <p:cNvPr id="49" name="Shape 47"/>
-          <p:cNvSpPr/>
-          <p:nvPr/>
-        </p:nvSpPr>
-        <p:spPr>
-          <a:xfrm>
-            <a:off x="7576947" y="4169664"/>
+          <p:cNvPr id="51" name="Shape 49"/>
+          <p:cNvSpPr/>
+          <p:nvPr/>
+        </p:nvSpPr>
+        <p:spPr>
+          <a:xfrm>
+            <a:off x="7677912" y="4169664"/>
             <a:ext cx="685800" cy="384048"/>
           </a:xfrm>
           <a:prstGeom prst="rect">
@@ -11111,13 +11177,13 @@
       </p:sp>
       <p:sp>
         <p:nvSpPr>
-          <p:cNvPr id="50" name="Text 48"/>
-          <p:cNvSpPr/>
-          <p:nvPr/>
-        </p:nvSpPr>
-        <p:spPr>
-          <a:xfrm>
-            <a:off x="7576947" y="4169664"/>
+          <p:cNvPr id="52" name="Text 50"/>
+          <p:cNvSpPr/>
+          <p:nvPr/>
+        </p:nvSpPr>
+        <p:spPr>
+          <a:xfrm>
+            <a:off x="7677912" y="4169664"/>
             <a:ext cx="685800" cy="384048"/>
           </a:xfrm>
           <a:prstGeom prst="rect">
@@ -11434,7 +11500,7 @@
                 <a:ea typeface="Calibri" pitchFamily="34" charset="-122"/>
                 <a:cs typeface="Calibri" pitchFamily="34" charset="-120"/>
               </a:rPr>
-              <a:t>Word Labs  •  wordlabs.app  •  Root: 'endo' = within, inside, inner</a:t>
+              <a:t>Word Labs  •  wordlabs.app  •  Root: 'endo' = within, inside, internal</a:t>
             </a:r>
             <a:endParaRPr lang="en-US" sz="800" dirty="0"/>
           </a:p>
@@ -12261,7 +12327,7 @@
                 <a:ea typeface="Calibri" pitchFamily="34" charset="-122"/>
                 <a:cs typeface="Calibri" pitchFamily="34" charset="-120"/>
               </a:rPr>
-              <a:t>Word Labs  •  wordlabs.app  •  Root: 'endo' = within, inside, inner</a:t>
+              <a:t>Word Labs  •  wordlabs.app  •  Root: 'endo' = within, inside, internal</a:t>
             </a:r>
             <a:endParaRPr lang="en-US" sz="800" dirty="0"/>
           </a:p>
@@ -13246,7 +13312,7 @@
                 <a:ea typeface="Calibri" pitchFamily="34" charset="-122"/>
                 <a:cs typeface="Calibri" pitchFamily="34" charset="-120"/>
               </a:rPr>
-              <a:t>Word Labs  •  wordlabs.app  •  Root: 'endo' = within, inside, inner</a:t>
+              <a:t>Word Labs  •  wordlabs.app  •  Root: 'endo' = within, inside, internal</a:t>
             </a:r>
             <a:endParaRPr lang="en-US" sz="800" dirty="0"/>
           </a:p>
@@ -14377,7 +14443,7 @@
                 <a:ea typeface="Calibri" pitchFamily="34" charset="-122"/>
                 <a:cs typeface="Calibri" pitchFamily="34" charset="-120"/>
               </a:rPr>
-              <a:t>Root 'endo' — within, inside, inner</a:t>
+              <a:t>Root 'endo' — within, inside, internal</a:t>
             </a:r>
             <a:endParaRPr lang="en-US" sz="1600" dirty="0"/>
           </a:p>
@@ -14733,7 +14799,7 @@
                 <a:ea typeface="Calibri" pitchFamily="34" charset="-122"/>
                 <a:cs typeface="Calibri" pitchFamily="34" charset="-120"/>
               </a:rPr>
-              <a:t>Word Labs  •  wordlabs.app  •  Root: 'endo' = within, inside, inner</a:t>
+              <a:t>Word Labs  •  wordlabs.app  •  Root: 'endo' = within, inside, internal</a:t>
             </a:r>
             <a:endParaRPr lang="en-US" sz="800" dirty="0"/>
           </a:p>
@@ -16660,7 +16726,7 @@
                 <a:ea typeface="Calibri" pitchFamily="34" charset="-122"/>
                 <a:cs typeface="Calibri" pitchFamily="34" charset="-120"/>
               </a:rPr>
-              <a:t>Word Labs  •  wordlabs.app  •  Root: 'endo' = within, inside, inner</a:t>
+              <a:t>Word Labs  •  wordlabs.app  •  Root: 'endo' = within, inside, internal</a:t>
             </a:r>
             <a:endParaRPr lang="en-US" sz="800" dirty="0"/>
           </a:p>
@@ -17300,7 +17366,7 @@
                 <a:ea typeface="Calibri" pitchFamily="34" charset="-122"/>
                 <a:cs typeface="Calibri" pitchFamily="34" charset="-120"/>
               </a:rPr>
-              <a:t>Word Labs  •  wordlabs.app  •  Root: 'endo' = within, inside, inner</a:t>
+              <a:t>Word Labs  •  wordlabs.app  •  Root: 'endo' = within, inside, internal</a:t>
             </a:r>
             <a:endParaRPr lang="en-US" sz="800" dirty="0"/>
           </a:p>
@@ -17412,7 +17478,7 @@
                 <a:ea typeface="Calibri" pitchFamily="34" charset="-122"/>
                 <a:cs typeface="Calibri" pitchFamily="34" charset="-120"/>
               </a:rPr>
-              <a:t>The </a:t>
+              <a:t>After running the race, her </a:t>
             </a:r>
             <a:pPr algn="l" indent="0" marL="0">
               <a:buNone/>
@@ -17429,7 +17495,7 @@
                 <a:ea typeface="Calibri" pitchFamily="34" charset="-122"/>
                 <a:cs typeface="Calibri" pitchFamily="34" charset="-120"/>
               </a:rPr>
-              <a:t>endoskeleton</a:t>
+              <a:t>endurance</a:t>
             </a:r>
             <a:pPr algn="l" indent="0" marL="0">
               <a:buNone/>
@@ -17443,7 +17509,7 @@
                 <a:ea typeface="Calibri" pitchFamily="34" charset="-122"/>
                 <a:cs typeface="Calibri" pitchFamily="34" charset="-120"/>
               </a:rPr>
-              <a:t> protects vital organs, while the </a:t>
+              <a:t> was tested, but the </a:t>
             </a:r>
             <a:pPr algn="l" indent="0" marL="0">
               <a:buNone/>
@@ -17460,7 +17526,7 @@
                 <a:ea typeface="Calibri" pitchFamily="34" charset="-122"/>
                 <a:cs typeface="Calibri" pitchFamily="34" charset="-120"/>
               </a:rPr>
-              <a:t>endocrine</a:t>
+              <a:t>endorphins</a:t>
             </a:r>
             <a:pPr algn="l" indent="0" marL="0">
               <a:buNone/>
@@ -17474,7 +17540,7 @@
                 <a:ea typeface="Calibri" pitchFamily="34" charset="-122"/>
                 <a:cs typeface="Calibri" pitchFamily="34" charset="-120"/>
               </a:rPr>
-              <a:t> system uses hormones, and an </a:t>
+              <a:t> released inside her body kept her going, and the </a:t>
             </a:r>
             <a:pPr algn="l" indent="0" marL="0">
               <a:buNone/>
@@ -17491,7 +17557,7 @@
                 <a:ea typeface="Calibri" pitchFamily="34" charset="-122"/>
                 <a:cs typeface="Calibri" pitchFamily="34" charset="-120"/>
               </a:rPr>
-              <a:t>endoscope</a:t>
+              <a:t>endoskeleton</a:t>
             </a:r>
             <a:pPr algn="l" indent="0" marL="0">
               <a:buNone/>
@@ -17505,7 +17571,7 @@
                 <a:ea typeface="Calibri" pitchFamily="34" charset="-122"/>
                 <a:cs typeface="Calibri" pitchFamily="34" charset="-120"/>
               </a:rPr>
-              <a:t> helps doctors see inside the body.</a:t>
+              <a:t> of her leg bones held strong.</a:t>
             </a:r>
             <a:endParaRPr lang="en-US" sz="1800" dirty="0"/>
           </a:p>
@@ -17660,7 +17726,7 @@
                 <a:ea typeface="Trebuchet MS" pitchFamily="34" charset="-122"/>
                 <a:cs typeface="Trebuchet MS" pitchFamily="34" charset="-120"/>
               </a:rPr>
-              <a:t>endoskeleton</a:t>
+              <a:t>endurance</a:t>
             </a:r>
             <a:endParaRPr lang="en-US" sz="1400" dirty="0"/>
           </a:p>
@@ -17788,7 +17854,7 @@
                 <a:ea typeface="Trebuchet MS" pitchFamily="34" charset="-122"/>
                 <a:cs typeface="Trebuchet MS" pitchFamily="34" charset="-120"/>
               </a:rPr>
-              <a:t>endocrine</a:t>
+              <a:t>endorphins</a:t>
             </a:r>
             <a:endParaRPr lang="en-US" sz="1400" dirty="0"/>
           </a:p>
@@ -17916,7 +17982,7 @@
                 <a:ea typeface="Trebuchet MS" pitchFamily="34" charset="-122"/>
                 <a:cs typeface="Trebuchet MS" pitchFamily="34" charset="-120"/>
               </a:rPr>
-              <a:t>endoscope</a:t>
+              <a:t>endoskeleton</a:t>
             </a:r>
             <a:endParaRPr lang="en-US" sz="1400" dirty="0"/>
           </a:p>
@@ -18247,7 +18313,7 @@
                 <a:ea typeface="Calibri" pitchFamily="34" charset="-122"/>
                 <a:cs typeface="Calibri" pitchFamily="34" charset="-120"/>
               </a:rPr>
-              <a:t>Word Labs  •  wordlabs.app  •  Root: 'endo' = within, inside, inner</a:t>
+              <a:t>Word Labs  •  wordlabs.app  •  Root: 'endo' = within, inside, internal</a:t>
             </a:r>
             <a:endParaRPr lang="en-US" sz="800" dirty="0"/>
           </a:p>
@@ -18386,7 +18452,7 @@
                 <a:ea typeface="Trebuchet MS" pitchFamily="34" charset="-122"/>
                 <a:cs typeface="Trebuchet MS" pitchFamily="34" charset="-120"/>
               </a:rPr>
-              <a:t>endoskeleton</a:t>
+              <a:t>endurance</a:t>
             </a:r>
             <a:endParaRPr lang="en-US" sz="2800" dirty="0"/>
           </a:p>
@@ -19074,7 +19140,7 @@
                 <a:ea typeface="Calibri" pitchFamily="34" charset="-122"/>
                 <a:cs typeface="Calibri" pitchFamily="34" charset="-120"/>
               </a:rPr>
-              <a:t>Word Labs  •  wordlabs.app  •  Root: 'endo' = within, inside, inner</a:t>
+              <a:t>Word Labs  •  wordlabs.app  •  Root: 'endo' = within, inside, internal</a:t>
             </a:r>
             <a:endParaRPr lang="en-US" sz="800" dirty="0"/>
           </a:p>
@@ -19213,7 +19279,7 @@
                 <a:ea typeface="Trebuchet MS" pitchFamily="34" charset="-122"/>
                 <a:cs typeface="Trebuchet MS" pitchFamily="34" charset="-120"/>
               </a:rPr>
-              <a:t>endoskeleton</a:t>
+              <a:t>endurance</a:t>
             </a:r>
             <a:endParaRPr lang="en-US" sz="2800" dirty="0"/>
           </a:p>
@@ -19302,11 +19368,11 @@
             </a:avLst>
           </a:prstGeom>
           <a:solidFill>
-            <a:srgbClr val="CCFBF1"/>
+            <a:srgbClr val="DDD6FE"/>
           </a:solidFill>
           <a:ln w="19050">
             <a:solidFill>
-              <a:srgbClr val="0D9488"/>
+              <a:srgbClr val="7C3AED"/>
             </a:solidFill>
             <a:prstDash val="solid"/>
           </a:ln>
@@ -19346,13 +19412,13 @@
             <a:r>
               <a:rPr lang="en-US" sz="1300" b="1" dirty="0">
                 <a:solidFill>
-                  <a:srgbClr val="0F766E"/>
+                  <a:srgbClr val="4C1D95"/>
                 </a:solidFill>
                 <a:latin typeface="Trebuchet MS" pitchFamily="34" charset="0"/>
                 <a:ea typeface="Trebuchet MS" pitchFamily="34" charset="-122"/>
                 <a:cs typeface="Trebuchet MS" pitchFamily="34" charset="-120"/>
               </a:rPr>
-              <a:t>endo</a:t>
+              <a:t>endur</a:t>
             </a:r>
             <a:endParaRPr lang="en-US" sz="1300" dirty="0"/>
           </a:p>
@@ -19391,7 +19457,7 @@
                 <a:ea typeface="Calibri" pitchFamily="34" charset="-122"/>
                 <a:cs typeface="Calibri" pitchFamily="34" charset="-120"/>
               </a:rPr>
-              <a:t>within, inside</a:t>
+              <a:t>to last, to hold within</a:t>
             </a:r>
             <a:endParaRPr lang="en-US" sz="850" dirty="0"/>
           </a:p>
@@ -19464,7 +19530,7 @@
                 <a:ea typeface="Trebuchet MS" pitchFamily="34" charset="-122"/>
                 <a:cs typeface="Trebuchet MS" pitchFamily="34" charset="-120"/>
               </a:rPr>
-              <a:t>skeleton</a:t>
+              <a:t>ance</a:t>
             </a:r>
             <a:endParaRPr lang="en-US" sz="1300" dirty="0"/>
           </a:p>
@@ -19503,7 +19569,7 @@
                 <a:ea typeface="Calibri" pitchFamily="34" charset="-122"/>
                 <a:cs typeface="Calibri" pitchFamily="34" charset="-120"/>
               </a:rPr>
-              <a:t>bony frame of the body</a:t>
+              <a:t>state or quality of</a:t>
             </a:r>
             <a:endParaRPr lang="en-US" sz="850" dirty="0"/>
           </a:p>
@@ -20059,7 +20125,7 @@
                 <a:ea typeface="Calibri" pitchFamily="34" charset="-122"/>
                 <a:cs typeface="Calibri" pitchFamily="34" charset="-120"/>
               </a:rPr>
-              <a:t>Word Labs  •  wordlabs.app  •  Root: 'endo' = within, inside, inner</a:t>
+              <a:t>Word Labs  •  wordlabs.app  •  Root: 'endo' = within, inside, internal</a:t>
             </a:r>
             <a:endParaRPr lang="en-US" sz="800" dirty="0"/>
           </a:p>
@@ -20198,7 +20264,7 @@
                 <a:ea typeface="Trebuchet MS" pitchFamily="34" charset="-122"/>
                 <a:cs typeface="Trebuchet MS" pitchFamily="34" charset="-120"/>
               </a:rPr>
-              <a:t>endoskeleton</a:t>
+              <a:t>endurance</a:t>
             </a:r>
             <a:endParaRPr lang="en-US" sz="2800" dirty="0"/>
           </a:p>
@@ -20287,11 +20353,11 @@
             </a:avLst>
           </a:prstGeom>
           <a:solidFill>
-            <a:srgbClr val="CCFBF1"/>
+            <a:srgbClr val="DDD6FE"/>
           </a:solidFill>
           <a:ln w="19050">
             <a:solidFill>
-              <a:srgbClr val="0D9488"/>
+              <a:srgbClr val="7C3AED"/>
             </a:solidFill>
             <a:prstDash val="solid"/>
           </a:ln>
@@ -20331,13 +20397,13 @@
             <a:r>
               <a:rPr lang="en-US" sz="1300" b="1" dirty="0">
                 <a:solidFill>
-                  <a:srgbClr val="0F766E"/>
+                  <a:srgbClr val="4C1D95"/>
                 </a:solidFill>
                 <a:latin typeface="Trebuchet MS" pitchFamily="34" charset="0"/>
                 <a:ea typeface="Trebuchet MS" pitchFamily="34" charset="-122"/>
                 <a:cs typeface="Trebuchet MS" pitchFamily="34" charset="-120"/>
               </a:rPr>
-              <a:t>endo</a:t>
+              <a:t>endur</a:t>
             </a:r>
             <a:endParaRPr lang="en-US" sz="1300" dirty="0"/>
           </a:p>
@@ -20376,7 +20442,7 @@
                 <a:ea typeface="Calibri" pitchFamily="34" charset="-122"/>
                 <a:cs typeface="Calibri" pitchFamily="34" charset="-120"/>
               </a:rPr>
-              <a:t>within, inside</a:t>
+              <a:t>to last, to hold within</a:t>
             </a:r>
             <a:endParaRPr lang="en-US" sz="850" dirty="0"/>
           </a:p>
@@ -20449,7 +20515,7 @@
                 <a:ea typeface="Trebuchet MS" pitchFamily="34" charset="-122"/>
                 <a:cs typeface="Trebuchet MS" pitchFamily="34" charset="-120"/>
               </a:rPr>
-              <a:t>skeleton</a:t>
+              <a:t>ance</a:t>
             </a:r>
             <a:endParaRPr lang="en-US" sz="1300" dirty="0"/>
           </a:p>
@@ -20488,7 +20554,7 @@
                 <a:ea typeface="Calibri" pitchFamily="34" charset="-122"/>
                 <a:cs typeface="Calibri" pitchFamily="34" charset="-120"/>
               </a:rPr>
-              <a:t>bony frame of the body</a:t>
+              <a:t>state or quality of</a:t>
             </a:r>
             <a:endParaRPr lang="en-US" sz="850" dirty="0"/>
           </a:p>
@@ -20595,8 +20661,8 @@
         </p:nvSpPr>
         <p:spPr>
           <a:xfrm>
-            <a:off x="1978152" y="3364992"/>
-            <a:ext cx="1225296" cy="475488"/>
+            <a:off x="2313432" y="3364992"/>
+            <a:ext cx="1645920" cy="475488"/>
           </a:xfrm>
           <a:prstGeom prst="rect">
             <a:avLst>
@@ -20622,8 +20688,8 @@
         </p:nvSpPr>
         <p:spPr>
           <a:xfrm>
-            <a:off x="1978152" y="3364992"/>
-            <a:ext cx="1225296" cy="475488"/>
+            <a:off x="2313432" y="3364992"/>
+            <a:ext cx="1645920" cy="475488"/>
           </a:xfrm>
           <a:prstGeom prst="rect">
             <a:avLst/>
@@ -20661,8 +20727,8 @@
         </p:nvSpPr>
         <p:spPr>
           <a:xfrm>
-            <a:off x="3203448" y="3364992"/>
-            <a:ext cx="76200" cy="475488"/>
+            <a:off x="3959352" y="3364992"/>
+            <a:ext cx="411480" cy="475488"/>
           </a:xfrm>
           <a:prstGeom prst="rect">
             <a:avLst/>
@@ -20700,8 +20766,8 @@
         </p:nvSpPr>
         <p:spPr>
           <a:xfrm>
-            <a:off x="3279648" y="3364992"/>
-            <a:ext cx="1225296" cy="475488"/>
+            <a:off x="4370832" y="3364992"/>
+            <a:ext cx="1645920" cy="475488"/>
           </a:xfrm>
           <a:prstGeom prst="rect">
             <a:avLst>
@@ -20727,8 +20793,8 @@
         </p:nvSpPr>
         <p:spPr>
           <a:xfrm>
-            <a:off x="3279648" y="3364992"/>
-            <a:ext cx="1225296" cy="475488"/>
+            <a:off x="4370832" y="3364992"/>
+            <a:ext cx="1645920" cy="475488"/>
           </a:xfrm>
           <a:prstGeom prst="rect">
             <a:avLst/>
@@ -20752,7 +20818,7 @@
                 <a:ea typeface="Trebuchet MS" pitchFamily="34" charset="-122"/>
                 <a:cs typeface="Trebuchet MS" pitchFamily="34" charset="-120"/>
               </a:rPr>
-              <a:t>do</a:t>
+              <a:t>dur</a:t>
             </a:r>
             <a:endParaRPr lang="en-US" sz="1400" dirty="0"/>
           </a:p>
@@ -20766,8 +20832,8 @@
         </p:nvSpPr>
         <p:spPr>
           <a:xfrm>
-            <a:off x="4504944" y="3364992"/>
-            <a:ext cx="76200" cy="475488"/>
+            <a:off x="6016752" y="3364992"/>
+            <a:ext cx="411480" cy="475488"/>
           </a:xfrm>
           <a:prstGeom prst="rect">
             <a:avLst/>
@@ -20805,8 +20871,8 @@
         </p:nvSpPr>
         <p:spPr>
           <a:xfrm>
-            <a:off x="4581144" y="3364992"/>
-            <a:ext cx="1225296" cy="475488"/>
+            <a:off x="6428232" y="3364992"/>
+            <a:ext cx="1645920" cy="475488"/>
           </a:xfrm>
           <a:prstGeom prst="rect">
             <a:avLst>
@@ -20832,8 +20898,8 @@
         </p:nvSpPr>
         <p:spPr>
           <a:xfrm>
-            <a:off x="4581144" y="3364992"/>
-            <a:ext cx="1225296" cy="475488"/>
+            <a:off x="6428232" y="3364992"/>
+            <a:ext cx="1645920" cy="475488"/>
           </a:xfrm>
           <a:prstGeom prst="rect">
             <a:avLst/>
@@ -20857,7 +20923,7 @@
                 <a:ea typeface="Trebuchet MS" pitchFamily="34" charset="-122"/>
                 <a:cs typeface="Trebuchet MS" pitchFamily="34" charset="-120"/>
               </a:rPr>
-              <a:t>skel</a:t>
+              <a:t>ance</a:t>
             </a:r>
             <a:endParaRPr lang="en-US" sz="1400" dirty="0"/>
           </a:p>
@@ -20865,224 +20931,80 @@
       </p:sp>
       <p:sp>
         <p:nvSpPr>
-          <p:cNvPr id="33" name="Text 31"/>
-          <p:cNvSpPr/>
-          <p:nvPr/>
-        </p:nvSpPr>
-        <p:spPr>
-          <a:xfrm>
-            <a:off x="5806440" y="3364992"/>
-            <a:ext cx="76200" cy="475488"/>
-          </a:xfrm>
-          <a:prstGeom prst="rect">
-            <a:avLst/>
-          </a:prstGeom>
-          <a:noFill/>
-          <a:ln/>
-        </p:spPr>
-        <p:txBody>
-          <a:bodyPr wrap="square" lIns="0" tIns="0" rIns="0" bIns="0" rtlCol="0" anchor="ctr"/>
-          <a:lstStyle/>
-          <a:p>
-            <a:pPr algn="ctr" indent="0" marL="0">
-              <a:buNone/>
-            </a:pPr>
-            <a:r>
-              <a:rPr lang="en-US" sz="1600" b="1" dirty="0">
-                <a:solidFill>
-                  <a:srgbClr val="0D9488"/>
+          <p:cNvPr id="33" name="Shape 31"/>
+          <p:cNvSpPr/>
+          <p:nvPr/>
+        </p:nvSpPr>
+        <p:spPr>
+          <a:xfrm>
+            <a:off x="365760" y="4096512"/>
+            <a:ext cx="1371600" cy="804672"/>
+          </a:xfrm>
+          <a:prstGeom prst="rect">
+            <a:avLst>
+              <a:gd name="adj" fmla="val 6818"/>
+            </a:avLst>
+          </a:prstGeom>
+          <a:solidFill>
+            <a:srgbClr val="E2E8F0"/>
+          </a:solidFill>
+          <a:ln w="12700">
+            <a:solidFill>
+              <a:srgbClr val="E2E8F0"/>
+            </a:solidFill>
+            <a:prstDash val="solid"/>
+          </a:ln>
+        </p:spPr>
+      </p:sp>
+      <p:sp>
+        <p:nvSpPr>
+          <p:cNvPr id="34" name="Text 32"/>
+          <p:cNvSpPr/>
+          <p:nvPr/>
+        </p:nvSpPr>
+        <p:spPr>
+          <a:xfrm>
+            <a:off x="365760" y="4096512"/>
+            <a:ext cx="1371600" cy="804672"/>
+          </a:xfrm>
+          <a:prstGeom prst="rect">
+            <a:avLst/>
+          </a:prstGeom>
+          <a:noFill/>
+          <a:ln/>
+        </p:spPr>
+        <p:txBody>
+          <a:bodyPr wrap="square" lIns="0" tIns="0" rIns="0" bIns="0" rtlCol="0" anchor="ctr"/>
+          <a:lstStyle/>
+          <a:p>
+            <a:pPr algn="ctr" indent="0" marL="0">
+              <a:buNone/>
+            </a:pPr>
+            <a:r>
+              <a:rPr lang="en-US" sz="1100" b="1" dirty="0">
+                <a:solidFill>
+                  <a:srgbClr val="475569"/>
                 </a:solidFill>
                 <a:latin typeface="Trebuchet MS" pitchFamily="34" charset="0"/>
                 <a:ea typeface="Trebuchet MS" pitchFamily="34" charset="-122"/>
                 <a:cs typeface="Trebuchet MS" pitchFamily="34" charset="-120"/>
               </a:rPr>
-              <a:t>·</a:t>
-            </a:r>
-            <a:endParaRPr lang="en-US" sz="1600" dirty="0"/>
-          </a:p>
-        </p:txBody>
-      </p:sp>
-      <p:sp>
-        <p:nvSpPr>
-          <p:cNvPr id="34" name="Shape 32"/>
-          <p:cNvSpPr/>
-          <p:nvPr/>
-        </p:nvSpPr>
-        <p:spPr>
-          <a:xfrm>
-            <a:off x="5882640" y="3364992"/>
-            <a:ext cx="1225296" cy="475488"/>
-          </a:xfrm>
-          <a:prstGeom prst="rect">
-            <a:avLst>
-              <a:gd name="adj" fmla="val 9615"/>
-            </a:avLst>
-          </a:prstGeom>
-          <a:solidFill>
-            <a:srgbClr val="FFFFFF"/>
-          </a:solidFill>
-          <a:ln w="12700">
-            <a:solidFill>
-              <a:srgbClr val="0D9488"/>
-            </a:solidFill>
-            <a:prstDash val="solid"/>
-          </a:ln>
-        </p:spPr>
-      </p:sp>
-      <p:sp>
-        <p:nvSpPr>
-          <p:cNvPr id="35" name="Text 33"/>
-          <p:cNvSpPr/>
-          <p:nvPr/>
-        </p:nvSpPr>
-        <p:spPr>
-          <a:xfrm>
-            <a:off x="5882640" y="3364992"/>
-            <a:ext cx="1225296" cy="475488"/>
-          </a:xfrm>
-          <a:prstGeom prst="rect">
-            <a:avLst/>
-          </a:prstGeom>
-          <a:noFill/>
-          <a:ln/>
-        </p:spPr>
-        <p:txBody>
-          <a:bodyPr wrap="square" lIns="0" tIns="0" rIns="0" bIns="0" rtlCol="0" anchor="ctr"/>
-          <a:lstStyle/>
-          <a:p>
-            <a:pPr algn="ctr" indent="0" marL="0">
-              <a:buNone/>
-            </a:pPr>
-            <a:r>
-              <a:rPr lang="en-US" sz="1400" b="1" dirty="0">
-                <a:solidFill>
-                  <a:srgbClr val="0D9488"/>
-                </a:solidFill>
-                <a:latin typeface="Trebuchet MS" pitchFamily="34" charset="0"/>
-                <a:ea typeface="Trebuchet MS" pitchFamily="34" charset="-122"/>
-                <a:cs typeface="Trebuchet MS" pitchFamily="34" charset="-120"/>
-              </a:rPr>
-              <a:t>e</a:t>
-            </a:r>
-            <a:endParaRPr lang="en-US" sz="1400" dirty="0"/>
-          </a:p>
-        </p:txBody>
-      </p:sp>
-      <p:sp>
-        <p:nvSpPr>
-          <p:cNvPr id="36" name="Text 34"/>
-          <p:cNvSpPr/>
-          <p:nvPr/>
-        </p:nvSpPr>
-        <p:spPr>
-          <a:xfrm>
-            <a:off x="7107936" y="3364992"/>
-            <a:ext cx="76200" cy="475488"/>
-          </a:xfrm>
-          <a:prstGeom prst="rect">
-            <a:avLst/>
-          </a:prstGeom>
-          <a:noFill/>
-          <a:ln/>
-        </p:spPr>
-        <p:txBody>
-          <a:bodyPr wrap="square" lIns="0" tIns="0" rIns="0" bIns="0" rtlCol="0" anchor="ctr"/>
-          <a:lstStyle/>
-          <a:p>
-            <a:pPr algn="ctr" indent="0" marL="0">
-              <a:buNone/>
-            </a:pPr>
-            <a:r>
-              <a:rPr lang="en-US" sz="1600" b="1" dirty="0">
-                <a:solidFill>
-                  <a:srgbClr val="0D9488"/>
-                </a:solidFill>
-                <a:latin typeface="Trebuchet MS" pitchFamily="34" charset="0"/>
-                <a:ea typeface="Trebuchet MS" pitchFamily="34" charset="-122"/>
-                <a:cs typeface="Trebuchet MS" pitchFamily="34" charset="-120"/>
-              </a:rPr>
-              <a:t>·</a:t>
-            </a:r>
-            <a:endParaRPr lang="en-US" sz="1600" dirty="0"/>
-          </a:p>
-        </p:txBody>
-      </p:sp>
-      <p:sp>
-        <p:nvSpPr>
-          <p:cNvPr id="37" name="Shape 35"/>
-          <p:cNvSpPr/>
-          <p:nvPr/>
-        </p:nvSpPr>
-        <p:spPr>
-          <a:xfrm>
-            <a:off x="7184136" y="3364992"/>
-            <a:ext cx="1225296" cy="475488"/>
-          </a:xfrm>
-          <a:prstGeom prst="rect">
-            <a:avLst>
-              <a:gd name="adj" fmla="val 9615"/>
-            </a:avLst>
-          </a:prstGeom>
-          <a:solidFill>
-            <a:srgbClr val="FFFFFF"/>
-          </a:solidFill>
-          <a:ln w="12700">
-            <a:solidFill>
-              <a:srgbClr val="0D9488"/>
-            </a:solidFill>
-            <a:prstDash val="solid"/>
-          </a:ln>
-        </p:spPr>
-      </p:sp>
-      <p:sp>
-        <p:nvSpPr>
-          <p:cNvPr id="38" name="Text 36"/>
-          <p:cNvSpPr/>
-          <p:nvPr/>
-        </p:nvSpPr>
-        <p:spPr>
-          <a:xfrm>
-            <a:off x="7184136" y="3364992"/>
-            <a:ext cx="1225296" cy="475488"/>
-          </a:xfrm>
-          <a:prstGeom prst="rect">
-            <a:avLst/>
-          </a:prstGeom>
-          <a:noFill/>
-          <a:ln/>
-        </p:spPr>
-        <p:txBody>
-          <a:bodyPr wrap="square" lIns="0" tIns="0" rIns="0" bIns="0" rtlCol="0" anchor="ctr"/>
-          <a:lstStyle/>
-          <a:p>
-            <a:pPr algn="ctr" indent="0" marL="0">
-              <a:buNone/>
-            </a:pPr>
-            <a:r>
-              <a:rPr lang="en-US" sz="1400" b="1" dirty="0">
-                <a:solidFill>
-                  <a:srgbClr val="0D9488"/>
-                </a:solidFill>
-                <a:latin typeface="Trebuchet MS" pitchFamily="34" charset="0"/>
-                <a:ea typeface="Trebuchet MS" pitchFamily="34" charset="-122"/>
-                <a:cs typeface="Trebuchet MS" pitchFamily="34" charset="-120"/>
-              </a:rPr>
-              <a:t>ton</a:t>
-            </a:r>
-            <a:endParaRPr lang="en-US" sz="1400" dirty="0"/>
-          </a:p>
-        </p:txBody>
-      </p:sp>
-      <p:sp>
-        <p:nvSpPr>
-          <p:cNvPr id="39" name="Shape 37"/>
-          <p:cNvSpPr/>
-          <p:nvPr/>
-        </p:nvSpPr>
-        <p:spPr>
-          <a:xfrm>
-            <a:off x="365760" y="4096512"/>
-            <a:ext cx="1371600" cy="804672"/>
+              <a:t>Phonemes</a:t>
+            </a:r>
+            <a:endParaRPr lang="en-US" sz="1100" dirty="0"/>
+          </a:p>
+        </p:txBody>
+      </p:sp>
+      <p:sp>
+        <p:nvSpPr>
+          <p:cNvPr id="35" name="Shape 33"/>
+          <p:cNvSpPr/>
+          <p:nvPr/>
+        </p:nvSpPr>
+        <p:spPr>
+          <a:xfrm>
+            <a:off x="1874520" y="4096512"/>
+            <a:ext cx="6903720" cy="804672"/>
           </a:xfrm>
           <a:prstGeom prst="rect">
             <a:avLst>
@@ -21090,85 +21012,19 @@
             </a:avLst>
           </a:prstGeom>
           <a:solidFill>
-            <a:srgbClr val="E2E8F0"/>
+            <a:srgbClr val="F8FAFC"/>
           </a:solidFill>
           <a:ln w="12700">
             <a:solidFill>
               <a:srgbClr val="E2E8F0"/>
             </a:solidFill>
-            <a:prstDash val="solid"/>
-          </a:ln>
-        </p:spPr>
-      </p:sp>
-      <p:sp>
-        <p:nvSpPr>
-          <p:cNvPr id="40" name="Text 38"/>
-          <p:cNvSpPr/>
-          <p:nvPr/>
-        </p:nvSpPr>
-        <p:spPr>
-          <a:xfrm>
-            <a:off x="365760" y="4096512"/>
-            <a:ext cx="1371600" cy="804672"/>
-          </a:xfrm>
-          <a:prstGeom prst="rect">
-            <a:avLst/>
-          </a:prstGeom>
-          <a:noFill/>
-          <a:ln/>
-        </p:spPr>
-        <p:txBody>
-          <a:bodyPr wrap="square" lIns="0" tIns="0" rIns="0" bIns="0" rtlCol="0" anchor="ctr"/>
-          <a:lstStyle/>
-          <a:p>
-            <a:pPr algn="ctr" indent="0" marL="0">
-              <a:buNone/>
-            </a:pPr>
-            <a:r>
-              <a:rPr lang="en-US" sz="1100" b="1" dirty="0">
-                <a:solidFill>
-                  <a:srgbClr val="475569"/>
-                </a:solidFill>
-                <a:latin typeface="Trebuchet MS" pitchFamily="34" charset="0"/>
-                <a:ea typeface="Trebuchet MS" pitchFamily="34" charset="-122"/>
-                <a:cs typeface="Trebuchet MS" pitchFamily="34" charset="-120"/>
-              </a:rPr>
-              <a:t>Phonemes</a:t>
-            </a:r>
-            <a:endParaRPr lang="en-US" sz="1100" dirty="0"/>
-          </a:p>
-        </p:txBody>
-      </p:sp>
-      <p:sp>
-        <p:nvSpPr>
-          <p:cNvPr id="41" name="Shape 39"/>
-          <p:cNvSpPr/>
-          <p:nvPr/>
-        </p:nvSpPr>
-        <p:spPr>
-          <a:xfrm>
-            <a:off x="1874520" y="4096512"/>
-            <a:ext cx="6903720" cy="804672"/>
-          </a:xfrm>
-          <a:prstGeom prst="rect">
-            <a:avLst>
-              <a:gd name="adj" fmla="val 6818"/>
-            </a:avLst>
-          </a:prstGeom>
-          <a:solidFill>
-            <a:srgbClr val="F8FAFC"/>
-          </a:solidFill>
-          <a:ln w="12700">
-            <a:solidFill>
-              <a:srgbClr val="E2E8F0"/>
-            </a:solidFill>
             <a:prstDash val="dash"/>
           </a:ln>
         </p:spPr>
       </p:sp>
       <p:sp>
         <p:nvSpPr>
-          <p:cNvPr id="42" name="Text 40"/>
+          <p:cNvPr id="36" name="Text 34"/>
           <p:cNvSpPr/>
           <p:nvPr/>
         </p:nvSpPr>
@@ -21491,7 +21347,7 @@
                 <a:ea typeface="Calibri" pitchFamily="34" charset="-122"/>
                 <a:cs typeface="Calibri" pitchFamily="34" charset="-120"/>
               </a:rPr>
-              <a:t>Word Labs  •  wordlabs.app  •  Root: 'endo' = within, inside, inner</a:t>
+              <a:t>Word Labs  •  wordlabs.app  •  Root: 'endo' = within, inside, internal</a:t>
             </a:r>
             <a:endParaRPr lang="en-US" sz="800" dirty="0"/>
           </a:p>
@@ -21630,7 +21486,7 @@
                 <a:ea typeface="Trebuchet MS" pitchFamily="34" charset="-122"/>
                 <a:cs typeface="Trebuchet MS" pitchFamily="34" charset="-120"/>
               </a:rPr>
-              <a:t>endoskeleton</a:t>
+              <a:t>endurance</a:t>
             </a:r>
             <a:endParaRPr lang="en-US" sz="2800" dirty="0"/>
           </a:p>
@@ -21719,11 +21575,11 @@
             </a:avLst>
           </a:prstGeom>
           <a:solidFill>
-            <a:srgbClr val="CCFBF1"/>
+            <a:srgbClr val="DDD6FE"/>
           </a:solidFill>
           <a:ln w="19050">
             <a:solidFill>
-              <a:srgbClr val="0D9488"/>
+              <a:srgbClr val="7C3AED"/>
             </a:solidFill>
             <a:prstDash val="solid"/>
           </a:ln>
@@ -21763,13 +21619,13 @@
             <a:r>
               <a:rPr lang="en-US" sz="1300" b="1" dirty="0">
                 <a:solidFill>
-                  <a:srgbClr val="0F766E"/>
+                  <a:srgbClr val="4C1D95"/>
                 </a:solidFill>
                 <a:latin typeface="Trebuchet MS" pitchFamily="34" charset="0"/>
                 <a:ea typeface="Trebuchet MS" pitchFamily="34" charset="-122"/>
                 <a:cs typeface="Trebuchet MS" pitchFamily="34" charset="-120"/>
               </a:rPr>
-              <a:t>endo</a:t>
+              <a:t>endur</a:t>
             </a:r>
             <a:endParaRPr lang="en-US" sz="1300" dirty="0"/>
           </a:p>
@@ -21808,7 +21664,7 @@
                 <a:ea typeface="Calibri" pitchFamily="34" charset="-122"/>
                 <a:cs typeface="Calibri" pitchFamily="34" charset="-120"/>
               </a:rPr>
-              <a:t>within, inside</a:t>
+              <a:t>to last, to hold within</a:t>
             </a:r>
             <a:endParaRPr lang="en-US" sz="850" dirty="0"/>
           </a:p>
@@ -21881,7 +21737,7 @@
                 <a:ea typeface="Trebuchet MS" pitchFamily="34" charset="-122"/>
                 <a:cs typeface="Trebuchet MS" pitchFamily="34" charset="-120"/>
               </a:rPr>
-              <a:t>skeleton</a:t>
+              <a:t>ance</a:t>
             </a:r>
             <a:endParaRPr lang="en-US" sz="1300" dirty="0"/>
           </a:p>
@@ -21920,7 +21776,7 @@
                 <a:ea typeface="Calibri" pitchFamily="34" charset="-122"/>
                 <a:cs typeface="Calibri" pitchFamily="34" charset="-120"/>
               </a:rPr>
-              <a:t>bony frame of the body</a:t>
+              <a:t>state or quality of</a:t>
             </a:r>
             <a:endParaRPr lang="en-US" sz="850" dirty="0"/>
           </a:p>
@@ -22027,8 +21883,8 @@
         </p:nvSpPr>
         <p:spPr>
           <a:xfrm>
-            <a:off x="1978152" y="3364992"/>
-            <a:ext cx="1225296" cy="475488"/>
+            <a:off x="2313432" y="3364992"/>
+            <a:ext cx="1645920" cy="475488"/>
           </a:xfrm>
           <a:prstGeom prst="rect">
             <a:avLst>
@@ -22054,8 +21910,8 @@
         </p:nvSpPr>
         <p:spPr>
           <a:xfrm>
-            <a:off x="1978152" y="3364992"/>
-            <a:ext cx="1225296" cy="475488"/>
+            <a:off x="2313432" y="3364992"/>
+            <a:ext cx="1645920" cy="475488"/>
           </a:xfrm>
           <a:prstGeom prst="rect">
             <a:avLst/>
@@ -22093,8 +21949,8 @@
         </p:nvSpPr>
         <p:spPr>
           <a:xfrm>
-            <a:off x="3203448" y="3364992"/>
-            <a:ext cx="76200" cy="475488"/>
+            <a:off x="3959352" y="3364992"/>
+            <a:ext cx="411480" cy="475488"/>
           </a:xfrm>
           <a:prstGeom prst="rect">
             <a:avLst/>
@@ -22132,8 +21988,8 @@
         </p:nvSpPr>
         <p:spPr>
           <a:xfrm>
-            <a:off x="3279648" y="3364992"/>
-            <a:ext cx="1225296" cy="475488"/>
+            <a:off x="4370832" y="3364992"/>
+            <a:ext cx="1645920" cy="475488"/>
           </a:xfrm>
           <a:prstGeom prst="rect">
             <a:avLst>
@@ -22159,8 +22015,8 @@
         </p:nvSpPr>
         <p:spPr>
           <a:xfrm>
-            <a:off x="3279648" y="3364992"/>
-            <a:ext cx="1225296" cy="475488"/>
+            <a:off x="4370832" y="3364992"/>
+            <a:ext cx="1645920" cy="475488"/>
           </a:xfrm>
           <a:prstGeom prst="rect">
             <a:avLst/>
@@ -22184,7 +22040,7 @@
                 <a:ea typeface="Trebuchet MS" pitchFamily="34" charset="-122"/>
                 <a:cs typeface="Trebuchet MS" pitchFamily="34" charset="-120"/>
               </a:rPr>
-              <a:t>do</a:t>
+              <a:t>dur</a:t>
             </a:r>
             <a:endParaRPr lang="en-US" sz="1400" dirty="0"/>
           </a:p>
@@ -22198,8 +22054,8 @@
         </p:nvSpPr>
         <p:spPr>
           <a:xfrm>
-            <a:off x="4504944" y="3364992"/>
-            <a:ext cx="76200" cy="475488"/>
+            <a:off x="6016752" y="3364992"/>
+            <a:ext cx="411480" cy="475488"/>
           </a:xfrm>
           <a:prstGeom prst="rect">
             <a:avLst/>
@@ -22237,8 +22093,8 @@
         </p:nvSpPr>
         <p:spPr>
           <a:xfrm>
-            <a:off x="4581144" y="3364992"/>
-            <a:ext cx="1225296" cy="475488"/>
+            <a:off x="6428232" y="3364992"/>
+            <a:ext cx="1645920" cy="475488"/>
           </a:xfrm>
           <a:prstGeom prst="rect">
             <a:avLst>
@@ -22264,8 +22120,8 @@
         </p:nvSpPr>
         <p:spPr>
           <a:xfrm>
-            <a:off x="4581144" y="3364992"/>
-            <a:ext cx="1225296" cy="475488"/>
+            <a:off x="6428232" y="3364992"/>
+            <a:ext cx="1645920" cy="475488"/>
           </a:xfrm>
           <a:prstGeom prst="rect">
             <a:avLst/>
@@ -22289,7 +22145,7 @@
                 <a:ea typeface="Trebuchet MS" pitchFamily="34" charset="-122"/>
                 <a:cs typeface="Trebuchet MS" pitchFamily="34" charset="-120"/>
               </a:rPr>
-              <a:t>skel</a:t>
+              <a:t>ance</a:t>
             </a:r>
             <a:endParaRPr lang="en-US" sz="1400" dirty="0"/>
           </a:p>
@@ -22297,98 +22153,152 @@
       </p:sp>
       <p:sp>
         <p:nvSpPr>
-          <p:cNvPr id="33" name="Text 31"/>
-          <p:cNvSpPr/>
-          <p:nvPr/>
-        </p:nvSpPr>
-        <p:spPr>
-          <a:xfrm>
-            <a:off x="5806440" y="3364992"/>
-            <a:ext cx="76200" cy="475488"/>
-          </a:xfrm>
-          <a:prstGeom prst="rect">
-            <a:avLst/>
-          </a:prstGeom>
-          <a:noFill/>
-          <a:ln/>
-        </p:spPr>
-        <p:txBody>
-          <a:bodyPr wrap="square" lIns="0" tIns="0" rIns="0" bIns="0" rtlCol="0" anchor="ctr"/>
-          <a:lstStyle/>
-          <a:p>
-            <a:pPr algn="ctr" indent="0" marL="0">
-              <a:buNone/>
-            </a:pPr>
-            <a:r>
-              <a:rPr lang="en-US" sz="1600" b="1" dirty="0">
-                <a:solidFill>
-                  <a:srgbClr val="0D9488"/>
+          <p:cNvPr id="33" name="Shape 31"/>
+          <p:cNvSpPr/>
+          <p:nvPr/>
+        </p:nvSpPr>
+        <p:spPr>
+          <a:xfrm>
+            <a:off x="365760" y="4096512"/>
+            <a:ext cx="1371600" cy="804672"/>
+          </a:xfrm>
+          <a:prstGeom prst="rect">
+            <a:avLst>
+              <a:gd name="adj" fmla="val 6818"/>
+            </a:avLst>
+          </a:prstGeom>
+          <a:solidFill>
+            <a:srgbClr val="E2E8F0"/>
+          </a:solidFill>
+          <a:ln w="12700">
+            <a:solidFill>
+              <a:srgbClr val="E2E8F0"/>
+            </a:solidFill>
+            <a:prstDash val="solid"/>
+          </a:ln>
+        </p:spPr>
+      </p:sp>
+      <p:sp>
+        <p:nvSpPr>
+          <p:cNvPr id="34" name="Text 32"/>
+          <p:cNvSpPr/>
+          <p:nvPr/>
+        </p:nvSpPr>
+        <p:spPr>
+          <a:xfrm>
+            <a:off x="365760" y="4096512"/>
+            <a:ext cx="1371600" cy="804672"/>
+          </a:xfrm>
+          <a:prstGeom prst="rect">
+            <a:avLst/>
+          </a:prstGeom>
+          <a:noFill/>
+          <a:ln/>
+        </p:spPr>
+        <p:txBody>
+          <a:bodyPr wrap="square" lIns="0" tIns="0" rIns="0" bIns="0" rtlCol="0" anchor="ctr"/>
+          <a:lstStyle/>
+          <a:p>
+            <a:pPr algn="ctr" indent="0" marL="0">
+              <a:buNone/>
+            </a:pPr>
+            <a:r>
+              <a:rPr lang="en-US" sz="1100" b="1" dirty="0">
+                <a:solidFill>
+                  <a:srgbClr val="475569"/>
                 </a:solidFill>
                 <a:latin typeface="Trebuchet MS" pitchFamily="34" charset="0"/>
                 <a:ea typeface="Trebuchet MS" pitchFamily="34" charset="-122"/>
                 <a:cs typeface="Trebuchet MS" pitchFamily="34" charset="-120"/>
               </a:rPr>
-              <a:t>·</a:t>
-            </a:r>
-            <a:endParaRPr lang="en-US" sz="1600" dirty="0"/>
-          </a:p>
-        </p:txBody>
-      </p:sp>
-      <p:sp>
-        <p:nvSpPr>
-          <p:cNvPr id="34" name="Shape 32"/>
-          <p:cNvSpPr/>
-          <p:nvPr/>
-        </p:nvSpPr>
-        <p:spPr>
-          <a:xfrm>
-            <a:off x="5882640" y="3364992"/>
-            <a:ext cx="1225296" cy="475488"/>
+              <a:t>Phonemes</a:t>
+            </a:r>
+            <a:endParaRPr lang="en-US" sz="1100" dirty="0"/>
+          </a:p>
+        </p:txBody>
+      </p:sp>
+      <p:sp>
+        <p:nvSpPr>
+          <p:cNvPr id="35" name="Shape 33"/>
+          <p:cNvSpPr/>
+          <p:nvPr/>
+        </p:nvSpPr>
+        <p:spPr>
+          <a:xfrm>
+            <a:off x="1874520" y="4096512"/>
+            <a:ext cx="6903720" cy="804672"/>
           </a:xfrm>
           <a:prstGeom prst="rect">
             <a:avLst>
-              <a:gd name="adj" fmla="val 9615"/>
+              <a:gd name="adj" fmla="val 6818"/>
             </a:avLst>
           </a:prstGeom>
           <a:solidFill>
+            <a:srgbClr val="FCE7F3"/>
+          </a:solidFill>
+          <a:ln w="12700">
+            <a:solidFill>
+              <a:srgbClr val="DB2777"/>
+            </a:solidFill>
+            <a:prstDash val="solid"/>
+          </a:ln>
+        </p:spPr>
+      </p:sp>
+      <p:sp>
+        <p:nvSpPr>
+          <p:cNvPr id="36" name="Shape 34"/>
+          <p:cNvSpPr/>
+          <p:nvPr/>
+        </p:nvSpPr>
+        <p:spPr>
+          <a:xfrm>
+            <a:off x="2124837" y="4169664"/>
+            <a:ext cx="685800" cy="384048"/>
+          </a:xfrm>
+          <a:prstGeom prst="rect">
+            <a:avLst>
+              <a:gd name="adj" fmla="val 9524"/>
+            </a:avLst>
+          </a:prstGeom>
+          <a:solidFill>
             <a:srgbClr val="FFFFFF"/>
           </a:solidFill>
           <a:ln w="12700">
             <a:solidFill>
-              <a:srgbClr val="0D9488"/>
-            </a:solidFill>
-            <a:prstDash val="solid"/>
-          </a:ln>
-        </p:spPr>
-      </p:sp>
-      <p:sp>
-        <p:nvSpPr>
-          <p:cNvPr id="35" name="Text 33"/>
-          <p:cNvSpPr/>
-          <p:nvPr/>
-        </p:nvSpPr>
-        <p:spPr>
-          <a:xfrm>
-            <a:off x="5882640" y="3364992"/>
-            <a:ext cx="1225296" cy="475488"/>
-          </a:xfrm>
-          <a:prstGeom prst="rect">
-            <a:avLst/>
-          </a:prstGeom>
-          <a:noFill/>
-          <a:ln/>
-        </p:spPr>
-        <p:txBody>
-          <a:bodyPr wrap="square" lIns="0" tIns="0" rIns="0" bIns="0" rtlCol="0" anchor="ctr"/>
-          <a:lstStyle/>
-          <a:p>
-            <a:pPr algn="ctr" indent="0" marL="0">
-              <a:buNone/>
-            </a:pPr>
-            <a:r>
-              <a:rPr lang="en-US" sz="1400" b="1" dirty="0">
-                <a:solidFill>
-                  <a:srgbClr val="0D9488"/>
+              <a:srgbClr val="DB2777"/>
+            </a:solidFill>
+            <a:prstDash val="solid"/>
+          </a:ln>
+        </p:spPr>
+      </p:sp>
+      <p:sp>
+        <p:nvSpPr>
+          <p:cNvPr id="37" name="Text 35"/>
+          <p:cNvSpPr/>
+          <p:nvPr/>
+        </p:nvSpPr>
+        <p:spPr>
+          <a:xfrm>
+            <a:off x="2124837" y="4169664"/>
+            <a:ext cx="685800" cy="384048"/>
+          </a:xfrm>
+          <a:prstGeom prst="rect">
+            <a:avLst/>
+          </a:prstGeom>
+          <a:noFill/>
+          <a:ln/>
+        </p:spPr>
+        <p:txBody>
+          <a:bodyPr wrap="square" lIns="0" tIns="0" rIns="0" bIns="0" rtlCol="0" anchor="ctr"/>
+          <a:lstStyle/>
+          <a:p>
+            <a:pPr algn="ctr" indent="0" marL="0">
+              <a:buNone/>
+            </a:pPr>
+            <a:r>
+              <a:rPr lang="en-US" sz="900" b="1" dirty="0">
+                <a:solidFill>
+                  <a:srgbClr val="9D174D"/>
                 </a:solidFill>
                 <a:latin typeface="Trebuchet MS" pitchFamily="34" charset="0"/>
                 <a:ea typeface="Trebuchet MS" pitchFamily="34" charset="-122"/>
@@ -22396,63 +22306,90 @@
               </a:rPr>
               <a:t>e</a:t>
             </a:r>
-            <a:endParaRPr lang="en-US" sz="1400" dirty="0"/>
-          </a:p>
-        </p:txBody>
-      </p:sp>
-      <p:sp>
-        <p:nvSpPr>
-          <p:cNvPr id="36" name="Text 34"/>
-          <p:cNvSpPr/>
-          <p:nvPr/>
-        </p:nvSpPr>
-        <p:spPr>
-          <a:xfrm>
-            <a:off x="7107936" y="3364992"/>
-            <a:ext cx="76200" cy="475488"/>
-          </a:xfrm>
-          <a:prstGeom prst="rect">
-            <a:avLst/>
-          </a:prstGeom>
-          <a:noFill/>
-          <a:ln/>
-        </p:spPr>
-        <p:txBody>
-          <a:bodyPr wrap="square" lIns="0" tIns="0" rIns="0" bIns="0" rtlCol="0" anchor="ctr"/>
-          <a:lstStyle/>
-          <a:p>
-            <a:pPr algn="ctr" indent="0" marL="0">
-              <a:buNone/>
-            </a:pPr>
-            <a:r>
-              <a:rPr lang="en-US" sz="1600" b="1" dirty="0">
-                <a:solidFill>
-                  <a:srgbClr val="0D9488"/>
+            <a:endParaRPr lang="en-US" sz="900" dirty="0"/>
+          </a:p>
+        </p:txBody>
+      </p:sp>
+      <p:sp>
+        <p:nvSpPr>
+          <p:cNvPr id="38" name="Shape 36"/>
+          <p:cNvSpPr/>
+          <p:nvPr/>
+        </p:nvSpPr>
+        <p:spPr>
+          <a:xfrm>
+            <a:off x="3033522" y="4169664"/>
+            <a:ext cx="685800" cy="384048"/>
+          </a:xfrm>
+          <a:prstGeom prst="rect">
+            <a:avLst>
+              <a:gd name="adj" fmla="val 9524"/>
+            </a:avLst>
+          </a:prstGeom>
+          <a:solidFill>
+            <a:srgbClr val="FFFFFF"/>
+          </a:solidFill>
+          <a:ln w="12700">
+            <a:solidFill>
+              <a:srgbClr val="DB2777"/>
+            </a:solidFill>
+            <a:prstDash val="solid"/>
+          </a:ln>
+        </p:spPr>
+      </p:sp>
+      <p:sp>
+        <p:nvSpPr>
+          <p:cNvPr id="39" name="Text 37"/>
+          <p:cNvSpPr/>
+          <p:nvPr/>
+        </p:nvSpPr>
+        <p:spPr>
+          <a:xfrm>
+            <a:off x="3033522" y="4169664"/>
+            <a:ext cx="685800" cy="384048"/>
+          </a:xfrm>
+          <a:prstGeom prst="rect">
+            <a:avLst/>
+          </a:prstGeom>
+          <a:noFill/>
+          <a:ln/>
+        </p:spPr>
+        <p:txBody>
+          <a:bodyPr wrap="square" lIns="0" tIns="0" rIns="0" bIns="0" rtlCol="0" anchor="ctr"/>
+          <a:lstStyle/>
+          <a:p>
+            <a:pPr algn="ctr" indent="0" marL="0">
+              <a:buNone/>
+            </a:pPr>
+            <a:r>
+              <a:rPr lang="en-US" sz="900" b="1" dirty="0">
+                <a:solidFill>
+                  <a:srgbClr val="9D174D"/>
                 </a:solidFill>
                 <a:latin typeface="Trebuchet MS" pitchFamily="34" charset="0"/>
                 <a:ea typeface="Trebuchet MS" pitchFamily="34" charset="-122"/>
                 <a:cs typeface="Trebuchet MS" pitchFamily="34" charset="-120"/>
               </a:rPr>
-              <a:t>·</a:t>
-            </a:r>
-            <a:endParaRPr lang="en-US" sz="1600" dirty="0"/>
-          </a:p>
-        </p:txBody>
-      </p:sp>
-      <p:sp>
-        <p:nvSpPr>
-          <p:cNvPr id="37" name="Shape 35"/>
-          <p:cNvSpPr/>
-          <p:nvPr/>
-        </p:nvSpPr>
-        <p:spPr>
-          <a:xfrm>
-            <a:off x="7184136" y="3364992"/>
-            <a:ext cx="1225296" cy="475488"/>
+              <a:t>n</a:t>
+            </a:r>
+            <a:endParaRPr lang="en-US" sz="900" dirty="0"/>
+          </a:p>
+        </p:txBody>
+      </p:sp>
+      <p:sp>
+        <p:nvSpPr>
+          <p:cNvPr id="40" name="Shape 38"/>
+          <p:cNvSpPr/>
+          <p:nvPr/>
+        </p:nvSpPr>
+        <p:spPr>
+          <a:xfrm>
+            <a:off x="3942207" y="4169664"/>
+            <a:ext cx="685800" cy="384048"/>
           </a:xfrm>
           <a:prstGeom prst="rect">
             <a:avLst>
-              <a:gd name="adj" fmla="val 9615"/>
+              <a:gd name="adj" fmla="val 9524"/>
             </a:avLst>
           </a:prstGeom>
           <a:solidFill>
@@ -22460,135 +22397,135 @@
           </a:solidFill>
           <a:ln w="12700">
             <a:solidFill>
-              <a:srgbClr val="0D9488"/>
-            </a:solidFill>
-            <a:prstDash val="solid"/>
-          </a:ln>
-        </p:spPr>
-      </p:sp>
-      <p:sp>
-        <p:nvSpPr>
-          <p:cNvPr id="38" name="Text 36"/>
-          <p:cNvSpPr/>
-          <p:nvPr/>
-        </p:nvSpPr>
-        <p:spPr>
-          <a:xfrm>
-            <a:off x="7184136" y="3364992"/>
-            <a:ext cx="1225296" cy="475488"/>
-          </a:xfrm>
-          <a:prstGeom prst="rect">
-            <a:avLst/>
-          </a:prstGeom>
-          <a:noFill/>
-          <a:ln/>
-        </p:spPr>
-        <p:txBody>
-          <a:bodyPr wrap="square" lIns="0" tIns="0" rIns="0" bIns="0" rtlCol="0" anchor="ctr"/>
-          <a:lstStyle/>
-          <a:p>
-            <a:pPr algn="ctr" indent="0" marL="0">
-              <a:buNone/>
-            </a:pPr>
-            <a:r>
-              <a:rPr lang="en-US" sz="1400" b="1" dirty="0">
-                <a:solidFill>
-                  <a:srgbClr val="0D9488"/>
+              <a:srgbClr val="DB2777"/>
+            </a:solidFill>
+            <a:prstDash val="solid"/>
+          </a:ln>
+        </p:spPr>
+      </p:sp>
+      <p:sp>
+        <p:nvSpPr>
+          <p:cNvPr id="41" name="Text 39"/>
+          <p:cNvSpPr/>
+          <p:nvPr/>
+        </p:nvSpPr>
+        <p:spPr>
+          <a:xfrm>
+            <a:off x="3942207" y="4169664"/>
+            <a:ext cx="685800" cy="384048"/>
+          </a:xfrm>
+          <a:prstGeom prst="rect">
+            <a:avLst/>
+          </a:prstGeom>
+          <a:noFill/>
+          <a:ln/>
+        </p:spPr>
+        <p:txBody>
+          <a:bodyPr wrap="square" lIns="0" tIns="0" rIns="0" bIns="0" rtlCol="0" anchor="ctr"/>
+          <a:lstStyle/>
+          <a:p>
+            <a:pPr algn="ctr" indent="0" marL="0">
+              <a:buNone/>
+            </a:pPr>
+            <a:r>
+              <a:rPr lang="en-US" sz="900" b="1" dirty="0">
+                <a:solidFill>
+                  <a:srgbClr val="9D174D"/>
                 </a:solidFill>
                 <a:latin typeface="Trebuchet MS" pitchFamily="34" charset="0"/>
                 <a:ea typeface="Trebuchet MS" pitchFamily="34" charset="-122"/>
                 <a:cs typeface="Trebuchet MS" pitchFamily="34" charset="-120"/>
               </a:rPr>
-              <a:t>ton</a:t>
-            </a:r>
-            <a:endParaRPr lang="en-US" sz="1400" dirty="0"/>
-          </a:p>
-        </p:txBody>
-      </p:sp>
-      <p:sp>
-        <p:nvSpPr>
-          <p:cNvPr id="39" name="Shape 37"/>
-          <p:cNvSpPr/>
-          <p:nvPr/>
-        </p:nvSpPr>
-        <p:spPr>
-          <a:xfrm>
-            <a:off x="365760" y="4096512"/>
-            <a:ext cx="1371600" cy="804672"/>
+              <a:t>d</a:t>
+            </a:r>
+            <a:endParaRPr lang="en-US" sz="900" dirty="0"/>
+          </a:p>
+        </p:txBody>
+      </p:sp>
+      <p:sp>
+        <p:nvSpPr>
+          <p:cNvPr id="42" name="Shape 40"/>
+          <p:cNvSpPr/>
+          <p:nvPr/>
+        </p:nvSpPr>
+        <p:spPr>
+          <a:xfrm>
+            <a:off x="4850892" y="4169664"/>
+            <a:ext cx="685800" cy="384048"/>
           </a:xfrm>
           <a:prstGeom prst="rect">
             <a:avLst>
-              <a:gd name="adj" fmla="val 6818"/>
+              <a:gd name="adj" fmla="val 9524"/>
             </a:avLst>
           </a:prstGeom>
           <a:solidFill>
-            <a:srgbClr val="E2E8F0"/>
-          </a:solidFill>
-          <a:ln w="12700">
-            <a:solidFill>
-              <a:srgbClr val="E2E8F0"/>
-            </a:solidFill>
-            <a:prstDash val="solid"/>
-          </a:ln>
-        </p:spPr>
-      </p:sp>
-      <p:sp>
-        <p:nvSpPr>
-          <p:cNvPr id="40" name="Text 38"/>
-          <p:cNvSpPr/>
-          <p:nvPr/>
-        </p:nvSpPr>
-        <p:spPr>
-          <a:xfrm>
-            <a:off x="365760" y="4096512"/>
-            <a:ext cx="1371600" cy="804672"/>
-          </a:xfrm>
-          <a:prstGeom prst="rect">
-            <a:avLst/>
-          </a:prstGeom>
-          <a:noFill/>
-          <a:ln/>
-        </p:spPr>
-        <p:txBody>
-          <a:bodyPr wrap="square" lIns="0" tIns="0" rIns="0" bIns="0" rtlCol="0" anchor="ctr"/>
-          <a:lstStyle/>
-          <a:p>
-            <a:pPr algn="ctr" indent="0" marL="0">
-              <a:buNone/>
-            </a:pPr>
-            <a:r>
-              <a:rPr lang="en-US" sz="1100" b="1" dirty="0">
-                <a:solidFill>
-                  <a:srgbClr val="475569"/>
+            <a:srgbClr val="FFFFFF"/>
+          </a:solidFill>
+          <a:ln w="12700">
+            <a:solidFill>
+              <a:srgbClr val="DB2777"/>
+            </a:solidFill>
+            <a:prstDash val="solid"/>
+          </a:ln>
+        </p:spPr>
+      </p:sp>
+      <p:sp>
+        <p:nvSpPr>
+          <p:cNvPr id="43" name="Text 41"/>
+          <p:cNvSpPr/>
+          <p:nvPr/>
+        </p:nvSpPr>
+        <p:spPr>
+          <a:xfrm>
+            <a:off x="4850892" y="4169664"/>
+            <a:ext cx="685800" cy="384048"/>
+          </a:xfrm>
+          <a:prstGeom prst="rect">
+            <a:avLst/>
+          </a:prstGeom>
+          <a:noFill/>
+          <a:ln/>
+        </p:spPr>
+        <p:txBody>
+          <a:bodyPr wrap="square" lIns="0" tIns="0" rIns="0" bIns="0" rtlCol="0" anchor="ctr"/>
+          <a:lstStyle/>
+          <a:p>
+            <a:pPr algn="ctr" indent="0" marL="0">
+              <a:buNone/>
+            </a:pPr>
+            <a:r>
+              <a:rPr lang="en-US" sz="900" b="1" dirty="0">
+                <a:solidFill>
+                  <a:srgbClr val="9D174D"/>
                 </a:solidFill>
                 <a:latin typeface="Trebuchet MS" pitchFamily="34" charset="0"/>
                 <a:ea typeface="Trebuchet MS" pitchFamily="34" charset="-122"/>
                 <a:cs typeface="Trebuchet MS" pitchFamily="34" charset="-120"/>
               </a:rPr>
-              <a:t>Phonemes</a:t>
-            </a:r>
-            <a:endParaRPr lang="en-US" sz="1100" dirty="0"/>
-          </a:p>
-        </p:txBody>
-      </p:sp>
-      <p:sp>
-        <p:nvSpPr>
-          <p:cNvPr id="41" name="Shape 39"/>
-          <p:cNvSpPr/>
-          <p:nvPr/>
-        </p:nvSpPr>
-        <p:spPr>
-          <a:xfrm>
-            <a:off x="1874520" y="4096512"/>
-            <a:ext cx="6903720" cy="658368"/>
+              <a:t>ur</a:t>
+            </a:r>
+            <a:endParaRPr lang="en-US" sz="900" dirty="0"/>
+          </a:p>
+        </p:txBody>
+      </p:sp>
+      <p:sp>
+        <p:nvSpPr>
+          <p:cNvPr id="44" name="Shape 42"/>
+          <p:cNvSpPr/>
+          <p:nvPr/>
+        </p:nvSpPr>
+        <p:spPr>
+          <a:xfrm>
+            <a:off x="5759577" y="4169664"/>
+            <a:ext cx="685800" cy="384048"/>
           </a:xfrm>
           <a:prstGeom prst="rect">
             <a:avLst>
-              <a:gd name="adj" fmla="val 8333"/>
+              <a:gd name="adj" fmla="val 9524"/>
             </a:avLst>
           </a:prstGeom>
           <a:solidFill>
-            <a:srgbClr val="FCE7F3"/>
+            <a:srgbClr val="FFFFFF"/>
           </a:solidFill>
           <a:ln w="12700">
             <a:solidFill>
@@ -22600,41 +22537,14 @@
       </p:sp>
       <p:sp>
         <p:nvSpPr>
-          <p:cNvPr id="42" name="Shape 40"/>
-          <p:cNvSpPr/>
-          <p:nvPr/>
-        </p:nvSpPr>
-        <p:spPr>
-          <a:xfrm>
-            <a:off x="1952244" y="4169664"/>
-            <a:ext cx="543652" cy="475488"/>
-          </a:xfrm>
-          <a:prstGeom prst="rect">
-            <a:avLst>
-              <a:gd name="adj" fmla="val 7692"/>
-            </a:avLst>
-          </a:prstGeom>
-          <a:solidFill>
-            <a:srgbClr val="FFFFFF"/>
-          </a:solidFill>
-          <a:ln w="12700">
-            <a:solidFill>
-              <a:srgbClr val="DB2777"/>
-            </a:solidFill>
-            <a:prstDash val="solid"/>
-          </a:ln>
-        </p:spPr>
-      </p:sp>
-      <p:sp>
-        <p:nvSpPr>
-          <p:cNvPr id="43" name="Text 41"/>
-          <p:cNvSpPr/>
-          <p:nvPr/>
-        </p:nvSpPr>
-        <p:spPr>
-          <a:xfrm>
-            <a:off x="1952244" y="4169664"/>
-            <a:ext cx="543652" cy="475488"/>
+          <p:cNvPr id="45" name="Text 43"/>
+          <p:cNvSpPr/>
+          <p:nvPr/>
+        </p:nvSpPr>
+        <p:spPr>
+          <a:xfrm>
+            <a:off x="5759577" y="4169664"/>
+            <a:ext cx="685800" cy="384048"/>
           </a:xfrm>
           <a:prstGeom prst="rect">
             <a:avLst/>
@@ -22658,7 +22568,7 @@
                 <a:ea typeface="Trebuchet MS" pitchFamily="34" charset="-122"/>
                 <a:cs typeface="Trebuchet MS" pitchFamily="34" charset="-120"/>
               </a:rPr>
-              <a:t>e</a:t>
+              <a:t>a</a:t>
             </a:r>
             <a:endParaRPr lang="en-US" sz="900" dirty="0"/>
           </a:p>
@@ -22666,18 +22576,18 @@
       </p:sp>
       <p:sp>
         <p:nvSpPr>
-          <p:cNvPr id="44" name="Shape 42"/>
-          <p:cNvSpPr/>
-          <p:nvPr/>
-        </p:nvSpPr>
-        <p:spPr>
-          <a:xfrm>
-            <a:off x="2546188" y="4169664"/>
-            <a:ext cx="543652" cy="475488"/>
+          <p:cNvPr id="46" name="Shape 44"/>
+          <p:cNvSpPr/>
+          <p:nvPr/>
+        </p:nvSpPr>
+        <p:spPr>
+          <a:xfrm>
+            <a:off x="6668262" y="4169664"/>
+            <a:ext cx="685800" cy="384048"/>
           </a:xfrm>
           <a:prstGeom prst="rect">
             <a:avLst>
-              <a:gd name="adj" fmla="val 7692"/>
+              <a:gd name="adj" fmla="val 9524"/>
             </a:avLst>
           </a:prstGeom>
           <a:solidFill>
@@ -22693,14 +22603,14 @@
       </p:sp>
       <p:sp>
         <p:nvSpPr>
-          <p:cNvPr id="45" name="Text 43"/>
-          <p:cNvSpPr/>
-          <p:nvPr/>
-        </p:nvSpPr>
-        <p:spPr>
-          <a:xfrm>
-            <a:off x="2546188" y="4169664"/>
-            <a:ext cx="543652" cy="475488"/>
+          <p:cNvPr id="47" name="Text 45"/>
+          <p:cNvSpPr/>
+          <p:nvPr/>
+        </p:nvSpPr>
+        <p:spPr>
+          <a:xfrm>
+            <a:off x="6668262" y="4169664"/>
+            <a:ext cx="685800" cy="384048"/>
           </a:xfrm>
           <a:prstGeom prst="rect">
             <a:avLst/>
@@ -22732,18 +22642,18 @@
       </p:sp>
       <p:sp>
         <p:nvSpPr>
-          <p:cNvPr id="46" name="Shape 44"/>
-          <p:cNvSpPr/>
-          <p:nvPr/>
-        </p:nvSpPr>
-        <p:spPr>
-          <a:xfrm>
-            <a:off x="3140133" y="4169664"/>
-            <a:ext cx="543652" cy="475488"/>
+          <p:cNvPr id="48" name="Shape 46"/>
+          <p:cNvSpPr/>
+          <p:nvPr/>
+        </p:nvSpPr>
+        <p:spPr>
+          <a:xfrm>
+            <a:off x="7576947" y="4169664"/>
+            <a:ext cx="685800" cy="384048"/>
           </a:xfrm>
           <a:prstGeom prst="rect">
             <a:avLst>
-              <a:gd name="adj" fmla="val 7692"/>
+              <a:gd name="adj" fmla="val 9524"/>
             </a:avLst>
           </a:prstGeom>
           <a:solidFill>
@@ -22759,14 +22669,14 @@
       </p:sp>
       <p:sp>
         <p:nvSpPr>
-          <p:cNvPr id="47" name="Text 45"/>
-          <p:cNvSpPr/>
-          <p:nvPr/>
-        </p:nvSpPr>
-        <p:spPr>
-          <a:xfrm>
-            <a:off x="3140133" y="4169664"/>
-            <a:ext cx="543652" cy="475488"/>
+          <p:cNvPr id="49" name="Text 47"/>
+          <p:cNvSpPr/>
+          <p:nvPr/>
+        </p:nvSpPr>
+        <p:spPr>
+          <a:xfrm>
+            <a:off x="7576947" y="4169664"/>
+            <a:ext cx="685800" cy="384048"/>
           </a:xfrm>
           <a:prstGeom prst="rect">
             <a:avLst/>
@@ -22790,7 +22700,7 @@
                 <a:ea typeface="Trebuchet MS" pitchFamily="34" charset="-122"/>
                 <a:cs typeface="Trebuchet MS" pitchFamily="34" charset="-120"/>
               </a:rPr>
-              <a:t>d</a:t>
+              <a:t>ce</a:t>
             </a:r>
             <a:endParaRPr lang="en-US" sz="900" dirty="0"/>
           </a:p>
@@ -22798,529 +22708,40 @@
       </p:sp>
       <p:sp>
         <p:nvSpPr>
-          <p:cNvPr id="48" name="Shape 46"/>
-          <p:cNvSpPr/>
-          <p:nvPr/>
-        </p:nvSpPr>
-        <p:spPr>
-          <a:xfrm>
-            <a:off x="3734077" y="4169664"/>
-            <a:ext cx="543652" cy="475488"/>
-          </a:xfrm>
-          <a:prstGeom prst="rect">
-            <a:avLst>
-              <a:gd name="adj" fmla="val 7692"/>
-            </a:avLst>
-          </a:prstGeom>
-          <a:solidFill>
-            <a:srgbClr val="FFFFFF"/>
-          </a:solidFill>
-          <a:ln w="12700">
-            <a:solidFill>
-              <a:srgbClr val="DB2777"/>
-            </a:solidFill>
-            <a:prstDash val="solid"/>
-          </a:ln>
-        </p:spPr>
-      </p:sp>
-      <p:sp>
-        <p:nvSpPr>
-          <p:cNvPr id="49" name="Text 47"/>
-          <p:cNvSpPr/>
-          <p:nvPr/>
-        </p:nvSpPr>
-        <p:spPr>
-          <a:xfrm>
-            <a:off x="3734077" y="4169664"/>
-            <a:ext cx="543652" cy="475488"/>
-          </a:xfrm>
-          <a:prstGeom prst="rect">
-            <a:avLst/>
-          </a:prstGeom>
-          <a:noFill/>
-          <a:ln/>
-        </p:spPr>
-        <p:txBody>
-          <a:bodyPr wrap="square" lIns="0" tIns="0" rIns="0" bIns="0" rtlCol="0" anchor="ctr"/>
-          <a:lstStyle/>
-          <a:p>
-            <a:pPr algn="ctr" indent="0" marL="0">
-              <a:buNone/>
-            </a:pPr>
-            <a:r>
-              <a:rPr lang="en-US" sz="900" b="1" dirty="0">
-                <a:solidFill>
-                  <a:srgbClr val="9D174D"/>
-                </a:solidFill>
-                <a:latin typeface="Trebuchet MS" pitchFamily="34" charset="0"/>
-                <a:ea typeface="Trebuchet MS" pitchFamily="34" charset="-122"/>
-                <a:cs typeface="Trebuchet MS" pitchFamily="34" charset="-120"/>
-              </a:rPr>
-              <a:t>o</a:t>
-            </a:r>
-            <a:endParaRPr lang="en-US" sz="900" dirty="0"/>
-          </a:p>
-        </p:txBody>
-      </p:sp>
-      <p:sp>
-        <p:nvSpPr>
-          <p:cNvPr id="50" name="Shape 48"/>
-          <p:cNvSpPr/>
-          <p:nvPr/>
-        </p:nvSpPr>
-        <p:spPr>
-          <a:xfrm>
-            <a:off x="4328021" y="4169664"/>
-            <a:ext cx="543652" cy="475488"/>
-          </a:xfrm>
-          <a:prstGeom prst="rect">
-            <a:avLst>
-              <a:gd name="adj" fmla="val 7692"/>
-            </a:avLst>
-          </a:prstGeom>
-          <a:solidFill>
-            <a:srgbClr val="FFFFFF"/>
-          </a:solidFill>
-          <a:ln w="12700">
-            <a:solidFill>
-              <a:srgbClr val="DB2777"/>
-            </a:solidFill>
-            <a:prstDash val="solid"/>
-          </a:ln>
-        </p:spPr>
-      </p:sp>
-      <p:sp>
-        <p:nvSpPr>
-          <p:cNvPr id="51" name="Text 49"/>
-          <p:cNvSpPr/>
-          <p:nvPr/>
-        </p:nvSpPr>
-        <p:spPr>
-          <a:xfrm>
-            <a:off x="4328021" y="4169664"/>
-            <a:ext cx="543652" cy="475488"/>
-          </a:xfrm>
-          <a:prstGeom prst="rect">
-            <a:avLst/>
-          </a:prstGeom>
-          <a:noFill/>
-          <a:ln/>
-        </p:spPr>
-        <p:txBody>
-          <a:bodyPr wrap="square" lIns="0" tIns="0" rIns="0" bIns="0" rtlCol="0" anchor="ctr"/>
-          <a:lstStyle/>
-          <a:p>
-            <a:pPr algn="ctr" indent="0" marL="0">
-              <a:buNone/>
-            </a:pPr>
-            <a:r>
-              <a:rPr lang="en-US" sz="900" b="1" dirty="0">
-                <a:solidFill>
-                  <a:srgbClr val="9D174D"/>
-                </a:solidFill>
-                <a:latin typeface="Trebuchet MS" pitchFamily="34" charset="0"/>
-                <a:ea typeface="Trebuchet MS" pitchFamily="34" charset="-122"/>
-                <a:cs typeface="Trebuchet MS" pitchFamily="34" charset="-120"/>
-              </a:rPr>
-              <a:t>sk</a:t>
-            </a:r>
-            <a:endParaRPr lang="en-US" sz="900" dirty="0"/>
-          </a:p>
-        </p:txBody>
-      </p:sp>
-      <p:sp>
-        <p:nvSpPr>
-          <p:cNvPr id="52" name="Shape 50"/>
-          <p:cNvSpPr/>
-          <p:nvPr/>
-        </p:nvSpPr>
-        <p:spPr>
-          <a:xfrm>
-            <a:off x="4921966" y="4169664"/>
-            <a:ext cx="543652" cy="475488"/>
-          </a:xfrm>
-          <a:prstGeom prst="rect">
-            <a:avLst>
-              <a:gd name="adj" fmla="val 7692"/>
-            </a:avLst>
-          </a:prstGeom>
-          <a:solidFill>
-            <a:srgbClr val="FFFFFF"/>
-          </a:solidFill>
-          <a:ln w="12700">
-            <a:solidFill>
-              <a:srgbClr val="DB2777"/>
-            </a:solidFill>
-            <a:prstDash val="solid"/>
-          </a:ln>
-        </p:spPr>
-      </p:sp>
-      <p:sp>
-        <p:nvSpPr>
-          <p:cNvPr id="53" name="Text 51"/>
-          <p:cNvSpPr/>
-          <p:nvPr/>
-        </p:nvSpPr>
-        <p:spPr>
-          <a:xfrm>
-            <a:off x="4921966" y="4169664"/>
-            <a:ext cx="543652" cy="475488"/>
-          </a:xfrm>
-          <a:prstGeom prst="rect">
-            <a:avLst/>
-          </a:prstGeom>
-          <a:noFill/>
-          <a:ln/>
-        </p:spPr>
-        <p:txBody>
-          <a:bodyPr wrap="square" lIns="0" tIns="0" rIns="0" bIns="0" rtlCol="0" anchor="ctr"/>
-          <a:lstStyle/>
-          <a:p>
-            <a:pPr algn="ctr" indent="0" marL="0">
-              <a:buNone/>
-            </a:pPr>
-            <a:r>
-              <a:rPr lang="en-US" sz="900" b="1" dirty="0">
-                <a:solidFill>
-                  <a:srgbClr val="9D174D"/>
-                </a:solidFill>
-                <a:latin typeface="Trebuchet MS" pitchFamily="34" charset="0"/>
-                <a:ea typeface="Trebuchet MS" pitchFamily="34" charset="-122"/>
-                <a:cs typeface="Trebuchet MS" pitchFamily="34" charset="-120"/>
-              </a:rPr>
-              <a:t>e</a:t>
-            </a:r>
-            <a:endParaRPr lang="en-US" sz="900" dirty="0"/>
-          </a:p>
-        </p:txBody>
-      </p:sp>
-      <p:sp>
-        <p:nvSpPr>
-          <p:cNvPr id="54" name="Shape 52"/>
-          <p:cNvSpPr/>
-          <p:nvPr/>
-        </p:nvSpPr>
-        <p:spPr>
-          <a:xfrm>
-            <a:off x="5515910" y="4169664"/>
-            <a:ext cx="543652" cy="475488"/>
-          </a:xfrm>
-          <a:prstGeom prst="rect">
-            <a:avLst>
-              <a:gd name="adj" fmla="val 7692"/>
-            </a:avLst>
-          </a:prstGeom>
-          <a:solidFill>
-            <a:srgbClr val="FFFFFF"/>
-          </a:solidFill>
-          <a:ln w="12700">
-            <a:solidFill>
-              <a:srgbClr val="DB2777"/>
-            </a:solidFill>
-            <a:prstDash val="solid"/>
-          </a:ln>
-        </p:spPr>
-      </p:sp>
-      <p:sp>
-        <p:nvSpPr>
-          <p:cNvPr id="55" name="Text 53"/>
-          <p:cNvSpPr/>
-          <p:nvPr/>
-        </p:nvSpPr>
-        <p:spPr>
-          <a:xfrm>
-            <a:off x="5515910" y="4169664"/>
-            <a:ext cx="543652" cy="475488"/>
-          </a:xfrm>
-          <a:prstGeom prst="rect">
-            <a:avLst/>
-          </a:prstGeom>
-          <a:noFill/>
-          <a:ln/>
-        </p:spPr>
-        <p:txBody>
-          <a:bodyPr wrap="square" lIns="0" tIns="0" rIns="0" bIns="0" rtlCol="0" anchor="ctr"/>
-          <a:lstStyle/>
-          <a:p>
-            <a:pPr algn="ctr" indent="0" marL="0">
-              <a:buNone/>
-            </a:pPr>
-            <a:r>
-              <a:rPr lang="en-US" sz="900" b="1" dirty="0">
-                <a:solidFill>
-                  <a:srgbClr val="9D174D"/>
-                </a:solidFill>
-                <a:latin typeface="Trebuchet MS" pitchFamily="34" charset="0"/>
-                <a:ea typeface="Trebuchet MS" pitchFamily="34" charset="-122"/>
-                <a:cs typeface="Trebuchet MS" pitchFamily="34" charset="-120"/>
-              </a:rPr>
-              <a:t>l</a:t>
-            </a:r>
-            <a:endParaRPr lang="en-US" sz="900" dirty="0"/>
-          </a:p>
-        </p:txBody>
-      </p:sp>
-      <p:sp>
-        <p:nvSpPr>
-          <p:cNvPr id="56" name="Shape 54"/>
-          <p:cNvSpPr/>
-          <p:nvPr/>
-        </p:nvSpPr>
-        <p:spPr>
-          <a:xfrm>
-            <a:off x="6109855" y="4169664"/>
-            <a:ext cx="543652" cy="475488"/>
-          </a:xfrm>
-          <a:prstGeom prst="rect">
-            <a:avLst>
-              <a:gd name="adj" fmla="val 7692"/>
-            </a:avLst>
-          </a:prstGeom>
-          <a:solidFill>
-            <a:srgbClr val="FFFFFF"/>
-          </a:solidFill>
-          <a:ln w="12700">
-            <a:solidFill>
-              <a:srgbClr val="DB2777"/>
-            </a:solidFill>
-            <a:prstDash val="solid"/>
-          </a:ln>
-        </p:spPr>
-      </p:sp>
-      <p:sp>
-        <p:nvSpPr>
-          <p:cNvPr id="57" name="Text 55"/>
-          <p:cNvSpPr/>
-          <p:nvPr/>
-        </p:nvSpPr>
-        <p:spPr>
-          <a:xfrm>
-            <a:off x="6109855" y="4169664"/>
-            <a:ext cx="543652" cy="475488"/>
-          </a:xfrm>
-          <a:prstGeom prst="rect">
-            <a:avLst/>
-          </a:prstGeom>
-          <a:noFill/>
-          <a:ln/>
-        </p:spPr>
-        <p:txBody>
-          <a:bodyPr wrap="square" lIns="0" tIns="0" rIns="0" bIns="0" rtlCol="0" anchor="ctr"/>
-          <a:lstStyle/>
-          <a:p>
-            <a:pPr algn="ctr" indent="0" marL="0">
-              <a:buNone/>
-            </a:pPr>
-            <a:r>
-              <a:rPr lang="en-US" sz="900" b="1" dirty="0">
-                <a:solidFill>
-                  <a:srgbClr val="9D174D"/>
-                </a:solidFill>
-                <a:latin typeface="Trebuchet MS" pitchFamily="34" charset="0"/>
-                <a:ea typeface="Trebuchet MS" pitchFamily="34" charset="-122"/>
-                <a:cs typeface="Trebuchet MS" pitchFamily="34" charset="-120"/>
-              </a:rPr>
-              <a:t>e</a:t>
-            </a:r>
-            <a:endParaRPr lang="en-US" sz="900" dirty="0"/>
-          </a:p>
-        </p:txBody>
-      </p:sp>
-      <p:sp>
-        <p:nvSpPr>
-          <p:cNvPr id="58" name="Shape 56"/>
-          <p:cNvSpPr/>
-          <p:nvPr/>
-        </p:nvSpPr>
-        <p:spPr>
-          <a:xfrm>
-            <a:off x="6703799" y="4169664"/>
-            <a:ext cx="543652" cy="475488"/>
-          </a:xfrm>
-          <a:prstGeom prst="rect">
-            <a:avLst>
-              <a:gd name="adj" fmla="val 7692"/>
-            </a:avLst>
-          </a:prstGeom>
-          <a:solidFill>
-            <a:srgbClr val="FFFFFF"/>
-          </a:solidFill>
-          <a:ln w="12700">
-            <a:solidFill>
-              <a:srgbClr val="DB2777"/>
-            </a:solidFill>
-            <a:prstDash val="solid"/>
-          </a:ln>
-        </p:spPr>
-      </p:sp>
-      <p:sp>
-        <p:nvSpPr>
-          <p:cNvPr id="59" name="Text 57"/>
-          <p:cNvSpPr/>
-          <p:nvPr/>
-        </p:nvSpPr>
-        <p:spPr>
-          <a:xfrm>
-            <a:off x="6703799" y="4169664"/>
-            <a:ext cx="543652" cy="475488"/>
-          </a:xfrm>
-          <a:prstGeom prst="rect">
-            <a:avLst/>
-          </a:prstGeom>
-          <a:noFill/>
-          <a:ln/>
-        </p:spPr>
-        <p:txBody>
-          <a:bodyPr wrap="square" lIns="0" tIns="0" rIns="0" bIns="0" rtlCol="0" anchor="ctr"/>
-          <a:lstStyle/>
-          <a:p>
-            <a:pPr algn="ctr" indent="0" marL="0">
-              <a:buNone/>
-            </a:pPr>
-            <a:r>
-              <a:rPr lang="en-US" sz="900" b="1" dirty="0">
-                <a:solidFill>
-                  <a:srgbClr val="9D174D"/>
-                </a:solidFill>
-                <a:latin typeface="Trebuchet MS" pitchFamily="34" charset="0"/>
-                <a:ea typeface="Trebuchet MS" pitchFamily="34" charset="-122"/>
-                <a:cs typeface="Trebuchet MS" pitchFamily="34" charset="-120"/>
-              </a:rPr>
-              <a:t>t</a:t>
-            </a:r>
-            <a:endParaRPr lang="en-US" sz="900" dirty="0"/>
-          </a:p>
-        </p:txBody>
-      </p:sp>
-      <p:sp>
-        <p:nvSpPr>
-          <p:cNvPr id="60" name="Shape 58"/>
-          <p:cNvSpPr/>
-          <p:nvPr/>
-        </p:nvSpPr>
-        <p:spPr>
-          <a:xfrm>
-            <a:off x="7297743" y="4169664"/>
-            <a:ext cx="543652" cy="475488"/>
-          </a:xfrm>
-          <a:prstGeom prst="rect">
-            <a:avLst>
-              <a:gd name="adj" fmla="val 7692"/>
-            </a:avLst>
-          </a:prstGeom>
-          <a:solidFill>
-            <a:srgbClr val="FFFFFF"/>
-          </a:solidFill>
-          <a:ln w="12700">
-            <a:solidFill>
-              <a:srgbClr val="DB2777"/>
-            </a:solidFill>
-            <a:prstDash val="solid"/>
-          </a:ln>
-        </p:spPr>
-      </p:sp>
-      <p:sp>
-        <p:nvSpPr>
-          <p:cNvPr id="61" name="Text 59"/>
-          <p:cNvSpPr/>
-          <p:nvPr/>
-        </p:nvSpPr>
-        <p:spPr>
-          <a:xfrm>
-            <a:off x="7297743" y="4169664"/>
-            <a:ext cx="543652" cy="475488"/>
-          </a:xfrm>
-          <a:prstGeom prst="rect">
-            <a:avLst/>
-          </a:prstGeom>
-          <a:noFill/>
-          <a:ln/>
-        </p:spPr>
-        <p:txBody>
-          <a:bodyPr wrap="square" lIns="0" tIns="0" rIns="0" bIns="0" rtlCol="0" anchor="ctr"/>
-          <a:lstStyle/>
-          <a:p>
-            <a:pPr algn="ctr" indent="0" marL="0">
-              <a:buNone/>
-            </a:pPr>
-            <a:r>
-              <a:rPr lang="en-US" sz="900" b="1" dirty="0">
-                <a:solidFill>
-                  <a:srgbClr val="9D174D"/>
-                </a:solidFill>
-                <a:latin typeface="Trebuchet MS" pitchFamily="34" charset="0"/>
-                <a:ea typeface="Trebuchet MS" pitchFamily="34" charset="-122"/>
-                <a:cs typeface="Trebuchet MS" pitchFamily="34" charset="-120"/>
-              </a:rPr>
-              <a:t>o</a:t>
-            </a:r>
-            <a:endParaRPr lang="en-US" sz="900" dirty="0"/>
-          </a:p>
-        </p:txBody>
-      </p:sp>
-      <p:sp>
-        <p:nvSpPr>
-          <p:cNvPr id="62" name="Shape 60"/>
-          <p:cNvSpPr/>
-          <p:nvPr/>
-        </p:nvSpPr>
-        <p:spPr>
-          <a:xfrm>
-            <a:off x="7891688" y="4169664"/>
-            <a:ext cx="543652" cy="475488"/>
-          </a:xfrm>
-          <a:prstGeom prst="rect">
-            <a:avLst>
-              <a:gd name="adj" fmla="val 7692"/>
-            </a:avLst>
-          </a:prstGeom>
-          <a:solidFill>
-            <a:srgbClr val="FFFFFF"/>
-          </a:solidFill>
-          <a:ln w="12700">
-            <a:solidFill>
-              <a:srgbClr val="DB2777"/>
-            </a:solidFill>
-            <a:prstDash val="solid"/>
-          </a:ln>
-        </p:spPr>
-      </p:sp>
-      <p:sp>
-        <p:nvSpPr>
-          <p:cNvPr id="63" name="Text 61"/>
-          <p:cNvSpPr/>
-          <p:nvPr/>
-        </p:nvSpPr>
-        <p:spPr>
-          <a:xfrm>
-            <a:off x="7891688" y="4169664"/>
-            <a:ext cx="543652" cy="475488"/>
-          </a:xfrm>
-          <a:prstGeom prst="rect">
-            <a:avLst/>
-          </a:prstGeom>
-          <a:noFill/>
-          <a:ln/>
-        </p:spPr>
-        <p:txBody>
-          <a:bodyPr wrap="square" lIns="0" tIns="0" rIns="0" bIns="0" rtlCol="0" anchor="ctr"/>
-          <a:lstStyle/>
-          <a:p>
-            <a:pPr algn="ctr" indent="0" marL="0">
-              <a:buNone/>
-            </a:pPr>
-            <a:r>
-              <a:rPr lang="en-US" sz="900" b="1" dirty="0">
-                <a:solidFill>
-                  <a:srgbClr val="9D174D"/>
-                </a:solidFill>
-                <a:latin typeface="Trebuchet MS" pitchFamily="34" charset="0"/>
-                <a:ea typeface="Trebuchet MS" pitchFamily="34" charset="-122"/>
-                <a:cs typeface="Trebuchet MS" pitchFamily="34" charset="-120"/>
-              </a:rPr>
-              <a:t>n</a:t>
-            </a:r>
-            <a:endParaRPr lang="en-US" sz="900" dirty="0"/>
+          <p:cNvPr id="50" name="Text 48"/>
+          <p:cNvSpPr/>
+          <p:nvPr/>
+        </p:nvSpPr>
+        <p:spPr>
+          <a:xfrm>
+            <a:off x="7576947" y="4572000"/>
+            <a:ext cx="685800" cy="219456"/>
+          </a:xfrm>
+          <a:prstGeom prst="rect">
+            <a:avLst/>
+          </a:prstGeom>
+          <a:noFill/>
+          <a:ln/>
+        </p:spPr>
+        <p:txBody>
+          <a:bodyPr wrap="square" lIns="0" tIns="0" rIns="0" bIns="0" rtlCol="0" anchor="t"/>
+          <a:lstStyle/>
+          <a:p>
+            <a:pPr algn="ctr" indent="0" marL="0">
+              <a:buNone/>
+            </a:pPr>
+            <a:r>
+              <a:rPr lang="en-US" sz="750" i="1" dirty="0">
+                <a:solidFill>
+                  <a:srgbClr val="94A3B8"/>
+                </a:solidFill>
+                <a:latin typeface="Calibri" pitchFamily="34" charset="0"/>
+                <a:ea typeface="Calibri" pitchFamily="34" charset="-122"/>
+                <a:cs typeface="Calibri" pitchFamily="34" charset="-120"/>
+              </a:rPr>
+              <a:t>/s/</a:t>
+            </a:r>
+            <a:endParaRPr lang="en-US" sz="750" dirty="0"/>
           </a:p>
         </p:txBody>
       </p:sp>
@@ -23610,7 +23031,7 @@
                 <a:ea typeface="Calibri" pitchFamily="34" charset="-122"/>
                 <a:cs typeface="Calibri" pitchFamily="34" charset="-120"/>
               </a:rPr>
-              <a:t>Word Labs  •  wordlabs.app  •  Root: 'endo' = within, inside, inner</a:t>
+              <a:t>Word Labs  •  wordlabs.app  •  Root: 'endo' = within, inside, internal</a:t>
             </a:r>
             <a:endParaRPr lang="en-US" sz="800" dirty="0"/>
           </a:p>
@@ -23749,7 +23170,7 @@
                 <a:ea typeface="Trebuchet MS" pitchFamily="34" charset="-122"/>
                 <a:cs typeface="Trebuchet MS" pitchFamily="34" charset="-120"/>
               </a:rPr>
-              <a:t>endocrine</a:t>
+              <a:t>endorphins</a:t>
             </a:r>
             <a:endParaRPr lang="en-US" sz="2800" dirty="0"/>
           </a:p>
@@ -24437,7 +23858,7 @@
                 <a:ea typeface="Calibri" pitchFamily="34" charset="-122"/>
                 <a:cs typeface="Calibri" pitchFamily="34" charset="-120"/>
               </a:rPr>
-              <a:t>Word Labs  •  wordlabs.app  •  Root: 'endo' = within, inside, inner</a:t>
+              <a:t>Word Labs  •  wordlabs.app  •  Root: 'endo' = within, inside, internal</a:t>
             </a:r>
             <a:endParaRPr lang="en-US" sz="800" dirty="0"/>
           </a:p>
@@ -24576,7 +23997,7 @@
                 <a:ea typeface="Trebuchet MS" pitchFamily="34" charset="-122"/>
                 <a:cs typeface="Trebuchet MS" pitchFamily="34" charset="-120"/>
               </a:rPr>
-              <a:t>endocrine</a:t>
+              <a:t>endorphins</a:t>
             </a:r>
             <a:endParaRPr lang="en-US" sz="2800" dirty="0"/>
           </a:p>
@@ -24656,7 +24077,7 @@
         </p:nvSpPr>
         <p:spPr>
           <a:xfrm>
-            <a:off x="2938272" y="2258568"/>
+            <a:off x="2221992" y="2258568"/>
             <a:ext cx="1828800" cy="292608"/>
           </a:xfrm>
           <a:prstGeom prst="rect">
@@ -24690,7 +24111,7 @@
         </p:nvSpPr>
         <p:spPr>
           <a:xfrm>
-            <a:off x="2938272" y="2258568"/>
+            <a:off x="2221992" y="2258568"/>
             <a:ext cx="1828800" cy="292608"/>
           </a:xfrm>
           <a:prstGeom prst="rect">
@@ -24729,7 +24150,7 @@
         </p:nvSpPr>
         <p:spPr>
           <a:xfrm>
-            <a:off x="2938272" y="2569464"/>
+            <a:off x="2221992" y="2569464"/>
             <a:ext cx="1828800" cy="201168"/>
           </a:xfrm>
           <a:prstGeom prst="rect">
@@ -24768,7 +24189,7 @@
         </p:nvSpPr>
         <p:spPr>
           <a:xfrm>
-            <a:off x="5803392" y="2258568"/>
+            <a:off x="4370832" y="2258568"/>
             <a:ext cx="1828800" cy="292608"/>
           </a:xfrm>
           <a:prstGeom prst="rect">
@@ -24802,7 +24223,7 @@
         </p:nvSpPr>
         <p:spPr>
           <a:xfrm>
-            <a:off x="5803392" y="2258568"/>
+            <a:off x="4370832" y="2258568"/>
             <a:ext cx="1828800" cy="292608"/>
           </a:xfrm>
           <a:prstGeom prst="rect">
@@ -24827,7 +24248,7 @@
                 <a:ea typeface="Trebuchet MS" pitchFamily="34" charset="-122"/>
                 <a:cs typeface="Trebuchet MS" pitchFamily="34" charset="-120"/>
               </a:rPr>
-              <a:t>crine</a:t>
+              <a:t>orphin</a:t>
             </a:r>
             <a:endParaRPr lang="en-US" sz="1300" dirty="0"/>
           </a:p>
@@ -24841,7 +24262,7 @@
         </p:nvSpPr>
         <p:spPr>
           <a:xfrm>
-            <a:off x="5803392" y="2569464"/>
+            <a:off x="4370832" y="2569464"/>
             <a:ext cx="1828800" cy="201168"/>
           </a:xfrm>
           <a:prstGeom prst="rect">
@@ -24866,7 +24287,7 @@
                 <a:ea typeface="Calibri" pitchFamily="34" charset="-122"/>
                 <a:cs typeface="Calibri" pitchFamily="34" charset="-120"/>
               </a:rPr>
-              <a:t>to secrete, release</a:t>
+              <a:t>relating to morphine, a pain-relief substance</a:t>
             </a:r>
             <a:endParaRPr lang="en-US" sz="850" dirty="0"/>
           </a:p>
@@ -24875,6 +24296,118 @@
       <p:sp>
         <p:nvSpPr>
           <p:cNvPr id="22" name="Shape 20"/>
+          <p:cNvSpPr/>
+          <p:nvPr/>
+        </p:nvSpPr>
+        <p:spPr>
+          <a:xfrm>
+            <a:off x="6519672" y="2258568"/>
+            <a:ext cx="1828800" cy="292608"/>
+          </a:xfrm>
+          <a:prstGeom prst="rect">
+            <a:avLst>
+              <a:gd name="adj" fmla="val 25000"/>
+            </a:avLst>
+          </a:prstGeom>
+          <a:solidFill>
+            <a:srgbClr val="FCE7F3"/>
+          </a:solidFill>
+          <a:ln w="19050">
+            <a:solidFill>
+              <a:srgbClr val="DB2777"/>
+            </a:solidFill>
+            <a:prstDash val="solid"/>
+          </a:ln>
+          <a:effectLst>
+            <a:outerShdw sx="100000" sy="100000" kx="0" ky="0" algn="bl" rotWithShape="0" blurRad="101600" dist="38100" dir="8100000">
+              <a:srgbClr val="000000">
+                <a:alpha val="12000"/>
+              </a:srgbClr>
+            </a:outerShdw>
+          </a:effectLst>
+        </p:spPr>
+      </p:sp>
+      <p:sp>
+        <p:nvSpPr>
+          <p:cNvPr id="23" name="Text 21"/>
+          <p:cNvSpPr/>
+          <p:nvPr/>
+        </p:nvSpPr>
+        <p:spPr>
+          <a:xfrm>
+            <a:off x="6519672" y="2258568"/>
+            <a:ext cx="1828800" cy="292608"/>
+          </a:xfrm>
+          <a:prstGeom prst="rect">
+            <a:avLst/>
+          </a:prstGeom>
+          <a:noFill/>
+          <a:ln/>
+        </p:spPr>
+        <p:txBody>
+          <a:bodyPr wrap="square" lIns="0" tIns="0" rIns="0" bIns="0" rtlCol="0" anchor="ctr"/>
+          <a:lstStyle/>
+          <a:p>
+            <a:pPr algn="ctr" indent="0" marL="0">
+              <a:buNone/>
+            </a:pPr>
+            <a:r>
+              <a:rPr lang="en-US" sz="1300" b="1" dirty="0">
+                <a:solidFill>
+                  <a:srgbClr val="9D174D"/>
+                </a:solidFill>
+                <a:latin typeface="Trebuchet MS" pitchFamily="34" charset="0"/>
+                <a:ea typeface="Trebuchet MS" pitchFamily="34" charset="-122"/>
+                <a:cs typeface="Trebuchet MS" pitchFamily="34" charset="-120"/>
+              </a:rPr>
+              <a:t>s</a:t>
+            </a:r>
+            <a:endParaRPr lang="en-US" sz="1300" dirty="0"/>
+          </a:p>
+        </p:txBody>
+      </p:sp>
+      <p:sp>
+        <p:nvSpPr>
+          <p:cNvPr id="24" name="Text 22"/>
+          <p:cNvSpPr/>
+          <p:nvPr/>
+        </p:nvSpPr>
+        <p:spPr>
+          <a:xfrm>
+            <a:off x="6519672" y="2569464"/>
+            <a:ext cx="1828800" cy="201168"/>
+          </a:xfrm>
+          <a:prstGeom prst="rect">
+            <a:avLst/>
+          </a:prstGeom>
+          <a:noFill/>
+          <a:ln/>
+        </p:spPr>
+        <p:txBody>
+          <a:bodyPr wrap="square" lIns="0" tIns="0" rIns="0" bIns="0" rtlCol="0" anchor="t"/>
+          <a:lstStyle/>
+          <a:p>
+            <a:pPr algn="ctr" indent="0" marL="0">
+              <a:buNone/>
+            </a:pPr>
+            <a:r>
+              <a:rPr lang="en-US" sz="850" dirty="0">
+                <a:solidFill>
+                  <a:srgbClr val="475569"/>
+                </a:solidFill>
+                <a:latin typeface="Calibri" pitchFamily="34" charset="0"/>
+                <a:ea typeface="Calibri" pitchFamily="34" charset="-122"/>
+                <a:cs typeface="Calibri" pitchFamily="34" charset="-120"/>
+              </a:rPr>
+              <a:t>more than one</a:t>
+            </a:r>
+            <a:endParaRPr lang="en-US" sz="850" dirty="0"/>
+          </a:p>
+        </p:txBody>
+      </p:sp>
+      <p:sp>
+        <p:nvSpPr>
+          <p:cNvPr id="25" name="Shape 23"/>
           <p:cNvSpPr/>
           <p:nvPr/>
         </p:nvSpPr>
@@ -24901,7 +24434,7 @@
       </p:sp>
       <p:sp>
         <p:nvSpPr>
-          <p:cNvPr id="23" name="Text 21"/>
+          <p:cNvPr id="26" name="Text 24"/>
           <p:cNvSpPr/>
           <p:nvPr/>
         </p:nvSpPr>
@@ -24940,7 +24473,7 @@
       </p:sp>
       <p:sp>
         <p:nvSpPr>
-          <p:cNvPr id="24" name="Shape 22"/>
+          <p:cNvPr id="27" name="Shape 25"/>
           <p:cNvSpPr/>
           <p:nvPr/>
         </p:nvSpPr>
@@ -24967,7 +24500,7 @@
       </p:sp>
       <p:sp>
         <p:nvSpPr>
-          <p:cNvPr id="25" name="Text 23"/>
+          <p:cNvPr id="28" name="Text 26"/>
           <p:cNvSpPr/>
           <p:nvPr/>
         </p:nvSpPr>
@@ -25006,7 +24539,7 @@
       </p:sp>
       <p:sp>
         <p:nvSpPr>
-          <p:cNvPr id="26" name="Shape 24"/>
+          <p:cNvPr id="29" name="Shape 27"/>
           <p:cNvSpPr/>
           <p:nvPr/>
         </p:nvSpPr>
@@ -25033,7 +24566,7 @@
       </p:sp>
       <p:sp>
         <p:nvSpPr>
-          <p:cNvPr id="27" name="Text 25"/>
+          <p:cNvPr id="30" name="Text 28"/>
           <p:cNvSpPr/>
           <p:nvPr/>
         </p:nvSpPr>
@@ -25072,7 +24605,7 @@
       </p:sp>
       <p:sp>
         <p:nvSpPr>
-          <p:cNvPr id="28" name="Shape 26"/>
+          <p:cNvPr id="31" name="Shape 29"/>
           <p:cNvSpPr/>
           <p:nvPr/>
         </p:nvSpPr>
@@ -25099,7 +24632,7 @@
       </p:sp>
       <p:sp>
         <p:nvSpPr>
-          <p:cNvPr id="29" name="Text 27"/>
+          <p:cNvPr id="32" name="Text 30"/>
           <p:cNvSpPr/>
           <p:nvPr/>
         </p:nvSpPr>
@@ -25422,7 +24955,7 @@
                 <a:ea typeface="Calibri" pitchFamily="34" charset="-122"/>
                 <a:cs typeface="Calibri" pitchFamily="34" charset="-120"/>
               </a:rPr>
-              <a:t>Word Labs  •  wordlabs.app  •  Root: 'endo' = within, inside, inner</a:t>
+              <a:t>Word Labs  •  wordlabs.app  •  Root: 'endo' = within, inside, internal</a:t>
             </a:r>
             <a:endParaRPr lang="en-US" sz="800" dirty="0"/>
           </a:p>
@@ -25495,7 +25028,7 @@
                 <a:ea typeface="Trebuchet MS" pitchFamily="34" charset="-122"/>
                 <a:cs typeface="Trebuchet MS" pitchFamily="34" charset="-120"/>
               </a:rPr>
-              <a:t>We are learning that the root 'endo' means 'within, inside, inner'.</a:t>
+              <a:t>We are learning that the root 'endo' means 'within, inside, internal'.</a:t>
             </a:r>
             <a:endParaRPr lang="en-US" sz="2000" dirty="0"/>
           </a:p>
@@ -26141,7 +25674,7 @@
                 <a:ea typeface="Calibri" pitchFamily="34" charset="-122"/>
                 <a:cs typeface="Calibri" pitchFamily="34" charset="-120"/>
               </a:rPr>
-              <a:t>Word Labs  •  wordlabs.app  •  Root: 'endo' = within, inside, inner</a:t>
+              <a:t>Word Labs  •  wordlabs.app  •  Root: 'endo' = within, inside, internal</a:t>
             </a:r>
             <a:endParaRPr lang="en-US" sz="800" dirty="0"/>
           </a:p>
@@ -26280,7 +25813,7 @@
                 <a:ea typeface="Trebuchet MS" pitchFamily="34" charset="-122"/>
                 <a:cs typeface="Trebuchet MS" pitchFamily="34" charset="-120"/>
               </a:rPr>
-              <a:t>endocrine</a:t>
+              <a:t>endorphins</a:t>
             </a:r>
             <a:endParaRPr lang="en-US" sz="2800" dirty="0"/>
           </a:p>
@@ -26360,7 +25893,7 @@
         </p:nvSpPr>
         <p:spPr>
           <a:xfrm>
-            <a:off x="2938272" y="2258568"/>
+            <a:off x="2221992" y="2258568"/>
             <a:ext cx="1828800" cy="292608"/>
           </a:xfrm>
           <a:prstGeom prst="rect">
@@ -26394,7 +25927,7 @@
         </p:nvSpPr>
         <p:spPr>
           <a:xfrm>
-            <a:off x="2938272" y="2258568"/>
+            <a:off x="2221992" y="2258568"/>
             <a:ext cx="1828800" cy="292608"/>
           </a:xfrm>
           <a:prstGeom prst="rect">
@@ -26433,7 +25966,7 @@
         </p:nvSpPr>
         <p:spPr>
           <a:xfrm>
-            <a:off x="2938272" y="2569464"/>
+            <a:off x="2221992" y="2569464"/>
             <a:ext cx="1828800" cy="201168"/>
           </a:xfrm>
           <a:prstGeom prst="rect">
@@ -26472,7 +26005,7 @@
         </p:nvSpPr>
         <p:spPr>
           <a:xfrm>
-            <a:off x="5803392" y="2258568"/>
+            <a:off x="4370832" y="2258568"/>
             <a:ext cx="1828800" cy="292608"/>
           </a:xfrm>
           <a:prstGeom prst="rect">
@@ -26506,7 +26039,7 @@
         </p:nvSpPr>
         <p:spPr>
           <a:xfrm>
-            <a:off x="5803392" y="2258568"/>
+            <a:off x="4370832" y="2258568"/>
             <a:ext cx="1828800" cy="292608"/>
           </a:xfrm>
           <a:prstGeom prst="rect">
@@ -26531,7 +26064,7 @@
                 <a:ea typeface="Trebuchet MS" pitchFamily="34" charset="-122"/>
                 <a:cs typeface="Trebuchet MS" pitchFamily="34" charset="-120"/>
               </a:rPr>
-              <a:t>crine</a:t>
+              <a:t>orphin</a:t>
             </a:r>
             <a:endParaRPr lang="en-US" sz="1300" dirty="0"/>
           </a:p>
@@ -26545,7 +26078,7 @@
         </p:nvSpPr>
         <p:spPr>
           <a:xfrm>
-            <a:off x="5803392" y="2569464"/>
+            <a:off x="4370832" y="2569464"/>
             <a:ext cx="1828800" cy="201168"/>
           </a:xfrm>
           <a:prstGeom prst="rect">
@@ -26570,7 +26103,7 @@
                 <a:ea typeface="Calibri" pitchFamily="34" charset="-122"/>
                 <a:cs typeface="Calibri" pitchFamily="34" charset="-120"/>
               </a:rPr>
-              <a:t>to secrete, release</a:t>
+              <a:t>relating to morphine, a pain-relief substance</a:t>
             </a:r>
             <a:endParaRPr lang="en-US" sz="850" dirty="0"/>
           </a:p>
@@ -26579,6 +26112,118 @@
       <p:sp>
         <p:nvSpPr>
           <p:cNvPr id="22" name="Shape 20"/>
+          <p:cNvSpPr/>
+          <p:nvPr/>
+        </p:nvSpPr>
+        <p:spPr>
+          <a:xfrm>
+            <a:off x="6519672" y="2258568"/>
+            <a:ext cx="1828800" cy="292608"/>
+          </a:xfrm>
+          <a:prstGeom prst="rect">
+            <a:avLst>
+              <a:gd name="adj" fmla="val 25000"/>
+            </a:avLst>
+          </a:prstGeom>
+          <a:solidFill>
+            <a:srgbClr val="FCE7F3"/>
+          </a:solidFill>
+          <a:ln w="19050">
+            <a:solidFill>
+              <a:srgbClr val="DB2777"/>
+            </a:solidFill>
+            <a:prstDash val="solid"/>
+          </a:ln>
+          <a:effectLst>
+            <a:outerShdw sx="100000" sy="100000" kx="0" ky="0" algn="bl" rotWithShape="0" blurRad="101600" dist="38100" dir="8100000">
+              <a:srgbClr val="000000">
+                <a:alpha val="12000"/>
+              </a:srgbClr>
+            </a:outerShdw>
+          </a:effectLst>
+        </p:spPr>
+      </p:sp>
+      <p:sp>
+        <p:nvSpPr>
+          <p:cNvPr id="23" name="Text 21"/>
+          <p:cNvSpPr/>
+          <p:nvPr/>
+        </p:nvSpPr>
+        <p:spPr>
+          <a:xfrm>
+            <a:off x="6519672" y="2258568"/>
+            <a:ext cx="1828800" cy="292608"/>
+          </a:xfrm>
+          <a:prstGeom prst="rect">
+            <a:avLst/>
+          </a:prstGeom>
+          <a:noFill/>
+          <a:ln/>
+        </p:spPr>
+        <p:txBody>
+          <a:bodyPr wrap="square" lIns="0" tIns="0" rIns="0" bIns="0" rtlCol="0" anchor="ctr"/>
+          <a:lstStyle/>
+          <a:p>
+            <a:pPr algn="ctr" indent="0" marL="0">
+              <a:buNone/>
+            </a:pPr>
+            <a:r>
+              <a:rPr lang="en-US" sz="1300" b="1" dirty="0">
+                <a:solidFill>
+                  <a:srgbClr val="9D174D"/>
+                </a:solidFill>
+                <a:latin typeface="Trebuchet MS" pitchFamily="34" charset="0"/>
+                <a:ea typeface="Trebuchet MS" pitchFamily="34" charset="-122"/>
+                <a:cs typeface="Trebuchet MS" pitchFamily="34" charset="-120"/>
+              </a:rPr>
+              <a:t>s</a:t>
+            </a:r>
+            <a:endParaRPr lang="en-US" sz="1300" dirty="0"/>
+          </a:p>
+        </p:txBody>
+      </p:sp>
+      <p:sp>
+        <p:nvSpPr>
+          <p:cNvPr id="24" name="Text 22"/>
+          <p:cNvSpPr/>
+          <p:nvPr/>
+        </p:nvSpPr>
+        <p:spPr>
+          <a:xfrm>
+            <a:off x="6519672" y="2569464"/>
+            <a:ext cx="1828800" cy="201168"/>
+          </a:xfrm>
+          <a:prstGeom prst="rect">
+            <a:avLst/>
+          </a:prstGeom>
+          <a:noFill/>
+          <a:ln/>
+        </p:spPr>
+        <p:txBody>
+          <a:bodyPr wrap="square" lIns="0" tIns="0" rIns="0" bIns="0" rtlCol="0" anchor="t"/>
+          <a:lstStyle/>
+          <a:p>
+            <a:pPr algn="ctr" indent="0" marL="0">
+              <a:buNone/>
+            </a:pPr>
+            <a:r>
+              <a:rPr lang="en-US" sz="850" dirty="0">
+                <a:solidFill>
+                  <a:srgbClr val="475569"/>
+                </a:solidFill>
+                <a:latin typeface="Calibri" pitchFamily="34" charset="0"/>
+                <a:ea typeface="Calibri" pitchFamily="34" charset="-122"/>
+                <a:cs typeface="Calibri" pitchFamily="34" charset="-120"/>
+              </a:rPr>
+              <a:t>more than one</a:t>
+            </a:r>
+            <a:endParaRPr lang="en-US" sz="850" dirty="0"/>
+          </a:p>
+        </p:txBody>
+      </p:sp>
+      <p:sp>
+        <p:nvSpPr>
+          <p:cNvPr id="25" name="Shape 23"/>
           <p:cNvSpPr/>
           <p:nvPr/>
         </p:nvSpPr>
@@ -26605,7 +26250,7 @@
       </p:sp>
       <p:sp>
         <p:nvSpPr>
-          <p:cNvPr id="23" name="Text 21"/>
+          <p:cNvPr id="26" name="Text 24"/>
           <p:cNvSpPr/>
           <p:nvPr/>
         </p:nvSpPr>
@@ -26644,7 +26289,7 @@
       </p:sp>
       <p:sp>
         <p:nvSpPr>
-          <p:cNvPr id="24" name="Shape 22"/>
+          <p:cNvPr id="27" name="Shape 25"/>
           <p:cNvSpPr/>
           <p:nvPr/>
         </p:nvSpPr>
@@ -26671,7 +26316,7 @@
       </p:sp>
       <p:sp>
         <p:nvSpPr>
-          <p:cNvPr id="25" name="Shape 23"/>
+          <p:cNvPr id="28" name="Shape 26"/>
           <p:cNvSpPr/>
           <p:nvPr/>
         </p:nvSpPr>
@@ -26698,7 +26343,7 @@
       </p:sp>
       <p:sp>
         <p:nvSpPr>
-          <p:cNvPr id="26" name="Text 24"/>
+          <p:cNvPr id="29" name="Text 27"/>
           <p:cNvSpPr/>
           <p:nvPr/>
         </p:nvSpPr>
@@ -26737,7 +26382,7 @@
       </p:sp>
       <p:sp>
         <p:nvSpPr>
-          <p:cNvPr id="27" name="Text 25"/>
+          <p:cNvPr id="30" name="Text 28"/>
           <p:cNvSpPr/>
           <p:nvPr/>
         </p:nvSpPr>
@@ -26776,7 +26421,7 @@
       </p:sp>
       <p:sp>
         <p:nvSpPr>
-          <p:cNvPr id="28" name="Shape 26"/>
+          <p:cNvPr id="31" name="Shape 29"/>
           <p:cNvSpPr/>
           <p:nvPr/>
         </p:nvSpPr>
@@ -26803,7 +26448,7 @@
       </p:sp>
       <p:sp>
         <p:nvSpPr>
-          <p:cNvPr id="29" name="Text 27"/>
+          <p:cNvPr id="32" name="Text 30"/>
           <p:cNvSpPr/>
           <p:nvPr/>
         </p:nvSpPr>
@@ -26834,7 +26479,7 @@
                 <a:ea typeface="Trebuchet MS" pitchFamily="34" charset="-122"/>
                 <a:cs typeface="Trebuchet MS" pitchFamily="34" charset="-120"/>
               </a:rPr>
-              <a:t>do</a:t>
+              <a:t>dor</a:t>
             </a:r>
             <a:endParaRPr lang="en-US" sz="1400" dirty="0"/>
           </a:p>
@@ -26842,7 +26487,7 @@
       </p:sp>
       <p:sp>
         <p:nvSpPr>
-          <p:cNvPr id="30" name="Text 28"/>
+          <p:cNvPr id="33" name="Text 31"/>
           <p:cNvSpPr/>
           <p:nvPr/>
         </p:nvSpPr>
@@ -26881,7 +26526,7 @@
       </p:sp>
       <p:sp>
         <p:nvSpPr>
-          <p:cNvPr id="31" name="Shape 29"/>
+          <p:cNvPr id="34" name="Shape 32"/>
           <p:cNvSpPr/>
           <p:nvPr/>
         </p:nvSpPr>
@@ -26908,7 +26553,7 @@
       </p:sp>
       <p:sp>
         <p:nvSpPr>
-          <p:cNvPr id="32" name="Text 30"/>
+          <p:cNvPr id="35" name="Text 33"/>
           <p:cNvSpPr/>
           <p:nvPr/>
         </p:nvSpPr>
@@ -26939,7 +26584,7 @@
                 <a:ea typeface="Trebuchet MS" pitchFamily="34" charset="-122"/>
                 <a:cs typeface="Trebuchet MS" pitchFamily="34" charset="-120"/>
               </a:rPr>
-              <a:t>crine</a:t>
+              <a:t>phins</a:t>
             </a:r>
             <a:endParaRPr lang="en-US" sz="1400" dirty="0"/>
           </a:p>
@@ -26947,7 +26592,7 @@
       </p:sp>
       <p:sp>
         <p:nvSpPr>
-          <p:cNvPr id="33" name="Shape 31"/>
+          <p:cNvPr id="36" name="Shape 34"/>
           <p:cNvSpPr/>
           <p:nvPr/>
         </p:nvSpPr>
@@ -26974,7 +26619,7 @@
       </p:sp>
       <p:sp>
         <p:nvSpPr>
-          <p:cNvPr id="34" name="Text 32"/>
+          <p:cNvPr id="37" name="Text 35"/>
           <p:cNvSpPr/>
           <p:nvPr/>
         </p:nvSpPr>
@@ -27013,7 +26658,7 @@
       </p:sp>
       <p:sp>
         <p:nvSpPr>
-          <p:cNvPr id="35" name="Shape 33"/>
+          <p:cNvPr id="38" name="Shape 36"/>
           <p:cNvSpPr/>
           <p:nvPr/>
         </p:nvSpPr>
@@ -27040,7 +26685,7 @@
       </p:sp>
       <p:sp>
         <p:nvSpPr>
-          <p:cNvPr id="36" name="Text 34"/>
+          <p:cNvPr id="39" name="Text 37"/>
           <p:cNvSpPr/>
           <p:nvPr/>
         </p:nvSpPr>
@@ -27363,7 +27008,7 @@
                 <a:ea typeface="Calibri" pitchFamily="34" charset="-122"/>
                 <a:cs typeface="Calibri" pitchFamily="34" charset="-120"/>
               </a:rPr>
-              <a:t>Word Labs  •  wordlabs.app  •  Root: 'endo' = within, inside, inner</a:t>
+              <a:t>Word Labs  •  wordlabs.app  •  Root: 'endo' = within, inside, internal</a:t>
             </a:r>
             <a:endParaRPr lang="en-US" sz="800" dirty="0"/>
           </a:p>
@@ -27502,7 +27147,7 @@
                 <a:ea typeface="Trebuchet MS" pitchFamily="34" charset="-122"/>
                 <a:cs typeface="Trebuchet MS" pitchFamily="34" charset="-120"/>
               </a:rPr>
-              <a:t>endocrine</a:t>
+              <a:t>endorphins</a:t>
             </a:r>
             <a:endParaRPr lang="en-US" sz="2800" dirty="0"/>
           </a:p>
@@ -27582,7 +27227,7 @@
         </p:nvSpPr>
         <p:spPr>
           <a:xfrm>
-            <a:off x="2938272" y="2258568"/>
+            <a:off x="2221992" y="2258568"/>
             <a:ext cx="1828800" cy="292608"/>
           </a:xfrm>
           <a:prstGeom prst="rect">
@@ -27616,7 +27261,7 @@
         </p:nvSpPr>
         <p:spPr>
           <a:xfrm>
-            <a:off x="2938272" y="2258568"/>
+            <a:off x="2221992" y="2258568"/>
             <a:ext cx="1828800" cy="292608"/>
           </a:xfrm>
           <a:prstGeom prst="rect">
@@ -27655,7 +27300,7 @@
         </p:nvSpPr>
         <p:spPr>
           <a:xfrm>
-            <a:off x="2938272" y="2569464"/>
+            <a:off x="2221992" y="2569464"/>
             <a:ext cx="1828800" cy="201168"/>
           </a:xfrm>
           <a:prstGeom prst="rect">
@@ -27694,7 +27339,7 @@
         </p:nvSpPr>
         <p:spPr>
           <a:xfrm>
-            <a:off x="5803392" y="2258568"/>
+            <a:off x="4370832" y="2258568"/>
             <a:ext cx="1828800" cy="292608"/>
           </a:xfrm>
           <a:prstGeom prst="rect">
@@ -27728,7 +27373,7 @@
         </p:nvSpPr>
         <p:spPr>
           <a:xfrm>
-            <a:off x="5803392" y="2258568"/>
+            <a:off x="4370832" y="2258568"/>
             <a:ext cx="1828800" cy="292608"/>
           </a:xfrm>
           <a:prstGeom prst="rect">
@@ -27753,7 +27398,7 @@
                 <a:ea typeface="Trebuchet MS" pitchFamily="34" charset="-122"/>
                 <a:cs typeface="Trebuchet MS" pitchFamily="34" charset="-120"/>
               </a:rPr>
-              <a:t>crine</a:t>
+              <a:t>orphin</a:t>
             </a:r>
             <a:endParaRPr lang="en-US" sz="1300" dirty="0"/>
           </a:p>
@@ -27767,7 +27412,7 @@
         </p:nvSpPr>
         <p:spPr>
           <a:xfrm>
-            <a:off x="5803392" y="2569464"/>
+            <a:off x="4370832" y="2569464"/>
             <a:ext cx="1828800" cy="201168"/>
           </a:xfrm>
           <a:prstGeom prst="rect">
@@ -27792,7 +27437,7 @@
                 <a:ea typeface="Calibri" pitchFamily="34" charset="-122"/>
                 <a:cs typeface="Calibri" pitchFamily="34" charset="-120"/>
               </a:rPr>
-              <a:t>to secrete, release</a:t>
+              <a:t>relating to morphine, a pain-relief substance</a:t>
             </a:r>
             <a:endParaRPr lang="en-US" sz="850" dirty="0"/>
           </a:p>
@@ -27801,6 +27446,118 @@
       <p:sp>
         <p:nvSpPr>
           <p:cNvPr id="22" name="Shape 20"/>
+          <p:cNvSpPr/>
+          <p:nvPr/>
+        </p:nvSpPr>
+        <p:spPr>
+          <a:xfrm>
+            <a:off x="6519672" y="2258568"/>
+            <a:ext cx="1828800" cy="292608"/>
+          </a:xfrm>
+          <a:prstGeom prst="rect">
+            <a:avLst>
+              <a:gd name="adj" fmla="val 25000"/>
+            </a:avLst>
+          </a:prstGeom>
+          <a:solidFill>
+            <a:srgbClr val="FCE7F3"/>
+          </a:solidFill>
+          <a:ln w="19050">
+            <a:solidFill>
+              <a:srgbClr val="DB2777"/>
+            </a:solidFill>
+            <a:prstDash val="solid"/>
+          </a:ln>
+          <a:effectLst>
+            <a:outerShdw sx="100000" sy="100000" kx="0" ky="0" algn="bl" rotWithShape="0" blurRad="101600" dist="38100" dir="8100000">
+              <a:srgbClr val="000000">
+                <a:alpha val="12000"/>
+              </a:srgbClr>
+            </a:outerShdw>
+          </a:effectLst>
+        </p:spPr>
+      </p:sp>
+      <p:sp>
+        <p:nvSpPr>
+          <p:cNvPr id="23" name="Text 21"/>
+          <p:cNvSpPr/>
+          <p:nvPr/>
+        </p:nvSpPr>
+        <p:spPr>
+          <a:xfrm>
+            <a:off x="6519672" y="2258568"/>
+            <a:ext cx="1828800" cy="292608"/>
+          </a:xfrm>
+          <a:prstGeom prst="rect">
+            <a:avLst/>
+          </a:prstGeom>
+          <a:noFill/>
+          <a:ln/>
+        </p:spPr>
+        <p:txBody>
+          <a:bodyPr wrap="square" lIns="0" tIns="0" rIns="0" bIns="0" rtlCol="0" anchor="ctr"/>
+          <a:lstStyle/>
+          <a:p>
+            <a:pPr algn="ctr" indent="0" marL="0">
+              <a:buNone/>
+            </a:pPr>
+            <a:r>
+              <a:rPr lang="en-US" sz="1300" b="1" dirty="0">
+                <a:solidFill>
+                  <a:srgbClr val="9D174D"/>
+                </a:solidFill>
+                <a:latin typeface="Trebuchet MS" pitchFamily="34" charset="0"/>
+                <a:ea typeface="Trebuchet MS" pitchFamily="34" charset="-122"/>
+                <a:cs typeface="Trebuchet MS" pitchFamily="34" charset="-120"/>
+              </a:rPr>
+              <a:t>s</a:t>
+            </a:r>
+            <a:endParaRPr lang="en-US" sz="1300" dirty="0"/>
+          </a:p>
+        </p:txBody>
+      </p:sp>
+      <p:sp>
+        <p:nvSpPr>
+          <p:cNvPr id="24" name="Text 22"/>
+          <p:cNvSpPr/>
+          <p:nvPr/>
+        </p:nvSpPr>
+        <p:spPr>
+          <a:xfrm>
+            <a:off x="6519672" y="2569464"/>
+            <a:ext cx="1828800" cy="201168"/>
+          </a:xfrm>
+          <a:prstGeom prst="rect">
+            <a:avLst/>
+          </a:prstGeom>
+          <a:noFill/>
+          <a:ln/>
+        </p:spPr>
+        <p:txBody>
+          <a:bodyPr wrap="square" lIns="0" tIns="0" rIns="0" bIns="0" rtlCol="0" anchor="t"/>
+          <a:lstStyle/>
+          <a:p>
+            <a:pPr algn="ctr" indent="0" marL="0">
+              <a:buNone/>
+            </a:pPr>
+            <a:r>
+              <a:rPr lang="en-US" sz="850" dirty="0">
+                <a:solidFill>
+                  <a:srgbClr val="475569"/>
+                </a:solidFill>
+                <a:latin typeface="Calibri" pitchFamily="34" charset="0"/>
+                <a:ea typeface="Calibri" pitchFamily="34" charset="-122"/>
+                <a:cs typeface="Calibri" pitchFamily="34" charset="-120"/>
+              </a:rPr>
+              <a:t>more than one</a:t>
+            </a:r>
+            <a:endParaRPr lang="en-US" sz="850" dirty="0"/>
+          </a:p>
+        </p:txBody>
+      </p:sp>
+      <p:sp>
+        <p:nvSpPr>
+          <p:cNvPr id="25" name="Shape 23"/>
           <p:cNvSpPr/>
           <p:nvPr/>
         </p:nvSpPr>
@@ -27827,7 +27584,7 @@
       </p:sp>
       <p:sp>
         <p:nvSpPr>
-          <p:cNvPr id="23" name="Text 21"/>
+          <p:cNvPr id="26" name="Text 24"/>
           <p:cNvSpPr/>
           <p:nvPr/>
         </p:nvSpPr>
@@ -27866,7 +27623,7 @@
       </p:sp>
       <p:sp>
         <p:nvSpPr>
-          <p:cNvPr id="24" name="Shape 22"/>
+          <p:cNvPr id="27" name="Shape 25"/>
           <p:cNvSpPr/>
           <p:nvPr/>
         </p:nvSpPr>
@@ -27893,7 +27650,7 @@
       </p:sp>
       <p:sp>
         <p:nvSpPr>
-          <p:cNvPr id="25" name="Shape 23"/>
+          <p:cNvPr id="28" name="Shape 26"/>
           <p:cNvSpPr/>
           <p:nvPr/>
         </p:nvSpPr>
@@ -27920,7 +27677,7 @@
       </p:sp>
       <p:sp>
         <p:nvSpPr>
-          <p:cNvPr id="26" name="Text 24"/>
+          <p:cNvPr id="29" name="Text 27"/>
           <p:cNvSpPr/>
           <p:nvPr/>
         </p:nvSpPr>
@@ -27959,7 +27716,7 @@
       </p:sp>
       <p:sp>
         <p:nvSpPr>
-          <p:cNvPr id="27" name="Text 25"/>
+          <p:cNvPr id="30" name="Text 28"/>
           <p:cNvSpPr/>
           <p:nvPr/>
         </p:nvSpPr>
@@ -27998,7 +27755,7 @@
       </p:sp>
       <p:sp>
         <p:nvSpPr>
-          <p:cNvPr id="28" name="Shape 26"/>
+          <p:cNvPr id="31" name="Shape 29"/>
           <p:cNvSpPr/>
           <p:nvPr/>
         </p:nvSpPr>
@@ -28025,7 +27782,7 @@
       </p:sp>
       <p:sp>
         <p:nvSpPr>
-          <p:cNvPr id="29" name="Text 27"/>
+          <p:cNvPr id="32" name="Text 30"/>
           <p:cNvSpPr/>
           <p:nvPr/>
         </p:nvSpPr>
@@ -28056,7 +27813,7 @@
                 <a:ea typeface="Trebuchet MS" pitchFamily="34" charset="-122"/>
                 <a:cs typeface="Trebuchet MS" pitchFamily="34" charset="-120"/>
               </a:rPr>
-              <a:t>do</a:t>
+              <a:t>dor</a:t>
             </a:r>
             <a:endParaRPr lang="en-US" sz="1400" dirty="0"/>
           </a:p>
@@ -28064,7 +27821,7 @@
       </p:sp>
       <p:sp>
         <p:nvSpPr>
-          <p:cNvPr id="30" name="Text 28"/>
+          <p:cNvPr id="33" name="Text 31"/>
           <p:cNvSpPr/>
           <p:nvPr/>
         </p:nvSpPr>
@@ -28103,7 +27860,7 @@
       </p:sp>
       <p:sp>
         <p:nvSpPr>
-          <p:cNvPr id="31" name="Shape 29"/>
+          <p:cNvPr id="34" name="Shape 32"/>
           <p:cNvSpPr/>
           <p:nvPr/>
         </p:nvSpPr>
@@ -28130,7 +27887,7 @@
       </p:sp>
       <p:sp>
         <p:nvSpPr>
-          <p:cNvPr id="32" name="Text 30"/>
+          <p:cNvPr id="35" name="Text 33"/>
           <p:cNvSpPr/>
           <p:nvPr/>
         </p:nvSpPr>
@@ -28161,7 +27918,7 @@
                 <a:ea typeface="Trebuchet MS" pitchFamily="34" charset="-122"/>
                 <a:cs typeface="Trebuchet MS" pitchFamily="34" charset="-120"/>
               </a:rPr>
-              <a:t>crine</a:t>
+              <a:t>phins</a:t>
             </a:r>
             <a:endParaRPr lang="en-US" sz="1400" dirty="0"/>
           </a:p>
@@ -28169,7 +27926,7 @@
       </p:sp>
       <p:sp>
         <p:nvSpPr>
-          <p:cNvPr id="33" name="Shape 31"/>
+          <p:cNvPr id="36" name="Shape 34"/>
           <p:cNvSpPr/>
           <p:nvPr/>
         </p:nvSpPr>
@@ -28196,7 +27953,7 @@
       </p:sp>
       <p:sp>
         <p:nvSpPr>
-          <p:cNvPr id="34" name="Text 32"/>
+          <p:cNvPr id="37" name="Text 35"/>
           <p:cNvSpPr/>
           <p:nvPr/>
         </p:nvSpPr>
@@ -28235,7 +27992,7 @@
       </p:sp>
       <p:sp>
         <p:nvSpPr>
-          <p:cNvPr id="35" name="Shape 33"/>
+          <p:cNvPr id="38" name="Shape 36"/>
           <p:cNvSpPr/>
           <p:nvPr/>
         </p:nvSpPr>
@@ -28262,7 +28019,7 @@
       </p:sp>
       <p:sp>
         <p:nvSpPr>
-          <p:cNvPr id="36" name="Shape 34"/>
+          <p:cNvPr id="39" name="Shape 37"/>
           <p:cNvSpPr/>
           <p:nvPr/>
         </p:nvSpPr>
@@ -28289,7 +28046,7 @@
       </p:sp>
       <p:sp>
         <p:nvSpPr>
-          <p:cNvPr id="37" name="Text 35"/>
+          <p:cNvPr id="40" name="Text 38"/>
           <p:cNvSpPr/>
           <p:nvPr/>
         </p:nvSpPr>
@@ -28328,7 +28085,7 @@
       </p:sp>
       <p:sp>
         <p:nvSpPr>
-          <p:cNvPr id="38" name="Shape 36"/>
+          <p:cNvPr id="41" name="Shape 39"/>
           <p:cNvSpPr/>
           <p:nvPr/>
         </p:nvSpPr>
@@ -28355,7 +28112,7 @@
       </p:sp>
       <p:sp>
         <p:nvSpPr>
-          <p:cNvPr id="39" name="Text 37"/>
+          <p:cNvPr id="42" name="Text 40"/>
           <p:cNvSpPr/>
           <p:nvPr/>
         </p:nvSpPr>
@@ -28394,7 +28151,7 @@
       </p:sp>
       <p:sp>
         <p:nvSpPr>
-          <p:cNvPr id="40" name="Shape 38"/>
+          <p:cNvPr id="43" name="Shape 41"/>
           <p:cNvSpPr/>
           <p:nvPr/>
         </p:nvSpPr>
@@ -28421,7 +28178,7 @@
       </p:sp>
       <p:sp>
         <p:nvSpPr>
-          <p:cNvPr id="41" name="Text 39"/>
+          <p:cNvPr id="44" name="Text 42"/>
           <p:cNvSpPr/>
           <p:nvPr/>
         </p:nvSpPr>
@@ -28460,7 +28217,7 @@
       </p:sp>
       <p:sp>
         <p:nvSpPr>
-          <p:cNvPr id="42" name="Shape 40"/>
+          <p:cNvPr id="45" name="Shape 43"/>
           <p:cNvSpPr/>
           <p:nvPr/>
         </p:nvSpPr>
@@ -28487,7 +28244,7 @@
       </p:sp>
       <p:sp>
         <p:nvSpPr>
-          <p:cNvPr id="43" name="Text 41"/>
+          <p:cNvPr id="46" name="Text 44"/>
           <p:cNvSpPr/>
           <p:nvPr/>
         </p:nvSpPr>
@@ -28518,7 +28275,7 @@
                 <a:ea typeface="Trebuchet MS" pitchFamily="34" charset="-122"/>
                 <a:cs typeface="Trebuchet MS" pitchFamily="34" charset="-120"/>
               </a:rPr>
-              <a:t>o</a:t>
+              <a:t>or</a:t>
             </a:r>
             <a:endParaRPr lang="en-US" sz="900" dirty="0"/>
           </a:p>
@@ -28526,7 +28283,7 @@
       </p:sp>
       <p:sp>
         <p:nvSpPr>
-          <p:cNvPr id="44" name="Shape 42"/>
+          <p:cNvPr id="47" name="Shape 45"/>
           <p:cNvSpPr/>
           <p:nvPr/>
         </p:nvSpPr>
@@ -28553,7 +28310,7 @@
       </p:sp>
       <p:sp>
         <p:nvSpPr>
-          <p:cNvPr id="45" name="Text 43"/>
+          <p:cNvPr id="48" name="Text 46"/>
           <p:cNvSpPr/>
           <p:nvPr/>
         </p:nvSpPr>
@@ -28584,7 +28341,7 @@
                 <a:ea typeface="Trebuchet MS" pitchFamily="34" charset="-122"/>
                 <a:cs typeface="Trebuchet MS" pitchFamily="34" charset="-120"/>
               </a:rPr>
-              <a:t>c</a:t>
+              <a:t>ph</a:t>
             </a:r>
             <a:endParaRPr lang="en-US" sz="900" dirty="0"/>
           </a:p>
@@ -28592,7 +28349,7 @@
       </p:sp>
       <p:sp>
         <p:nvSpPr>
-          <p:cNvPr id="46" name="Text 44"/>
+          <p:cNvPr id="49" name="Text 47"/>
           <p:cNvSpPr/>
           <p:nvPr/>
         </p:nvSpPr>
@@ -28623,7 +28380,7 @@
                 <a:ea typeface="Calibri" pitchFamily="34" charset="-122"/>
                 <a:cs typeface="Calibri" pitchFamily="34" charset="-120"/>
               </a:rPr>
-              <a:t>/k/</a:t>
+              <a:t>/f/</a:t>
             </a:r>
             <a:endParaRPr lang="en-US" sz="750" dirty="0"/>
           </a:p>
@@ -28631,7 +28388,7 @@
       </p:sp>
       <p:sp>
         <p:nvSpPr>
-          <p:cNvPr id="47" name="Shape 45"/>
+          <p:cNvPr id="50" name="Shape 48"/>
           <p:cNvSpPr/>
           <p:nvPr/>
         </p:nvSpPr>
@@ -28658,7 +28415,7 @@
       </p:sp>
       <p:sp>
         <p:nvSpPr>
-          <p:cNvPr id="48" name="Text 46"/>
+          <p:cNvPr id="51" name="Text 49"/>
           <p:cNvSpPr/>
           <p:nvPr/>
         </p:nvSpPr>
@@ -28689,7 +28446,7 @@
                 <a:ea typeface="Trebuchet MS" pitchFamily="34" charset="-122"/>
                 <a:cs typeface="Trebuchet MS" pitchFamily="34" charset="-120"/>
               </a:rPr>
-              <a:t>r</a:t>
+              <a:t>i</a:t>
             </a:r>
             <a:endParaRPr lang="en-US" sz="900" dirty="0"/>
           </a:p>
@@ -28697,7 +28454,7 @@
       </p:sp>
       <p:sp>
         <p:nvSpPr>
-          <p:cNvPr id="49" name="Shape 47"/>
+          <p:cNvPr id="52" name="Shape 50"/>
           <p:cNvSpPr/>
           <p:nvPr/>
         </p:nvSpPr>
@@ -28724,7 +28481,7 @@
       </p:sp>
       <p:sp>
         <p:nvSpPr>
-          <p:cNvPr id="50" name="Text 48"/>
+          <p:cNvPr id="53" name="Text 51"/>
           <p:cNvSpPr/>
           <p:nvPr/>
         </p:nvSpPr>
@@ -28755,7 +28512,7 @@
                 <a:ea typeface="Trebuchet MS" pitchFamily="34" charset="-122"/>
                 <a:cs typeface="Trebuchet MS" pitchFamily="34" charset="-120"/>
               </a:rPr>
-              <a:t>i</a:t>
+              <a:t>n</a:t>
             </a:r>
             <a:endParaRPr lang="en-US" sz="900" dirty="0"/>
           </a:p>
@@ -28763,7 +28520,7 @@
       </p:sp>
       <p:sp>
         <p:nvSpPr>
-          <p:cNvPr id="51" name="Shape 49"/>
+          <p:cNvPr id="54" name="Shape 52"/>
           <p:cNvSpPr/>
           <p:nvPr/>
         </p:nvSpPr>
@@ -28790,7 +28547,7 @@
       </p:sp>
       <p:sp>
         <p:nvSpPr>
-          <p:cNvPr id="52" name="Text 50"/>
+          <p:cNvPr id="55" name="Text 53"/>
           <p:cNvSpPr/>
           <p:nvPr/>
         </p:nvSpPr>
@@ -28821,7 +28578,7 @@
                 <a:ea typeface="Trebuchet MS" pitchFamily="34" charset="-122"/>
                 <a:cs typeface="Trebuchet MS" pitchFamily="34" charset="-120"/>
               </a:rPr>
-              <a:t>ne</a:t>
+              <a:t>s</a:t>
             </a:r>
             <a:endParaRPr lang="en-US" sz="900" dirty="0"/>
           </a:p>
@@ -29113,7 +28870,7 @@
                 <a:ea typeface="Calibri" pitchFamily="34" charset="-122"/>
                 <a:cs typeface="Calibri" pitchFamily="34" charset="-120"/>
               </a:rPr>
-              <a:t>Word Labs  •  wordlabs.app  •  Root: 'endo' = within, inside, inner</a:t>
+              <a:t>Word Labs  •  wordlabs.app  •  Root: 'endo' = within, inside, internal</a:t>
             </a:r>
             <a:endParaRPr lang="en-US" sz="800" dirty="0"/>
           </a:p>
@@ -29252,7 +29009,7 @@
                 <a:ea typeface="Trebuchet MS" pitchFamily="34" charset="-122"/>
                 <a:cs typeface="Trebuchet MS" pitchFamily="34" charset="-120"/>
               </a:rPr>
-              <a:t>endoscope</a:t>
+              <a:t>endoskeleton</a:t>
             </a:r>
             <a:endParaRPr lang="en-US" sz="2800" dirty="0"/>
           </a:p>
@@ -29940,7 +29697,7 @@
                 <a:ea typeface="Calibri" pitchFamily="34" charset="-122"/>
                 <a:cs typeface="Calibri" pitchFamily="34" charset="-120"/>
               </a:rPr>
-              <a:t>Word Labs  •  wordlabs.app  •  Root: 'endo' = within, inside, inner</a:t>
+              <a:t>Word Labs  •  wordlabs.app  •  Root: 'endo' = within, inside, internal</a:t>
             </a:r>
             <a:endParaRPr lang="en-US" sz="800" dirty="0"/>
           </a:p>
@@ -30079,7 +29836,7 @@
                 <a:ea typeface="Trebuchet MS" pitchFamily="34" charset="-122"/>
                 <a:cs typeface="Trebuchet MS" pitchFamily="34" charset="-120"/>
               </a:rPr>
-              <a:t>endoscope</a:t>
+              <a:t>endoskeleton</a:t>
             </a:r>
             <a:endParaRPr lang="en-US" sz="2800" dirty="0"/>
           </a:p>
@@ -30159,7 +29916,7 @@
         </p:nvSpPr>
         <p:spPr>
           <a:xfrm>
-            <a:off x="2938272" y="2258568"/>
+            <a:off x="2221992" y="2258568"/>
             <a:ext cx="1828800" cy="292608"/>
           </a:xfrm>
           <a:prstGeom prst="rect">
@@ -30193,7 +29950,7 @@
         </p:nvSpPr>
         <p:spPr>
           <a:xfrm>
-            <a:off x="2938272" y="2258568"/>
+            <a:off x="2221992" y="2258568"/>
             <a:ext cx="1828800" cy="292608"/>
           </a:xfrm>
           <a:prstGeom prst="rect">
@@ -30232,7 +29989,7 @@
         </p:nvSpPr>
         <p:spPr>
           <a:xfrm>
-            <a:off x="2938272" y="2569464"/>
+            <a:off x="2221992" y="2569464"/>
             <a:ext cx="1828800" cy="201168"/>
           </a:xfrm>
           <a:prstGeom prst="rect">
@@ -30271,7 +30028,7 @@
         </p:nvSpPr>
         <p:spPr>
           <a:xfrm>
-            <a:off x="5803392" y="2258568"/>
+            <a:off x="4370832" y="2258568"/>
             <a:ext cx="1828800" cy="292608"/>
           </a:xfrm>
           <a:prstGeom prst="rect">
@@ -30305,7 +30062,7 @@
         </p:nvSpPr>
         <p:spPr>
           <a:xfrm>
-            <a:off x="5803392" y="2258568"/>
+            <a:off x="4370832" y="2258568"/>
             <a:ext cx="1828800" cy="292608"/>
           </a:xfrm>
           <a:prstGeom prst="rect">
@@ -30330,7 +30087,7 @@
                 <a:ea typeface="Trebuchet MS" pitchFamily="34" charset="-122"/>
                 <a:cs typeface="Trebuchet MS" pitchFamily="34" charset="-120"/>
               </a:rPr>
-              <a:t>scope</a:t>
+              <a:t>skelet</a:t>
             </a:r>
             <a:endParaRPr lang="en-US" sz="1300" dirty="0"/>
           </a:p>
@@ -30344,7 +30101,7 @@
         </p:nvSpPr>
         <p:spPr>
           <a:xfrm>
-            <a:off x="5803392" y="2569464"/>
+            <a:off x="4370832" y="2569464"/>
             <a:ext cx="1828800" cy="201168"/>
           </a:xfrm>
           <a:prstGeom prst="rect">
@@ -30369,7 +30126,7 @@
                 <a:ea typeface="Calibri" pitchFamily="34" charset="-122"/>
                 <a:cs typeface="Calibri" pitchFamily="34" charset="-120"/>
               </a:rPr>
-              <a:t>to look at, observe</a:t>
+              <a:t>dried up body, skeleton</a:t>
             </a:r>
             <a:endParaRPr lang="en-US" sz="850" dirty="0"/>
           </a:p>
@@ -30378,6 +30135,118 @@
       <p:sp>
         <p:nvSpPr>
           <p:cNvPr id="22" name="Shape 20"/>
+          <p:cNvSpPr/>
+          <p:nvPr/>
+        </p:nvSpPr>
+        <p:spPr>
+          <a:xfrm>
+            <a:off x="6519672" y="2258568"/>
+            <a:ext cx="1828800" cy="292608"/>
+          </a:xfrm>
+          <a:prstGeom prst="rect">
+            <a:avLst>
+              <a:gd name="adj" fmla="val 25000"/>
+            </a:avLst>
+          </a:prstGeom>
+          <a:solidFill>
+            <a:srgbClr val="FCE7F3"/>
+          </a:solidFill>
+          <a:ln w="19050">
+            <a:solidFill>
+              <a:srgbClr val="DB2777"/>
+            </a:solidFill>
+            <a:prstDash val="solid"/>
+          </a:ln>
+          <a:effectLst>
+            <a:outerShdw sx="100000" sy="100000" kx="0" ky="0" algn="bl" rotWithShape="0" blurRad="101600" dist="38100" dir="8100000">
+              <a:srgbClr val="000000">
+                <a:alpha val="12000"/>
+              </a:srgbClr>
+            </a:outerShdw>
+          </a:effectLst>
+        </p:spPr>
+      </p:sp>
+      <p:sp>
+        <p:nvSpPr>
+          <p:cNvPr id="23" name="Text 21"/>
+          <p:cNvSpPr/>
+          <p:nvPr/>
+        </p:nvSpPr>
+        <p:spPr>
+          <a:xfrm>
+            <a:off x="6519672" y="2258568"/>
+            <a:ext cx="1828800" cy="292608"/>
+          </a:xfrm>
+          <a:prstGeom prst="rect">
+            <a:avLst/>
+          </a:prstGeom>
+          <a:noFill/>
+          <a:ln/>
+        </p:spPr>
+        <p:txBody>
+          <a:bodyPr wrap="square" lIns="0" tIns="0" rIns="0" bIns="0" rtlCol="0" anchor="ctr"/>
+          <a:lstStyle/>
+          <a:p>
+            <a:pPr algn="ctr" indent="0" marL="0">
+              <a:buNone/>
+            </a:pPr>
+            <a:r>
+              <a:rPr lang="en-US" sz="1300" b="1" dirty="0">
+                <a:solidFill>
+                  <a:srgbClr val="9D174D"/>
+                </a:solidFill>
+                <a:latin typeface="Trebuchet MS" pitchFamily="34" charset="0"/>
+                <a:ea typeface="Trebuchet MS" pitchFamily="34" charset="-122"/>
+                <a:cs typeface="Trebuchet MS" pitchFamily="34" charset="-120"/>
+              </a:rPr>
+              <a:t>on</a:t>
+            </a:r>
+            <a:endParaRPr lang="en-US" sz="1300" dirty="0"/>
+          </a:p>
+        </p:txBody>
+      </p:sp>
+      <p:sp>
+        <p:nvSpPr>
+          <p:cNvPr id="24" name="Text 22"/>
+          <p:cNvSpPr/>
+          <p:nvPr/>
+        </p:nvSpPr>
+        <p:spPr>
+          <a:xfrm>
+            <a:off x="6519672" y="2569464"/>
+            <a:ext cx="1828800" cy="201168"/>
+          </a:xfrm>
+          <a:prstGeom prst="rect">
+            <a:avLst/>
+          </a:prstGeom>
+          <a:noFill/>
+          <a:ln/>
+        </p:spPr>
+        <p:txBody>
+          <a:bodyPr wrap="square" lIns="0" tIns="0" rIns="0" bIns="0" rtlCol="0" anchor="t"/>
+          <a:lstStyle/>
+          <a:p>
+            <a:pPr algn="ctr" indent="0" marL="0">
+              <a:buNone/>
+            </a:pPr>
+            <a:r>
+              <a:rPr lang="en-US" sz="850" dirty="0">
+                <a:solidFill>
+                  <a:srgbClr val="475569"/>
+                </a:solidFill>
+                <a:latin typeface="Calibri" pitchFamily="34" charset="0"/>
+                <a:ea typeface="Calibri" pitchFamily="34" charset="-122"/>
+                <a:cs typeface="Calibri" pitchFamily="34" charset="-120"/>
+              </a:rPr>
+              <a:t>relating to</a:t>
+            </a:r>
+            <a:endParaRPr lang="en-US" sz="850" dirty="0"/>
+          </a:p>
+        </p:txBody>
+      </p:sp>
+      <p:sp>
+        <p:nvSpPr>
+          <p:cNvPr id="25" name="Shape 23"/>
           <p:cNvSpPr/>
           <p:nvPr/>
         </p:nvSpPr>
@@ -30404,7 +30273,7 @@
       </p:sp>
       <p:sp>
         <p:nvSpPr>
-          <p:cNvPr id="23" name="Text 21"/>
+          <p:cNvPr id="26" name="Text 24"/>
           <p:cNvSpPr/>
           <p:nvPr/>
         </p:nvSpPr>
@@ -30443,7 +30312,7 @@
       </p:sp>
       <p:sp>
         <p:nvSpPr>
-          <p:cNvPr id="24" name="Shape 22"/>
+          <p:cNvPr id="27" name="Shape 25"/>
           <p:cNvSpPr/>
           <p:nvPr/>
         </p:nvSpPr>
@@ -30470,7 +30339,7 @@
       </p:sp>
       <p:sp>
         <p:nvSpPr>
-          <p:cNvPr id="25" name="Text 23"/>
+          <p:cNvPr id="28" name="Text 26"/>
           <p:cNvSpPr/>
           <p:nvPr/>
         </p:nvSpPr>
@@ -30509,7 +30378,7 @@
       </p:sp>
       <p:sp>
         <p:nvSpPr>
-          <p:cNvPr id="26" name="Shape 24"/>
+          <p:cNvPr id="29" name="Shape 27"/>
           <p:cNvSpPr/>
           <p:nvPr/>
         </p:nvSpPr>
@@ -30536,7 +30405,7 @@
       </p:sp>
       <p:sp>
         <p:nvSpPr>
-          <p:cNvPr id="27" name="Text 25"/>
+          <p:cNvPr id="30" name="Text 28"/>
           <p:cNvSpPr/>
           <p:nvPr/>
         </p:nvSpPr>
@@ -30575,7 +30444,7 @@
       </p:sp>
       <p:sp>
         <p:nvSpPr>
-          <p:cNvPr id="28" name="Shape 26"/>
+          <p:cNvPr id="31" name="Shape 29"/>
           <p:cNvSpPr/>
           <p:nvPr/>
         </p:nvSpPr>
@@ -30602,7 +30471,7 @@
       </p:sp>
       <p:sp>
         <p:nvSpPr>
-          <p:cNvPr id="29" name="Text 27"/>
+          <p:cNvPr id="32" name="Text 30"/>
           <p:cNvSpPr/>
           <p:nvPr/>
         </p:nvSpPr>
@@ -30925,7 +30794,7 @@
                 <a:ea typeface="Calibri" pitchFamily="34" charset="-122"/>
                 <a:cs typeface="Calibri" pitchFamily="34" charset="-120"/>
               </a:rPr>
-              <a:t>Word Labs  •  wordlabs.app  •  Root: 'endo' = within, inside, inner</a:t>
+              <a:t>Word Labs  •  wordlabs.app  •  Root: 'endo' = within, inside, internal</a:t>
             </a:r>
             <a:endParaRPr lang="en-US" sz="800" dirty="0"/>
           </a:p>
@@ -31064,7 +30933,7 @@
                 <a:ea typeface="Trebuchet MS" pitchFamily="34" charset="-122"/>
                 <a:cs typeface="Trebuchet MS" pitchFamily="34" charset="-120"/>
               </a:rPr>
-              <a:t>endoscope</a:t>
+              <a:t>endoskeleton</a:t>
             </a:r>
             <a:endParaRPr lang="en-US" sz="2800" dirty="0"/>
           </a:p>
@@ -31144,7 +31013,7 @@
         </p:nvSpPr>
         <p:spPr>
           <a:xfrm>
-            <a:off x="2938272" y="2258568"/>
+            <a:off x="2221992" y="2258568"/>
             <a:ext cx="1828800" cy="292608"/>
           </a:xfrm>
           <a:prstGeom prst="rect">
@@ -31178,7 +31047,7 @@
         </p:nvSpPr>
         <p:spPr>
           <a:xfrm>
-            <a:off x="2938272" y="2258568"/>
+            <a:off x="2221992" y="2258568"/>
             <a:ext cx="1828800" cy="292608"/>
           </a:xfrm>
           <a:prstGeom prst="rect">
@@ -31217,7 +31086,7 @@
         </p:nvSpPr>
         <p:spPr>
           <a:xfrm>
-            <a:off x="2938272" y="2569464"/>
+            <a:off x="2221992" y="2569464"/>
             <a:ext cx="1828800" cy="201168"/>
           </a:xfrm>
           <a:prstGeom prst="rect">
@@ -31256,7 +31125,7 @@
         </p:nvSpPr>
         <p:spPr>
           <a:xfrm>
-            <a:off x="5803392" y="2258568"/>
+            <a:off x="4370832" y="2258568"/>
             <a:ext cx="1828800" cy="292608"/>
           </a:xfrm>
           <a:prstGeom prst="rect">
@@ -31290,7 +31159,7 @@
         </p:nvSpPr>
         <p:spPr>
           <a:xfrm>
-            <a:off x="5803392" y="2258568"/>
+            <a:off x="4370832" y="2258568"/>
             <a:ext cx="1828800" cy="292608"/>
           </a:xfrm>
           <a:prstGeom prst="rect">
@@ -31315,7 +31184,7 @@
                 <a:ea typeface="Trebuchet MS" pitchFamily="34" charset="-122"/>
                 <a:cs typeface="Trebuchet MS" pitchFamily="34" charset="-120"/>
               </a:rPr>
-              <a:t>scope</a:t>
+              <a:t>skelet</a:t>
             </a:r>
             <a:endParaRPr lang="en-US" sz="1300" dirty="0"/>
           </a:p>
@@ -31329,7 +31198,7 @@
         </p:nvSpPr>
         <p:spPr>
           <a:xfrm>
-            <a:off x="5803392" y="2569464"/>
+            <a:off x="4370832" y="2569464"/>
             <a:ext cx="1828800" cy="201168"/>
           </a:xfrm>
           <a:prstGeom prst="rect">
@@ -31354,7 +31223,7 @@
                 <a:ea typeface="Calibri" pitchFamily="34" charset="-122"/>
                 <a:cs typeface="Calibri" pitchFamily="34" charset="-120"/>
               </a:rPr>
-              <a:t>to look at, observe</a:t>
+              <a:t>dried up body, skeleton</a:t>
             </a:r>
             <a:endParaRPr lang="en-US" sz="850" dirty="0"/>
           </a:p>
@@ -31363,6 +31232,118 @@
       <p:sp>
         <p:nvSpPr>
           <p:cNvPr id="22" name="Shape 20"/>
+          <p:cNvSpPr/>
+          <p:nvPr/>
+        </p:nvSpPr>
+        <p:spPr>
+          <a:xfrm>
+            <a:off x="6519672" y="2258568"/>
+            <a:ext cx="1828800" cy="292608"/>
+          </a:xfrm>
+          <a:prstGeom prst="rect">
+            <a:avLst>
+              <a:gd name="adj" fmla="val 25000"/>
+            </a:avLst>
+          </a:prstGeom>
+          <a:solidFill>
+            <a:srgbClr val="FCE7F3"/>
+          </a:solidFill>
+          <a:ln w="19050">
+            <a:solidFill>
+              <a:srgbClr val="DB2777"/>
+            </a:solidFill>
+            <a:prstDash val="solid"/>
+          </a:ln>
+          <a:effectLst>
+            <a:outerShdw sx="100000" sy="100000" kx="0" ky="0" algn="bl" rotWithShape="0" blurRad="101600" dist="38100" dir="8100000">
+              <a:srgbClr val="000000">
+                <a:alpha val="12000"/>
+              </a:srgbClr>
+            </a:outerShdw>
+          </a:effectLst>
+        </p:spPr>
+      </p:sp>
+      <p:sp>
+        <p:nvSpPr>
+          <p:cNvPr id="23" name="Text 21"/>
+          <p:cNvSpPr/>
+          <p:nvPr/>
+        </p:nvSpPr>
+        <p:spPr>
+          <a:xfrm>
+            <a:off x="6519672" y="2258568"/>
+            <a:ext cx="1828800" cy="292608"/>
+          </a:xfrm>
+          <a:prstGeom prst="rect">
+            <a:avLst/>
+          </a:prstGeom>
+          <a:noFill/>
+          <a:ln/>
+        </p:spPr>
+        <p:txBody>
+          <a:bodyPr wrap="square" lIns="0" tIns="0" rIns="0" bIns="0" rtlCol="0" anchor="ctr"/>
+          <a:lstStyle/>
+          <a:p>
+            <a:pPr algn="ctr" indent="0" marL="0">
+              <a:buNone/>
+            </a:pPr>
+            <a:r>
+              <a:rPr lang="en-US" sz="1300" b="1" dirty="0">
+                <a:solidFill>
+                  <a:srgbClr val="9D174D"/>
+                </a:solidFill>
+                <a:latin typeface="Trebuchet MS" pitchFamily="34" charset="0"/>
+                <a:ea typeface="Trebuchet MS" pitchFamily="34" charset="-122"/>
+                <a:cs typeface="Trebuchet MS" pitchFamily="34" charset="-120"/>
+              </a:rPr>
+              <a:t>on</a:t>
+            </a:r>
+            <a:endParaRPr lang="en-US" sz="1300" dirty="0"/>
+          </a:p>
+        </p:txBody>
+      </p:sp>
+      <p:sp>
+        <p:nvSpPr>
+          <p:cNvPr id="24" name="Text 22"/>
+          <p:cNvSpPr/>
+          <p:nvPr/>
+        </p:nvSpPr>
+        <p:spPr>
+          <a:xfrm>
+            <a:off x="6519672" y="2569464"/>
+            <a:ext cx="1828800" cy="201168"/>
+          </a:xfrm>
+          <a:prstGeom prst="rect">
+            <a:avLst/>
+          </a:prstGeom>
+          <a:noFill/>
+          <a:ln/>
+        </p:spPr>
+        <p:txBody>
+          <a:bodyPr wrap="square" lIns="0" tIns="0" rIns="0" bIns="0" rtlCol="0" anchor="t"/>
+          <a:lstStyle/>
+          <a:p>
+            <a:pPr algn="ctr" indent="0" marL="0">
+              <a:buNone/>
+            </a:pPr>
+            <a:r>
+              <a:rPr lang="en-US" sz="850" dirty="0">
+                <a:solidFill>
+                  <a:srgbClr val="475569"/>
+                </a:solidFill>
+                <a:latin typeface="Calibri" pitchFamily="34" charset="0"/>
+                <a:ea typeface="Calibri" pitchFamily="34" charset="-122"/>
+                <a:cs typeface="Calibri" pitchFamily="34" charset="-120"/>
+              </a:rPr>
+              <a:t>relating to</a:t>
+            </a:r>
+            <a:endParaRPr lang="en-US" sz="850" dirty="0"/>
+          </a:p>
+        </p:txBody>
+      </p:sp>
+      <p:sp>
+        <p:nvSpPr>
+          <p:cNvPr id="25" name="Shape 23"/>
           <p:cNvSpPr/>
           <p:nvPr/>
         </p:nvSpPr>
@@ -31389,7 +31370,7 @@
       </p:sp>
       <p:sp>
         <p:nvSpPr>
-          <p:cNvPr id="23" name="Text 21"/>
+          <p:cNvPr id="26" name="Text 24"/>
           <p:cNvSpPr/>
           <p:nvPr/>
         </p:nvSpPr>
@@ -31428,7 +31409,7 @@
       </p:sp>
       <p:sp>
         <p:nvSpPr>
-          <p:cNvPr id="24" name="Shape 22"/>
+          <p:cNvPr id="27" name="Shape 25"/>
           <p:cNvSpPr/>
           <p:nvPr/>
         </p:nvSpPr>
@@ -31455,14 +31436,14 @@
       </p:sp>
       <p:sp>
         <p:nvSpPr>
-          <p:cNvPr id="25" name="Shape 23"/>
-          <p:cNvSpPr/>
-          <p:nvPr/>
-        </p:nvSpPr>
-        <p:spPr>
-          <a:xfrm>
-            <a:off x="2313432" y="3364992"/>
-            <a:ext cx="1645920" cy="475488"/>
+          <p:cNvPr id="28" name="Shape 26"/>
+          <p:cNvSpPr/>
+          <p:nvPr/>
+        </p:nvSpPr>
+        <p:spPr>
+          <a:xfrm>
+            <a:off x="1978152" y="3364992"/>
+            <a:ext cx="1225296" cy="475488"/>
           </a:xfrm>
           <a:prstGeom prst="rect">
             <a:avLst>
@@ -31482,14 +31463,14 @@
       </p:sp>
       <p:sp>
         <p:nvSpPr>
-          <p:cNvPr id="26" name="Text 24"/>
-          <p:cNvSpPr/>
-          <p:nvPr/>
-        </p:nvSpPr>
-        <p:spPr>
-          <a:xfrm>
-            <a:off x="2313432" y="3364992"/>
-            <a:ext cx="1645920" cy="475488"/>
+          <p:cNvPr id="29" name="Text 27"/>
+          <p:cNvSpPr/>
+          <p:nvPr/>
+        </p:nvSpPr>
+        <p:spPr>
+          <a:xfrm>
+            <a:off x="1978152" y="3364992"/>
+            <a:ext cx="1225296" cy="475488"/>
           </a:xfrm>
           <a:prstGeom prst="rect">
             <a:avLst/>
@@ -31521,14 +31502,14 @@
       </p:sp>
       <p:sp>
         <p:nvSpPr>
-          <p:cNvPr id="27" name="Text 25"/>
-          <p:cNvSpPr/>
-          <p:nvPr/>
-        </p:nvSpPr>
-        <p:spPr>
-          <a:xfrm>
-            <a:off x="3959352" y="3364992"/>
-            <a:ext cx="411480" cy="475488"/>
+          <p:cNvPr id="30" name="Text 28"/>
+          <p:cNvSpPr/>
+          <p:nvPr/>
+        </p:nvSpPr>
+        <p:spPr>
+          <a:xfrm>
+            <a:off x="3203448" y="3364992"/>
+            <a:ext cx="76200" cy="475488"/>
           </a:xfrm>
           <a:prstGeom prst="rect">
             <a:avLst/>
@@ -31560,14 +31541,14 @@
       </p:sp>
       <p:sp>
         <p:nvSpPr>
-          <p:cNvPr id="28" name="Shape 26"/>
-          <p:cNvSpPr/>
-          <p:nvPr/>
-        </p:nvSpPr>
-        <p:spPr>
-          <a:xfrm>
-            <a:off x="4370832" y="3364992"/>
-            <a:ext cx="1645920" cy="475488"/>
+          <p:cNvPr id="31" name="Shape 29"/>
+          <p:cNvSpPr/>
+          <p:nvPr/>
+        </p:nvSpPr>
+        <p:spPr>
+          <a:xfrm>
+            <a:off x="3279648" y="3364992"/>
+            <a:ext cx="1225296" cy="475488"/>
           </a:xfrm>
           <a:prstGeom prst="rect">
             <a:avLst>
@@ -31587,14 +31568,14 @@
       </p:sp>
       <p:sp>
         <p:nvSpPr>
-          <p:cNvPr id="29" name="Text 27"/>
-          <p:cNvSpPr/>
-          <p:nvPr/>
-        </p:nvSpPr>
-        <p:spPr>
-          <a:xfrm>
-            <a:off x="4370832" y="3364992"/>
-            <a:ext cx="1645920" cy="475488"/>
+          <p:cNvPr id="32" name="Text 30"/>
+          <p:cNvSpPr/>
+          <p:nvPr/>
+        </p:nvSpPr>
+        <p:spPr>
+          <a:xfrm>
+            <a:off x="3279648" y="3364992"/>
+            <a:ext cx="1225296" cy="475488"/>
           </a:xfrm>
           <a:prstGeom prst="rect">
             <a:avLst/>
@@ -31626,14 +31607,14 @@
       </p:sp>
       <p:sp>
         <p:nvSpPr>
-          <p:cNvPr id="30" name="Text 28"/>
-          <p:cNvSpPr/>
-          <p:nvPr/>
-        </p:nvSpPr>
-        <p:spPr>
-          <a:xfrm>
-            <a:off x="6016752" y="3364992"/>
-            <a:ext cx="411480" cy="475488"/>
+          <p:cNvPr id="33" name="Text 31"/>
+          <p:cNvSpPr/>
+          <p:nvPr/>
+        </p:nvSpPr>
+        <p:spPr>
+          <a:xfrm>
+            <a:off x="4504944" y="3364992"/>
+            <a:ext cx="76200" cy="475488"/>
           </a:xfrm>
           <a:prstGeom prst="rect">
             <a:avLst/>
@@ -31665,14 +31646,14 @@
       </p:sp>
       <p:sp>
         <p:nvSpPr>
-          <p:cNvPr id="31" name="Shape 29"/>
-          <p:cNvSpPr/>
-          <p:nvPr/>
-        </p:nvSpPr>
-        <p:spPr>
-          <a:xfrm>
-            <a:off x="6428232" y="3364992"/>
-            <a:ext cx="1645920" cy="475488"/>
+          <p:cNvPr id="34" name="Shape 32"/>
+          <p:cNvSpPr/>
+          <p:nvPr/>
+        </p:nvSpPr>
+        <p:spPr>
+          <a:xfrm>
+            <a:off x="4581144" y="3364992"/>
+            <a:ext cx="1225296" cy="475488"/>
           </a:xfrm>
           <a:prstGeom prst="rect">
             <a:avLst>
@@ -31692,14 +31673,14 @@
       </p:sp>
       <p:sp>
         <p:nvSpPr>
-          <p:cNvPr id="32" name="Text 30"/>
-          <p:cNvSpPr/>
-          <p:nvPr/>
-        </p:nvSpPr>
-        <p:spPr>
-          <a:xfrm>
-            <a:off x="6428232" y="3364992"/>
-            <a:ext cx="1645920" cy="475488"/>
+          <p:cNvPr id="35" name="Text 33"/>
+          <p:cNvSpPr/>
+          <p:nvPr/>
+        </p:nvSpPr>
+        <p:spPr>
+          <a:xfrm>
+            <a:off x="4581144" y="3364992"/>
+            <a:ext cx="1225296" cy="475488"/>
           </a:xfrm>
           <a:prstGeom prst="rect">
             <a:avLst/>
@@ -31723,7 +31704,7 @@
                 <a:ea typeface="Trebuchet MS" pitchFamily="34" charset="-122"/>
                 <a:cs typeface="Trebuchet MS" pitchFamily="34" charset="-120"/>
               </a:rPr>
-              <a:t>scope</a:t>
+              <a:t>skel</a:t>
             </a:r>
             <a:endParaRPr lang="en-US" sz="1400" dirty="0"/>
           </a:p>
@@ -31731,7 +31712,217 @@
       </p:sp>
       <p:sp>
         <p:nvSpPr>
-          <p:cNvPr id="33" name="Shape 31"/>
+          <p:cNvPr id="36" name="Text 34"/>
+          <p:cNvSpPr/>
+          <p:nvPr/>
+        </p:nvSpPr>
+        <p:spPr>
+          <a:xfrm>
+            <a:off x="5806440" y="3364992"/>
+            <a:ext cx="76200" cy="475488"/>
+          </a:xfrm>
+          <a:prstGeom prst="rect">
+            <a:avLst/>
+          </a:prstGeom>
+          <a:noFill/>
+          <a:ln/>
+        </p:spPr>
+        <p:txBody>
+          <a:bodyPr wrap="square" lIns="0" tIns="0" rIns="0" bIns="0" rtlCol="0" anchor="ctr"/>
+          <a:lstStyle/>
+          <a:p>
+            <a:pPr algn="ctr" indent="0" marL="0">
+              <a:buNone/>
+            </a:pPr>
+            <a:r>
+              <a:rPr lang="en-US" sz="1600" b="1" dirty="0">
+                <a:solidFill>
+                  <a:srgbClr val="0D9488"/>
+                </a:solidFill>
+                <a:latin typeface="Trebuchet MS" pitchFamily="34" charset="0"/>
+                <a:ea typeface="Trebuchet MS" pitchFamily="34" charset="-122"/>
+                <a:cs typeface="Trebuchet MS" pitchFamily="34" charset="-120"/>
+              </a:rPr>
+              <a:t>·</a:t>
+            </a:r>
+            <a:endParaRPr lang="en-US" sz="1600" dirty="0"/>
+          </a:p>
+        </p:txBody>
+      </p:sp>
+      <p:sp>
+        <p:nvSpPr>
+          <p:cNvPr id="37" name="Shape 35"/>
+          <p:cNvSpPr/>
+          <p:nvPr/>
+        </p:nvSpPr>
+        <p:spPr>
+          <a:xfrm>
+            <a:off x="5882640" y="3364992"/>
+            <a:ext cx="1225296" cy="475488"/>
+          </a:xfrm>
+          <a:prstGeom prst="rect">
+            <a:avLst>
+              <a:gd name="adj" fmla="val 9615"/>
+            </a:avLst>
+          </a:prstGeom>
+          <a:solidFill>
+            <a:srgbClr val="FFFFFF"/>
+          </a:solidFill>
+          <a:ln w="12700">
+            <a:solidFill>
+              <a:srgbClr val="0D9488"/>
+            </a:solidFill>
+            <a:prstDash val="solid"/>
+          </a:ln>
+        </p:spPr>
+      </p:sp>
+      <p:sp>
+        <p:nvSpPr>
+          <p:cNvPr id="38" name="Text 36"/>
+          <p:cNvSpPr/>
+          <p:nvPr/>
+        </p:nvSpPr>
+        <p:spPr>
+          <a:xfrm>
+            <a:off x="5882640" y="3364992"/>
+            <a:ext cx="1225296" cy="475488"/>
+          </a:xfrm>
+          <a:prstGeom prst="rect">
+            <a:avLst/>
+          </a:prstGeom>
+          <a:noFill/>
+          <a:ln/>
+        </p:spPr>
+        <p:txBody>
+          <a:bodyPr wrap="square" lIns="0" tIns="0" rIns="0" bIns="0" rtlCol="0" anchor="ctr"/>
+          <a:lstStyle/>
+          <a:p>
+            <a:pPr algn="ctr" indent="0" marL="0">
+              <a:buNone/>
+            </a:pPr>
+            <a:r>
+              <a:rPr lang="en-US" sz="1400" b="1" dirty="0">
+                <a:solidFill>
+                  <a:srgbClr val="0D9488"/>
+                </a:solidFill>
+                <a:latin typeface="Trebuchet MS" pitchFamily="34" charset="0"/>
+                <a:ea typeface="Trebuchet MS" pitchFamily="34" charset="-122"/>
+                <a:cs typeface="Trebuchet MS" pitchFamily="34" charset="-120"/>
+              </a:rPr>
+              <a:t>e</a:t>
+            </a:r>
+            <a:endParaRPr lang="en-US" sz="1400" dirty="0"/>
+          </a:p>
+        </p:txBody>
+      </p:sp>
+      <p:sp>
+        <p:nvSpPr>
+          <p:cNvPr id="39" name="Text 37"/>
+          <p:cNvSpPr/>
+          <p:nvPr/>
+        </p:nvSpPr>
+        <p:spPr>
+          <a:xfrm>
+            <a:off x="7107936" y="3364992"/>
+            <a:ext cx="76200" cy="475488"/>
+          </a:xfrm>
+          <a:prstGeom prst="rect">
+            <a:avLst/>
+          </a:prstGeom>
+          <a:noFill/>
+          <a:ln/>
+        </p:spPr>
+        <p:txBody>
+          <a:bodyPr wrap="square" lIns="0" tIns="0" rIns="0" bIns="0" rtlCol="0" anchor="ctr"/>
+          <a:lstStyle/>
+          <a:p>
+            <a:pPr algn="ctr" indent="0" marL="0">
+              <a:buNone/>
+            </a:pPr>
+            <a:r>
+              <a:rPr lang="en-US" sz="1600" b="1" dirty="0">
+                <a:solidFill>
+                  <a:srgbClr val="0D9488"/>
+                </a:solidFill>
+                <a:latin typeface="Trebuchet MS" pitchFamily="34" charset="0"/>
+                <a:ea typeface="Trebuchet MS" pitchFamily="34" charset="-122"/>
+                <a:cs typeface="Trebuchet MS" pitchFamily="34" charset="-120"/>
+              </a:rPr>
+              <a:t>·</a:t>
+            </a:r>
+            <a:endParaRPr lang="en-US" sz="1600" dirty="0"/>
+          </a:p>
+        </p:txBody>
+      </p:sp>
+      <p:sp>
+        <p:nvSpPr>
+          <p:cNvPr id="40" name="Shape 38"/>
+          <p:cNvSpPr/>
+          <p:nvPr/>
+        </p:nvSpPr>
+        <p:spPr>
+          <a:xfrm>
+            <a:off x="7184136" y="3364992"/>
+            <a:ext cx="1225296" cy="475488"/>
+          </a:xfrm>
+          <a:prstGeom prst="rect">
+            <a:avLst>
+              <a:gd name="adj" fmla="val 9615"/>
+            </a:avLst>
+          </a:prstGeom>
+          <a:solidFill>
+            <a:srgbClr val="FFFFFF"/>
+          </a:solidFill>
+          <a:ln w="12700">
+            <a:solidFill>
+              <a:srgbClr val="0D9488"/>
+            </a:solidFill>
+            <a:prstDash val="solid"/>
+          </a:ln>
+        </p:spPr>
+      </p:sp>
+      <p:sp>
+        <p:nvSpPr>
+          <p:cNvPr id="41" name="Text 39"/>
+          <p:cNvSpPr/>
+          <p:nvPr/>
+        </p:nvSpPr>
+        <p:spPr>
+          <a:xfrm>
+            <a:off x="7184136" y="3364992"/>
+            <a:ext cx="1225296" cy="475488"/>
+          </a:xfrm>
+          <a:prstGeom prst="rect">
+            <a:avLst/>
+          </a:prstGeom>
+          <a:noFill/>
+          <a:ln/>
+        </p:spPr>
+        <p:txBody>
+          <a:bodyPr wrap="square" lIns="0" tIns="0" rIns="0" bIns="0" rtlCol="0" anchor="ctr"/>
+          <a:lstStyle/>
+          <a:p>
+            <a:pPr algn="ctr" indent="0" marL="0">
+              <a:buNone/>
+            </a:pPr>
+            <a:r>
+              <a:rPr lang="en-US" sz="1400" b="1" dirty="0">
+                <a:solidFill>
+                  <a:srgbClr val="0D9488"/>
+                </a:solidFill>
+                <a:latin typeface="Trebuchet MS" pitchFamily="34" charset="0"/>
+                <a:ea typeface="Trebuchet MS" pitchFamily="34" charset="-122"/>
+                <a:cs typeface="Trebuchet MS" pitchFamily="34" charset="-120"/>
+              </a:rPr>
+              <a:t>ton</a:t>
+            </a:r>
+            <a:endParaRPr lang="en-US" sz="1400" dirty="0"/>
+          </a:p>
+        </p:txBody>
+      </p:sp>
+      <p:sp>
+        <p:nvSpPr>
+          <p:cNvPr id="42" name="Shape 40"/>
           <p:cNvSpPr/>
           <p:nvPr/>
         </p:nvSpPr>
@@ -31758,7 +31949,7 @@
       </p:sp>
       <p:sp>
         <p:nvSpPr>
-          <p:cNvPr id="34" name="Text 32"/>
+          <p:cNvPr id="43" name="Text 41"/>
           <p:cNvSpPr/>
           <p:nvPr/>
         </p:nvSpPr>
@@ -31797,7 +31988,7 @@
       </p:sp>
       <p:sp>
         <p:nvSpPr>
-          <p:cNvPr id="35" name="Shape 33"/>
+          <p:cNvPr id="44" name="Shape 42"/>
           <p:cNvSpPr/>
           <p:nvPr/>
         </p:nvSpPr>
@@ -31824,7 +32015,7 @@
       </p:sp>
       <p:sp>
         <p:nvSpPr>
-          <p:cNvPr id="36" name="Text 34"/>
+          <p:cNvPr id="45" name="Text 43"/>
           <p:cNvSpPr/>
           <p:nvPr/>
         </p:nvSpPr>
@@ -32147,7 +32338,7 @@
                 <a:ea typeface="Calibri" pitchFamily="34" charset="-122"/>
                 <a:cs typeface="Calibri" pitchFamily="34" charset="-120"/>
               </a:rPr>
-              <a:t>Word Labs  •  wordlabs.app  •  Root: 'endo' = within, inside, inner</a:t>
+              <a:t>Word Labs  •  wordlabs.app  •  Root: 'endo' = within, inside, internal</a:t>
             </a:r>
             <a:endParaRPr lang="en-US" sz="800" dirty="0"/>
           </a:p>
@@ -32286,7 +32477,7 @@
                 <a:ea typeface="Trebuchet MS" pitchFamily="34" charset="-122"/>
                 <a:cs typeface="Trebuchet MS" pitchFamily="34" charset="-120"/>
               </a:rPr>
-              <a:t>endoscope</a:t>
+              <a:t>endoskeleton</a:t>
             </a:r>
             <a:endParaRPr lang="en-US" sz="2800" dirty="0"/>
           </a:p>
@@ -32366,7 +32557,7 @@
         </p:nvSpPr>
         <p:spPr>
           <a:xfrm>
-            <a:off x="2938272" y="2258568"/>
+            <a:off x="2221992" y="2258568"/>
             <a:ext cx="1828800" cy="292608"/>
           </a:xfrm>
           <a:prstGeom prst="rect">
@@ -32400,7 +32591,7 @@
         </p:nvSpPr>
         <p:spPr>
           <a:xfrm>
-            <a:off x="2938272" y="2258568"/>
+            <a:off x="2221992" y="2258568"/>
             <a:ext cx="1828800" cy="292608"/>
           </a:xfrm>
           <a:prstGeom prst="rect">
@@ -32439,7 +32630,7 @@
         </p:nvSpPr>
         <p:spPr>
           <a:xfrm>
-            <a:off x="2938272" y="2569464"/>
+            <a:off x="2221992" y="2569464"/>
             <a:ext cx="1828800" cy="201168"/>
           </a:xfrm>
           <a:prstGeom prst="rect">
@@ -32478,7 +32669,7 @@
         </p:nvSpPr>
         <p:spPr>
           <a:xfrm>
-            <a:off x="5803392" y="2258568"/>
+            <a:off x="4370832" y="2258568"/>
             <a:ext cx="1828800" cy="292608"/>
           </a:xfrm>
           <a:prstGeom prst="rect">
@@ -32512,7 +32703,7 @@
         </p:nvSpPr>
         <p:spPr>
           <a:xfrm>
-            <a:off x="5803392" y="2258568"/>
+            <a:off x="4370832" y="2258568"/>
             <a:ext cx="1828800" cy="292608"/>
           </a:xfrm>
           <a:prstGeom prst="rect">
@@ -32537,7 +32728,7 @@
                 <a:ea typeface="Trebuchet MS" pitchFamily="34" charset="-122"/>
                 <a:cs typeface="Trebuchet MS" pitchFamily="34" charset="-120"/>
               </a:rPr>
-              <a:t>scope</a:t>
+              <a:t>skelet</a:t>
             </a:r>
             <a:endParaRPr lang="en-US" sz="1300" dirty="0"/>
           </a:p>
@@ -32551,7 +32742,7 @@
         </p:nvSpPr>
         <p:spPr>
           <a:xfrm>
-            <a:off x="5803392" y="2569464"/>
+            <a:off x="4370832" y="2569464"/>
             <a:ext cx="1828800" cy="201168"/>
           </a:xfrm>
           <a:prstGeom prst="rect">
@@ -32576,7 +32767,7 @@
                 <a:ea typeface="Calibri" pitchFamily="34" charset="-122"/>
                 <a:cs typeface="Calibri" pitchFamily="34" charset="-120"/>
               </a:rPr>
-              <a:t>to look at, observe</a:t>
+              <a:t>dried up body, skeleton</a:t>
             </a:r>
             <a:endParaRPr lang="en-US" sz="850" dirty="0"/>
           </a:p>
@@ -32585,6 +32776,118 @@
       <p:sp>
         <p:nvSpPr>
           <p:cNvPr id="22" name="Shape 20"/>
+          <p:cNvSpPr/>
+          <p:nvPr/>
+        </p:nvSpPr>
+        <p:spPr>
+          <a:xfrm>
+            <a:off x="6519672" y="2258568"/>
+            <a:ext cx="1828800" cy="292608"/>
+          </a:xfrm>
+          <a:prstGeom prst="rect">
+            <a:avLst>
+              <a:gd name="adj" fmla="val 25000"/>
+            </a:avLst>
+          </a:prstGeom>
+          <a:solidFill>
+            <a:srgbClr val="FCE7F3"/>
+          </a:solidFill>
+          <a:ln w="19050">
+            <a:solidFill>
+              <a:srgbClr val="DB2777"/>
+            </a:solidFill>
+            <a:prstDash val="solid"/>
+          </a:ln>
+          <a:effectLst>
+            <a:outerShdw sx="100000" sy="100000" kx="0" ky="0" algn="bl" rotWithShape="0" blurRad="101600" dist="38100" dir="8100000">
+              <a:srgbClr val="000000">
+                <a:alpha val="12000"/>
+              </a:srgbClr>
+            </a:outerShdw>
+          </a:effectLst>
+        </p:spPr>
+      </p:sp>
+      <p:sp>
+        <p:nvSpPr>
+          <p:cNvPr id="23" name="Text 21"/>
+          <p:cNvSpPr/>
+          <p:nvPr/>
+        </p:nvSpPr>
+        <p:spPr>
+          <a:xfrm>
+            <a:off x="6519672" y="2258568"/>
+            <a:ext cx="1828800" cy="292608"/>
+          </a:xfrm>
+          <a:prstGeom prst="rect">
+            <a:avLst/>
+          </a:prstGeom>
+          <a:noFill/>
+          <a:ln/>
+        </p:spPr>
+        <p:txBody>
+          <a:bodyPr wrap="square" lIns="0" tIns="0" rIns="0" bIns="0" rtlCol="0" anchor="ctr"/>
+          <a:lstStyle/>
+          <a:p>
+            <a:pPr algn="ctr" indent="0" marL="0">
+              <a:buNone/>
+            </a:pPr>
+            <a:r>
+              <a:rPr lang="en-US" sz="1300" b="1" dirty="0">
+                <a:solidFill>
+                  <a:srgbClr val="9D174D"/>
+                </a:solidFill>
+                <a:latin typeface="Trebuchet MS" pitchFamily="34" charset="0"/>
+                <a:ea typeface="Trebuchet MS" pitchFamily="34" charset="-122"/>
+                <a:cs typeface="Trebuchet MS" pitchFamily="34" charset="-120"/>
+              </a:rPr>
+              <a:t>on</a:t>
+            </a:r>
+            <a:endParaRPr lang="en-US" sz="1300" dirty="0"/>
+          </a:p>
+        </p:txBody>
+      </p:sp>
+      <p:sp>
+        <p:nvSpPr>
+          <p:cNvPr id="24" name="Text 22"/>
+          <p:cNvSpPr/>
+          <p:nvPr/>
+        </p:nvSpPr>
+        <p:spPr>
+          <a:xfrm>
+            <a:off x="6519672" y="2569464"/>
+            <a:ext cx="1828800" cy="201168"/>
+          </a:xfrm>
+          <a:prstGeom prst="rect">
+            <a:avLst/>
+          </a:prstGeom>
+          <a:noFill/>
+          <a:ln/>
+        </p:spPr>
+        <p:txBody>
+          <a:bodyPr wrap="square" lIns="0" tIns="0" rIns="0" bIns="0" rtlCol="0" anchor="t"/>
+          <a:lstStyle/>
+          <a:p>
+            <a:pPr algn="ctr" indent="0" marL="0">
+              <a:buNone/>
+            </a:pPr>
+            <a:r>
+              <a:rPr lang="en-US" sz="850" dirty="0">
+                <a:solidFill>
+                  <a:srgbClr val="475569"/>
+                </a:solidFill>
+                <a:latin typeface="Calibri" pitchFamily="34" charset="0"/>
+                <a:ea typeface="Calibri" pitchFamily="34" charset="-122"/>
+                <a:cs typeface="Calibri" pitchFamily="34" charset="-120"/>
+              </a:rPr>
+              <a:t>relating to</a:t>
+            </a:r>
+            <a:endParaRPr lang="en-US" sz="850" dirty="0"/>
+          </a:p>
+        </p:txBody>
+      </p:sp>
+      <p:sp>
+        <p:nvSpPr>
+          <p:cNvPr id="25" name="Shape 23"/>
           <p:cNvSpPr/>
           <p:nvPr/>
         </p:nvSpPr>
@@ -32611,7 +32914,7 @@
       </p:sp>
       <p:sp>
         <p:nvSpPr>
-          <p:cNvPr id="23" name="Text 21"/>
+          <p:cNvPr id="26" name="Text 24"/>
           <p:cNvSpPr/>
           <p:nvPr/>
         </p:nvSpPr>
@@ -32650,7 +32953,7 @@
       </p:sp>
       <p:sp>
         <p:nvSpPr>
-          <p:cNvPr id="24" name="Shape 22"/>
+          <p:cNvPr id="27" name="Shape 25"/>
           <p:cNvSpPr/>
           <p:nvPr/>
         </p:nvSpPr>
@@ -32677,14 +32980,14 @@
       </p:sp>
       <p:sp>
         <p:nvSpPr>
-          <p:cNvPr id="25" name="Shape 23"/>
-          <p:cNvSpPr/>
-          <p:nvPr/>
-        </p:nvSpPr>
-        <p:spPr>
-          <a:xfrm>
-            <a:off x="2313432" y="3364992"/>
-            <a:ext cx="1645920" cy="475488"/>
+          <p:cNvPr id="28" name="Shape 26"/>
+          <p:cNvSpPr/>
+          <p:nvPr/>
+        </p:nvSpPr>
+        <p:spPr>
+          <a:xfrm>
+            <a:off x="1978152" y="3364992"/>
+            <a:ext cx="1225296" cy="475488"/>
           </a:xfrm>
           <a:prstGeom prst="rect">
             <a:avLst>
@@ -32704,14 +33007,14 @@
       </p:sp>
       <p:sp>
         <p:nvSpPr>
-          <p:cNvPr id="26" name="Text 24"/>
-          <p:cNvSpPr/>
-          <p:nvPr/>
-        </p:nvSpPr>
-        <p:spPr>
-          <a:xfrm>
-            <a:off x="2313432" y="3364992"/>
-            <a:ext cx="1645920" cy="475488"/>
+          <p:cNvPr id="29" name="Text 27"/>
+          <p:cNvSpPr/>
+          <p:nvPr/>
+        </p:nvSpPr>
+        <p:spPr>
+          <a:xfrm>
+            <a:off x="1978152" y="3364992"/>
+            <a:ext cx="1225296" cy="475488"/>
           </a:xfrm>
           <a:prstGeom prst="rect">
             <a:avLst/>
@@ -32743,14 +33046,14 @@
       </p:sp>
       <p:sp>
         <p:nvSpPr>
-          <p:cNvPr id="27" name="Text 25"/>
-          <p:cNvSpPr/>
-          <p:nvPr/>
-        </p:nvSpPr>
-        <p:spPr>
-          <a:xfrm>
-            <a:off x="3959352" y="3364992"/>
-            <a:ext cx="411480" cy="475488"/>
+          <p:cNvPr id="30" name="Text 28"/>
+          <p:cNvSpPr/>
+          <p:nvPr/>
+        </p:nvSpPr>
+        <p:spPr>
+          <a:xfrm>
+            <a:off x="3203448" y="3364992"/>
+            <a:ext cx="76200" cy="475488"/>
           </a:xfrm>
           <a:prstGeom prst="rect">
             <a:avLst/>
@@ -32782,14 +33085,14 @@
       </p:sp>
       <p:sp>
         <p:nvSpPr>
-          <p:cNvPr id="28" name="Shape 26"/>
-          <p:cNvSpPr/>
-          <p:nvPr/>
-        </p:nvSpPr>
-        <p:spPr>
-          <a:xfrm>
-            <a:off x="4370832" y="3364992"/>
-            <a:ext cx="1645920" cy="475488"/>
+          <p:cNvPr id="31" name="Shape 29"/>
+          <p:cNvSpPr/>
+          <p:nvPr/>
+        </p:nvSpPr>
+        <p:spPr>
+          <a:xfrm>
+            <a:off x="3279648" y="3364992"/>
+            <a:ext cx="1225296" cy="475488"/>
           </a:xfrm>
           <a:prstGeom prst="rect">
             <a:avLst>
@@ -32809,14 +33112,14 @@
       </p:sp>
       <p:sp>
         <p:nvSpPr>
-          <p:cNvPr id="29" name="Text 27"/>
-          <p:cNvSpPr/>
-          <p:nvPr/>
-        </p:nvSpPr>
-        <p:spPr>
-          <a:xfrm>
-            <a:off x="4370832" y="3364992"/>
-            <a:ext cx="1645920" cy="475488"/>
+          <p:cNvPr id="32" name="Text 30"/>
+          <p:cNvSpPr/>
+          <p:nvPr/>
+        </p:nvSpPr>
+        <p:spPr>
+          <a:xfrm>
+            <a:off x="3279648" y="3364992"/>
+            <a:ext cx="1225296" cy="475488"/>
           </a:xfrm>
           <a:prstGeom prst="rect">
             <a:avLst/>
@@ -32848,14 +33151,14 @@
       </p:sp>
       <p:sp>
         <p:nvSpPr>
-          <p:cNvPr id="30" name="Text 28"/>
-          <p:cNvSpPr/>
-          <p:nvPr/>
-        </p:nvSpPr>
-        <p:spPr>
-          <a:xfrm>
-            <a:off x="6016752" y="3364992"/>
-            <a:ext cx="411480" cy="475488"/>
+          <p:cNvPr id="33" name="Text 31"/>
+          <p:cNvSpPr/>
+          <p:nvPr/>
+        </p:nvSpPr>
+        <p:spPr>
+          <a:xfrm>
+            <a:off x="4504944" y="3364992"/>
+            <a:ext cx="76200" cy="475488"/>
           </a:xfrm>
           <a:prstGeom prst="rect">
             <a:avLst/>
@@ -32887,14 +33190,14 @@
       </p:sp>
       <p:sp>
         <p:nvSpPr>
-          <p:cNvPr id="31" name="Shape 29"/>
-          <p:cNvSpPr/>
-          <p:nvPr/>
-        </p:nvSpPr>
-        <p:spPr>
-          <a:xfrm>
-            <a:off x="6428232" y="3364992"/>
-            <a:ext cx="1645920" cy="475488"/>
+          <p:cNvPr id="34" name="Shape 32"/>
+          <p:cNvSpPr/>
+          <p:nvPr/>
+        </p:nvSpPr>
+        <p:spPr>
+          <a:xfrm>
+            <a:off x="4581144" y="3364992"/>
+            <a:ext cx="1225296" cy="475488"/>
           </a:xfrm>
           <a:prstGeom prst="rect">
             <a:avLst>
@@ -32914,14 +33217,14 @@
       </p:sp>
       <p:sp>
         <p:nvSpPr>
-          <p:cNvPr id="32" name="Text 30"/>
-          <p:cNvSpPr/>
-          <p:nvPr/>
-        </p:nvSpPr>
-        <p:spPr>
-          <a:xfrm>
-            <a:off x="6428232" y="3364992"/>
-            <a:ext cx="1645920" cy="475488"/>
+          <p:cNvPr id="35" name="Text 33"/>
+          <p:cNvSpPr/>
+          <p:nvPr/>
+        </p:nvSpPr>
+        <p:spPr>
+          <a:xfrm>
+            <a:off x="4581144" y="3364992"/>
+            <a:ext cx="1225296" cy="475488"/>
           </a:xfrm>
           <a:prstGeom prst="rect">
             <a:avLst/>
@@ -32945,7 +33248,7 @@
                 <a:ea typeface="Trebuchet MS" pitchFamily="34" charset="-122"/>
                 <a:cs typeface="Trebuchet MS" pitchFamily="34" charset="-120"/>
               </a:rPr>
-              <a:t>scope</a:t>
+              <a:t>skel</a:t>
             </a:r>
             <a:endParaRPr lang="en-US" sz="1400" dirty="0"/>
           </a:p>
@@ -32953,7 +33256,217 @@
       </p:sp>
       <p:sp>
         <p:nvSpPr>
-          <p:cNvPr id="33" name="Shape 31"/>
+          <p:cNvPr id="36" name="Text 34"/>
+          <p:cNvSpPr/>
+          <p:nvPr/>
+        </p:nvSpPr>
+        <p:spPr>
+          <a:xfrm>
+            <a:off x="5806440" y="3364992"/>
+            <a:ext cx="76200" cy="475488"/>
+          </a:xfrm>
+          <a:prstGeom prst="rect">
+            <a:avLst/>
+          </a:prstGeom>
+          <a:noFill/>
+          <a:ln/>
+        </p:spPr>
+        <p:txBody>
+          <a:bodyPr wrap="square" lIns="0" tIns="0" rIns="0" bIns="0" rtlCol="0" anchor="ctr"/>
+          <a:lstStyle/>
+          <a:p>
+            <a:pPr algn="ctr" indent="0" marL="0">
+              <a:buNone/>
+            </a:pPr>
+            <a:r>
+              <a:rPr lang="en-US" sz="1600" b="1" dirty="0">
+                <a:solidFill>
+                  <a:srgbClr val="0D9488"/>
+                </a:solidFill>
+                <a:latin typeface="Trebuchet MS" pitchFamily="34" charset="0"/>
+                <a:ea typeface="Trebuchet MS" pitchFamily="34" charset="-122"/>
+                <a:cs typeface="Trebuchet MS" pitchFamily="34" charset="-120"/>
+              </a:rPr>
+              <a:t>·</a:t>
+            </a:r>
+            <a:endParaRPr lang="en-US" sz="1600" dirty="0"/>
+          </a:p>
+        </p:txBody>
+      </p:sp>
+      <p:sp>
+        <p:nvSpPr>
+          <p:cNvPr id="37" name="Shape 35"/>
+          <p:cNvSpPr/>
+          <p:nvPr/>
+        </p:nvSpPr>
+        <p:spPr>
+          <a:xfrm>
+            <a:off x="5882640" y="3364992"/>
+            <a:ext cx="1225296" cy="475488"/>
+          </a:xfrm>
+          <a:prstGeom prst="rect">
+            <a:avLst>
+              <a:gd name="adj" fmla="val 9615"/>
+            </a:avLst>
+          </a:prstGeom>
+          <a:solidFill>
+            <a:srgbClr val="FFFFFF"/>
+          </a:solidFill>
+          <a:ln w="12700">
+            <a:solidFill>
+              <a:srgbClr val="0D9488"/>
+            </a:solidFill>
+            <a:prstDash val="solid"/>
+          </a:ln>
+        </p:spPr>
+      </p:sp>
+      <p:sp>
+        <p:nvSpPr>
+          <p:cNvPr id="38" name="Text 36"/>
+          <p:cNvSpPr/>
+          <p:nvPr/>
+        </p:nvSpPr>
+        <p:spPr>
+          <a:xfrm>
+            <a:off x="5882640" y="3364992"/>
+            <a:ext cx="1225296" cy="475488"/>
+          </a:xfrm>
+          <a:prstGeom prst="rect">
+            <a:avLst/>
+          </a:prstGeom>
+          <a:noFill/>
+          <a:ln/>
+        </p:spPr>
+        <p:txBody>
+          <a:bodyPr wrap="square" lIns="0" tIns="0" rIns="0" bIns="0" rtlCol="0" anchor="ctr"/>
+          <a:lstStyle/>
+          <a:p>
+            <a:pPr algn="ctr" indent="0" marL="0">
+              <a:buNone/>
+            </a:pPr>
+            <a:r>
+              <a:rPr lang="en-US" sz="1400" b="1" dirty="0">
+                <a:solidFill>
+                  <a:srgbClr val="0D9488"/>
+                </a:solidFill>
+                <a:latin typeface="Trebuchet MS" pitchFamily="34" charset="0"/>
+                <a:ea typeface="Trebuchet MS" pitchFamily="34" charset="-122"/>
+                <a:cs typeface="Trebuchet MS" pitchFamily="34" charset="-120"/>
+              </a:rPr>
+              <a:t>e</a:t>
+            </a:r>
+            <a:endParaRPr lang="en-US" sz="1400" dirty="0"/>
+          </a:p>
+        </p:txBody>
+      </p:sp>
+      <p:sp>
+        <p:nvSpPr>
+          <p:cNvPr id="39" name="Text 37"/>
+          <p:cNvSpPr/>
+          <p:nvPr/>
+        </p:nvSpPr>
+        <p:spPr>
+          <a:xfrm>
+            <a:off x="7107936" y="3364992"/>
+            <a:ext cx="76200" cy="475488"/>
+          </a:xfrm>
+          <a:prstGeom prst="rect">
+            <a:avLst/>
+          </a:prstGeom>
+          <a:noFill/>
+          <a:ln/>
+        </p:spPr>
+        <p:txBody>
+          <a:bodyPr wrap="square" lIns="0" tIns="0" rIns="0" bIns="0" rtlCol="0" anchor="ctr"/>
+          <a:lstStyle/>
+          <a:p>
+            <a:pPr algn="ctr" indent="0" marL="0">
+              <a:buNone/>
+            </a:pPr>
+            <a:r>
+              <a:rPr lang="en-US" sz="1600" b="1" dirty="0">
+                <a:solidFill>
+                  <a:srgbClr val="0D9488"/>
+                </a:solidFill>
+                <a:latin typeface="Trebuchet MS" pitchFamily="34" charset="0"/>
+                <a:ea typeface="Trebuchet MS" pitchFamily="34" charset="-122"/>
+                <a:cs typeface="Trebuchet MS" pitchFamily="34" charset="-120"/>
+              </a:rPr>
+              <a:t>·</a:t>
+            </a:r>
+            <a:endParaRPr lang="en-US" sz="1600" dirty="0"/>
+          </a:p>
+        </p:txBody>
+      </p:sp>
+      <p:sp>
+        <p:nvSpPr>
+          <p:cNvPr id="40" name="Shape 38"/>
+          <p:cNvSpPr/>
+          <p:nvPr/>
+        </p:nvSpPr>
+        <p:spPr>
+          <a:xfrm>
+            <a:off x="7184136" y="3364992"/>
+            <a:ext cx="1225296" cy="475488"/>
+          </a:xfrm>
+          <a:prstGeom prst="rect">
+            <a:avLst>
+              <a:gd name="adj" fmla="val 9615"/>
+            </a:avLst>
+          </a:prstGeom>
+          <a:solidFill>
+            <a:srgbClr val="FFFFFF"/>
+          </a:solidFill>
+          <a:ln w="12700">
+            <a:solidFill>
+              <a:srgbClr val="0D9488"/>
+            </a:solidFill>
+            <a:prstDash val="solid"/>
+          </a:ln>
+        </p:spPr>
+      </p:sp>
+      <p:sp>
+        <p:nvSpPr>
+          <p:cNvPr id="41" name="Text 39"/>
+          <p:cNvSpPr/>
+          <p:nvPr/>
+        </p:nvSpPr>
+        <p:spPr>
+          <a:xfrm>
+            <a:off x="7184136" y="3364992"/>
+            <a:ext cx="1225296" cy="475488"/>
+          </a:xfrm>
+          <a:prstGeom prst="rect">
+            <a:avLst/>
+          </a:prstGeom>
+          <a:noFill/>
+          <a:ln/>
+        </p:spPr>
+        <p:txBody>
+          <a:bodyPr wrap="square" lIns="0" tIns="0" rIns="0" bIns="0" rtlCol="0" anchor="ctr"/>
+          <a:lstStyle/>
+          <a:p>
+            <a:pPr algn="ctr" indent="0" marL="0">
+              <a:buNone/>
+            </a:pPr>
+            <a:r>
+              <a:rPr lang="en-US" sz="1400" b="1" dirty="0">
+                <a:solidFill>
+                  <a:srgbClr val="0D9488"/>
+                </a:solidFill>
+                <a:latin typeface="Trebuchet MS" pitchFamily="34" charset="0"/>
+                <a:ea typeface="Trebuchet MS" pitchFamily="34" charset="-122"/>
+                <a:cs typeface="Trebuchet MS" pitchFamily="34" charset="-120"/>
+              </a:rPr>
+              <a:t>ton</a:t>
+            </a:r>
+            <a:endParaRPr lang="en-US" sz="1400" dirty="0"/>
+          </a:p>
+        </p:txBody>
+      </p:sp>
+      <p:sp>
+        <p:nvSpPr>
+          <p:cNvPr id="42" name="Shape 40"/>
           <p:cNvSpPr/>
           <p:nvPr/>
         </p:nvSpPr>
@@ -32980,7 +33493,7 @@
       </p:sp>
       <p:sp>
         <p:nvSpPr>
-          <p:cNvPr id="34" name="Text 32"/>
+          <p:cNvPr id="43" name="Text 41"/>
           <p:cNvSpPr/>
           <p:nvPr/>
         </p:nvSpPr>
@@ -33019,18 +33532,18 @@
       </p:sp>
       <p:sp>
         <p:nvSpPr>
-          <p:cNvPr id="35" name="Shape 33"/>
+          <p:cNvPr id="44" name="Shape 42"/>
           <p:cNvSpPr/>
           <p:nvPr/>
         </p:nvSpPr>
         <p:spPr>
           <a:xfrm>
             <a:off x="1874520" y="4096512"/>
-            <a:ext cx="6903720" cy="804672"/>
+            <a:ext cx="6903720" cy="658368"/>
           </a:xfrm>
           <a:prstGeom prst="rect">
             <a:avLst>
-              <a:gd name="adj" fmla="val 6818"/>
+              <a:gd name="adj" fmla="val 8333"/>
             </a:avLst>
           </a:prstGeom>
           <a:solidFill>
@@ -33046,18 +33559,18 @@
       </p:sp>
       <p:sp>
         <p:nvSpPr>
-          <p:cNvPr id="36" name="Shape 34"/>
-          <p:cNvSpPr/>
-          <p:nvPr/>
-        </p:nvSpPr>
-        <p:spPr>
-          <a:xfrm>
-            <a:off x="2124837" y="4169664"/>
-            <a:ext cx="685800" cy="384048"/>
+          <p:cNvPr id="45" name="Shape 43"/>
+          <p:cNvSpPr/>
+          <p:nvPr/>
+        </p:nvSpPr>
+        <p:spPr>
+          <a:xfrm>
+            <a:off x="1952596" y="4169664"/>
+            <a:ext cx="493776" cy="475488"/>
           </a:xfrm>
           <a:prstGeom prst="rect">
             <a:avLst>
-              <a:gd name="adj" fmla="val 9524"/>
+              <a:gd name="adj" fmla="val 7692"/>
             </a:avLst>
           </a:prstGeom>
           <a:solidFill>
@@ -33073,14 +33586,14 @@
       </p:sp>
       <p:sp>
         <p:nvSpPr>
-          <p:cNvPr id="37" name="Text 35"/>
-          <p:cNvSpPr/>
-          <p:nvPr/>
-        </p:nvSpPr>
-        <p:spPr>
-          <a:xfrm>
-            <a:off x="2124837" y="4169664"/>
-            <a:ext cx="685800" cy="384048"/>
+          <p:cNvPr id="46" name="Text 44"/>
+          <p:cNvSpPr/>
+          <p:nvPr/>
+        </p:nvSpPr>
+        <p:spPr>
+          <a:xfrm>
+            <a:off x="1952596" y="4169664"/>
+            <a:ext cx="493776" cy="475488"/>
           </a:xfrm>
           <a:prstGeom prst="rect">
             <a:avLst/>
@@ -33112,18 +33625,18 @@
       </p:sp>
       <p:sp>
         <p:nvSpPr>
-          <p:cNvPr id="38" name="Shape 36"/>
-          <p:cNvSpPr/>
-          <p:nvPr/>
-        </p:nvSpPr>
-        <p:spPr>
-          <a:xfrm>
-            <a:off x="3033522" y="4169664"/>
-            <a:ext cx="685800" cy="384048"/>
+          <p:cNvPr id="47" name="Shape 45"/>
+          <p:cNvSpPr/>
+          <p:nvPr/>
+        </p:nvSpPr>
+        <p:spPr>
+          <a:xfrm>
+            <a:off x="2497015" y="4169664"/>
+            <a:ext cx="493776" cy="475488"/>
           </a:xfrm>
           <a:prstGeom prst="rect">
             <a:avLst>
-              <a:gd name="adj" fmla="val 9524"/>
+              <a:gd name="adj" fmla="val 7692"/>
             </a:avLst>
           </a:prstGeom>
           <a:solidFill>
@@ -33139,14 +33652,14 @@
       </p:sp>
       <p:sp>
         <p:nvSpPr>
-          <p:cNvPr id="39" name="Text 37"/>
-          <p:cNvSpPr/>
-          <p:nvPr/>
-        </p:nvSpPr>
-        <p:spPr>
-          <a:xfrm>
-            <a:off x="3033522" y="4169664"/>
-            <a:ext cx="685800" cy="384048"/>
+          <p:cNvPr id="48" name="Text 46"/>
+          <p:cNvSpPr/>
+          <p:nvPr/>
+        </p:nvSpPr>
+        <p:spPr>
+          <a:xfrm>
+            <a:off x="2497015" y="4169664"/>
+            <a:ext cx="493776" cy="475488"/>
           </a:xfrm>
           <a:prstGeom prst="rect">
             <a:avLst/>
@@ -33178,18 +33691,18 @@
       </p:sp>
       <p:sp>
         <p:nvSpPr>
-          <p:cNvPr id="40" name="Shape 38"/>
-          <p:cNvSpPr/>
-          <p:nvPr/>
-        </p:nvSpPr>
-        <p:spPr>
-          <a:xfrm>
-            <a:off x="3942207" y="4169664"/>
-            <a:ext cx="685800" cy="384048"/>
+          <p:cNvPr id="49" name="Shape 47"/>
+          <p:cNvSpPr/>
+          <p:nvPr/>
+        </p:nvSpPr>
+        <p:spPr>
+          <a:xfrm>
+            <a:off x="3041435" y="4169664"/>
+            <a:ext cx="493776" cy="475488"/>
           </a:xfrm>
           <a:prstGeom prst="rect">
             <a:avLst>
-              <a:gd name="adj" fmla="val 9524"/>
+              <a:gd name="adj" fmla="val 7692"/>
             </a:avLst>
           </a:prstGeom>
           <a:solidFill>
@@ -33205,14 +33718,14 @@
       </p:sp>
       <p:sp>
         <p:nvSpPr>
-          <p:cNvPr id="41" name="Text 39"/>
-          <p:cNvSpPr/>
-          <p:nvPr/>
-        </p:nvSpPr>
-        <p:spPr>
-          <a:xfrm>
-            <a:off x="3942207" y="4169664"/>
-            <a:ext cx="685800" cy="384048"/>
+          <p:cNvPr id="50" name="Text 48"/>
+          <p:cNvSpPr/>
+          <p:nvPr/>
+        </p:nvSpPr>
+        <p:spPr>
+          <a:xfrm>
+            <a:off x="3041435" y="4169664"/>
+            <a:ext cx="493776" cy="475488"/>
           </a:xfrm>
           <a:prstGeom prst="rect">
             <a:avLst/>
@@ -33244,18 +33757,18 @@
       </p:sp>
       <p:sp>
         <p:nvSpPr>
-          <p:cNvPr id="42" name="Shape 40"/>
-          <p:cNvSpPr/>
-          <p:nvPr/>
-        </p:nvSpPr>
-        <p:spPr>
-          <a:xfrm>
-            <a:off x="4850892" y="4169664"/>
-            <a:ext cx="685800" cy="384048"/>
+          <p:cNvPr id="51" name="Shape 49"/>
+          <p:cNvSpPr/>
+          <p:nvPr/>
+        </p:nvSpPr>
+        <p:spPr>
+          <a:xfrm>
+            <a:off x="3585855" y="4169664"/>
+            <a:ext cx="493776" cy="475488"/>
           </a:xfrm>
           <a:prstGeom prst="rect">
             <a:avLst>
-              <a:gd name="adj" fmla="val 9524"/>
+              <a:gd name="adj" fmla="val 7692"/>
             </a:avLst>
           </a:prstGeom>
           <a:solidFill>
@@ -33271,14 +33784,14 @@
       </p:sp>
       <p:sp>
         <p:nvSpPr>
-          <p:cNvPr id="43" name="Text 41"/>
-          <p:cNvSpPr/>
-          <p:nvPr/>
-        </p:nvSpPr>
-        <p:spPr>
-          <a:xfrm>
-            <a:off x="4850892" y="4169664"/>
-            <a:ext cx="685800" cy="384048"/>
+          <p:cNvPr id="52" name="Text 50"/>
+          <p:cNvSpPr/>
+          <p:nvPr/>
+        </p:nvSpPr>
+        <p:spPr>
+          <a:xfrm>
+            <a:off x="3585855" y="4169664"/>
+            <a:ext cx="493776" cy="475488"/>
           </a:xfrm>
           <a:prstGeom prst="rect">
             <a:avLst/>
@@ -33310,18 +33823,18 @@
       </p:sp>
       <p:sp>
         <p:nvSpPr>
-          <p:cNvPr id="44" name="Shape 42"/>
-          <p:cNvSpPr/>
-          <p:nvPr/>
-        </p:nvSpPr>
-        <p:spPr>
-          <a:xfrm>
-            <a:off x="5759577" y="4169664"/>
-            <a:ext cx="685800" cy="384048"/>
+          <p:cNvPr id="53" name="Shape 51"/>
+          <p:cNvSpPr/>
+          <p:nvPr/>
+        </p:nvSpPr>
+        <p:spPr>
+          <a:xfrm>
+            <a:off x="4130274" y="4169664"/>
+            <a:ext cx="493776" cy="475488"/>
           </a:xfrm>
           <a:prstGeom prst="rect">
             <a:avLst>
-              <a:gd name="adj" fmla="val 9524"/>
+              <a:gd name="adj" fmla="val 7692"/>
             </a:avLst>
           </a:prstGeom>
           <a:solidFill>
@@ -33337,14 +33850,14 @@
       </p:sp>
       <p:sp>
         <p:nvSpPr>
-          <p:cNvPr id="45" name="Text 43"/>
-          <p:cNvSpPr/>
-          <p:nvPr/>
-        </p:nvSpPr>
-        <p:spPr>
-          <a:xfrm>
-            <a:off x="5759577" y="4169664"/>
-            <a:ext cx="685800" cy="384048"/>
+          <p:cNvPr id="54" name="Text 52"/>
+          <p:cNvSpPr/>
+          <p:nvPr/>
+        </p:nvSpPr>
+        <p:spPr>
+          <a:xfrm>
+            <a:off x="4130274" y="4169664"/>
+            <a:ext cx="493776" cy="475488"/>
           </a:xfrm>
           <a:prstGeom prst="rect">
             <a:avLst/>
@@ -33368,7 +33881,7 @@
                 <a:ea typeface="Trebuchet MS" pitchFamily="34" charset="-122"/>
                 <a:cs typeface="Trebuchet MS" pitchFamily="34" charset="-120"/>
               </a:rPr>
-              <a:t>sc</a:t>
+              <a:t>s</a:t>
             </a:r>
             <a:endParaRPr lang="en-US" sz="900" dirty="0"/>
           </a:p>
@@ -33376,57 +33889,18 @@
       </p:sp>
       <p:sp>
         <p:nvSpPr>
-          <p:cNvPr id="46" name="Text 44"/>
-          <p:cNvSpPr/>
-          <p:nvPr/>
-        </p:nvSpPr>
-        <p:spPr>
-          <a:xfrm>
-            <a:off x="5759577" y="4572000"/>
-            <a:ext cx="685800" cy="219456"/>
-          </a:xfrm>
-          <a:prstGeom prst="rect">
-            <a:avLst/>
-          </a:prstGeom>
-          <a:noFill/>
-          <a:ln/>
-        </p:spPr>
-        <p:txBody>
-          <a:bodyPr wrap="square" lIns="0" tIns="0" rIns="0" bIns="0" rtlCol="0" anchor="t"/>
-          <a:lstStyle/>
-          <a:p>
-            <a:pPr algn="ctr" indent="0" marL="0">
-              <a:buNone/>
-            </a:pPr>
-            <a:r>
-              <a:rPr lang="en-US" sz="750" i="1" dirty="0">
-                <a:solidFill>
-                  <a:srgbClr val="94A3B8"/>
-                </a:solidFill>
-                <a:latin typeface="Calibri" pitchFamily="34" charset="0"/>
-                <a:ea typeface="Calibri" pitchFamily="34" charset="-122"/>
-                <a:cs typeface="Calibri" pitchFamily="34" charset="-120"/>
-              </a:rPr>
-              <a:t>/sk/</a:t>
-            </a:r>
-            <a:endParaRPr lang="en-US" sz="750" dirty="0"/>
-          </a:p>
-        </p:txBody>
-      </p:sp>
-      <p:sp>
-        <p:nvSpPr>
-          <p:cNvPr id="47" name="Shape 45"/>
-          <p:cNvSpPr/>
-          <p:nvPr/>
-        </p:nvSpPr>
-        <p:spPr>
-          <a:xfrm>
-            <a:off x="6668262" y="4169664"/>
-            <a:ext cx="685800" cy="384048"/>
+          <p:cNvPr id="55" name="Shape 53"/>
+          <p:cNvSpPr/>
+          <p:nvPr/>
+        </p:nvSpPr>
+        <p:spPr>
+          <a:xfrm>
+            <a:off x="4674694" y="4169664"/>
+            <a:ext cx="493776" cy="475488"/>
           </a:xfrm>
           <a:prstGeom prst="rect">
             <a:avLst>
-              <a:gd name="adj" fmla="val 9524"/>
+              <a:gd name="adj" fmla="val 7692"/>
             </a:avLst>
           </a:prstGeom>
           <a:solidFill>
@@ -33442,14 +33916,14 @@
       </p:sp>
       <p:sp>
         <p:nvSpPr>
-          <p:cNvPr id="48" name="Text 46"/>
-          <p:cNvSpPr/>
-          <p:nvPr/>
-        </p:nvSpPr>
-        <p:spPr>
-          <a:xfrm>
-            <a:off x="6668262" y="4169664"/>
-            <a:ext cx="685800" cy="384048"/>
+          <p:cNvPr id="56" name="Text 54"/>
+          <p:cNvSpPr/>
+          <p:nvPr/>
+        </p:nvSpPr>
+        <p:spPr>
+          <a:xfrm>
+            <a:off x="4674694" y="4169664"/>
+            <a:ext cx="493776" cy="475488"/>
           </a:xfrm>
           <a:prstGeom prst="rect">
             <a:avLst/>
@@ -33473,7 +33947,7 @@
                 <a:ea typeface="Trebuchet MS" pitchFamily="34" charset="-122"/>
                 <a:cs typeface="Trebuchet MS" pitchFamily="34" charset="-120"/>
               </a:rPr>
-              <a:t>o</a:t>
+              <a:t>k</a:t>
             </a:r>
             <a:endParaRPr lang="en-US" sz="900" dirty="0"/>
           </a:p>
@@ -33481,18 +33955,18 @@
       </p:sp>
       <p:sp>
         <p:nvSpPr>
-          <p:cNvPr id="49" name="Shape 47"/>
-          <p:cNvSpPr/>
-          <p:nvPr/>
-        </p:nvSpPr>
-        <p:spPr>
-          <a:xfrm>
-            <a:off x="7576947" y="4169664"/>
-            <a:ext cx="685800" cy="384048"/>
+          <p:cNvPr id="57" name="Shape 55"/>
+          <p:cNvSpPr/>
+          <p:nvPr/>
+        </p:nvSpPr>
+        <p:spPr>
+          <a:xfrm>
+            <a:off x="5219114" y="4169664"/>
+            <a:ext cx="493776" cy="475488"/>
           </a:xfrm>
           <a:prstGeom prst="rect">
             <a:avLst>
-              <a:gd name="adj" fmla="val 9524"/>
+              <a:gd name="adj" fmla="val 7692"/>
             </a:avLst>
           </a:prstGeom>
           <a:solidFill>
@@ -33508,14 +33982,14 @@
       </p:sp>
       <p:sp>
         <p:nvSpPr>
-          <p:cNvPr id="50" name="Text 48"/>
-          <p:cNvSpPr/>
-          <p:nvPr/>
-        </p:nvSpPr>
-        <p:spPr>
-          <a:xfrm>
-            <a:off x="7576947" y="4169664"/>
-            <a:ext cx="685800" cy="384048"/>
+          <p:cNvPr id="58" name="Text 56"/>
+          <p:cNvSpPr/>
+          <p:nvPr/>
+        </p:nvSpPr>
+        <p:spPr>
+          <a:xfrm>
+            <a:off x="5219114" y="4169664"/>
+            <a:ext cx="493776" cy="475488"/>
           </a:xfrm>
           <a:prstGeom prst="rect">
             <a:avLst/>
@@ -33539,7 +34013,337 @@
                 <a:ea typeface="Trebuchet MS" pitchFamily="34" charset="-122"/>
                 <a:cs typeface="Trebuchet MS" pitchFamily="34" charset="-120"/>
               </a:rPr>
-              <a:t>pe</a:t>
+              <a:t>e</a:t>
+            </a:r>
+            <a:endParaRPr lang="en-US" sz="900" dirty="0"/>
+          </a:p>
+        </p:txBody>
+      </p:sp>
+      <p:sp>
+        <p:nvSpPr>
+          <p:cNvPr id="59" name="Shape 57"/>
+          <p:cNvSpPr/>
+          <p:nvPr/>
+        </p:nvSpPr>
+        <p:spPr>
+          <a:xfrm>
+            <a:off x="5763534" y="4169664"/>
+            <a:ext cx="493776" cy="475488"/>
+          </a:xfrm>
+          <a:prstGeom prst="rect">
+            <a:avLst>
+              <a:gd name="adj" fmla="val 7692"/>
+            </a:avLst>
+          </a:prstGeom>
+          <a:solidFill>
+            <a:srgbClr val="FFFFFF"/>
+          </a:solidFill>
+          <a:ln w="12700">
+            <a:solidFill>
+              <a:srgbClr val="DB2777"/>
+            </a:solidFill>
+            <a:prstDash val="solid"/>
+          </a:ln>
+        </p:spPr>
+      </p:sp>
+      <p:sp>
+        <p:nvSpPr>
+          <p:cNvPr id="60" name="Text 58"/>
+          <p:cNvSpPr/>
+          <p:nvPr/>
+        </p:nvSpPr>
+        <p:spPr>
+          <a:xfrm>
+            <a:off x="5763534" y="4169664"/>
+            <a:ext cx="493776" cy="475488"/>
+          </a:xfrm>
+          <a:prstGeom prst="rect">
+            <a:avLst/>
+          </a:prstGeom>
+          <a:noFill/>
+          <a:ln/>
+        </p:spPr>
+        <p:txBody>
+          <a:bodyPr wrap="square" lIns="0" tIns="0" rIns="0" bIns="0" rtlCol="0" anchor="ctr"/>
+          <a:lstStyle/>
+          <a:p>
+            <a:pPr algn="ctr" indent="0" marL="0">
+              <a:buNone/>
+            </a:pPr>
+            <a:r>
+              <a:rPr lang="en-US" sz="900" b="1" dirty="0">
+                <a:solidFill>
+                  <a:srgbClr val="9D174D"/>
+                </a:solidFill>
+                <a:latin typeface="Trebuchet MS" pitchFamily="34" charset="0"/>
+                <a:ea typeface="Trebuchet MS" pitchFamily="34" charset="-122"/>
+                <a:cs typeface="Trebuchet MS" pitchFamily="34" charset="-120"/>
+              </a:rPr>
+              <a:t>l</a:t>
+            </a:r>
+            <a:endParaRPr lang="en-US" sz="900" dirty="0"/>
+          </a:p>
+        </p:txBody>
+      </p:sp>
+      <p:sp>
+        <p:nvSpPr>
+          <p:cNvPr id="61" name="Shape 59"/>
+          <p:cNvSpPr/>
+          <p:nvPr/>
+        </p:nvSpPr>
+        <p:spPr>
+          <a:xfrm>
+            <a:off x="6307953" y="4169664"/>
+            <a:ext cx="493776" cy="475488"/>
+          </a:xfrm>
+          <a:prstGeom prst="rect">
+            <a:avLst>
+              <a:gd name="adj" fmla="val 7692"/>
+            </a:avLst>
+          </a:prstGeom>
+          <a:solidFill>
+            <a:srgbClr val="FFFFFF"/>
+          </a:solidFill>
+          <a:ln w="12700">
+            <a:solidFill>
+              <a:srgbClr val="DB2777"/>
+            </a:solidFill>
+            <a:prstDash val="solid"/>
+          </a:ln>
+        </p:spPr>
+      </p:sp>
+      <p:sp>
+        <p:nvSpPr>
+          <p:cNvPr id="62" name="Text 60"/>
+          <p:cNvSpPr/>
+          <p:nvPr/>
+        </p:nvSpPr>
+        <p:spPr>
+          <a:xfrm>
+            <a:off x="6307953" y="4169664"/>
+            <a:ext cx="493776" cy="475488"/>
+          </a:xfrm>
+          <a:prstGeom prst="rect">
+            <a:avLst/>
+          </a:prstGeom>
+          <a:noFill/>
+          <a:ln/>
+        </p:spPr>
+        <p:txBody>
+          <a:bodyPr wrap="square" lIns="0" tIns="0" rIns="0" bIns="0" rtlCol="0" anchor="ctr"/>
+          <a:lstStyle/>
+          <a:p>
+            <a:pPr algn="ctr" indent="0" marL="0">
+              <a:buNone/>
+            </a:pPr>
+            <a:r>
+              <a:rPr lang="en-US" sz="900" b="1" dirty="0">
+                <a:solidFill>
+                  <a:srgbClr val="9D174D"/>
+                </a:solidFill>
+                <a:latin typeface="Trebuchet MS" pitchFamily="34" charset="0"/>
+                <a:ea typeface="Trebuchet MS" pitchFamily="34" charset="-122"/>
+                <a:cs typeface="Trebuchet MS" pitchFamily="34" charset="-120"/>
+              </a:rPr>
+              <a:t>e</a:t>
+            </a:r>
+            <a:endParaRPr lang="en-US" sz="900" dirty="0"/>
+          </a:p>
+        </p:txBody>
+      </p:sp>
+      <p:sp>
+        <p:nvSpPr>
+          <p:cNvPr id="63" name="Shape 61"/>
+          <p:cNvSpPr/>
+          <p:nvPr/>
+        </p:nvSpPr>
+        <p:spPr>
+          <a:xfrm>
+            <a:off x="6852373" y="4169664"/>
+            <a:ext cx="493776" cy="475488"/>
+          </a:xfrm>
+          <a:prstGeom prst="rect">
+            <a:avLst>
+              <a:gd name="adj" fmla="val 7692"/>
+            </a:avLst>
+          </a:prstGeom>
+          <a:solidFill>
+            <a:srgbClr val="FFFFFF"/>
+          </a:solidFill>
+          <a:ln w="12700">
+            <a:solidFill>
+              <a:srgbClr val="DB2777"/>
+            </a:solidFill>
+            <a:prstDash val="solid"/>
+          </a:ln>
+        </p:spPr>
+      </p:sp>
+      <p:sp>
+        <p:nvSpPr>
+          <p:cNvPr id="64" name="Text 62"/>
+          <p:cNvSpPr/>
+          <p:nvPr/>
+        </p:nvSpPr>
+        <p:spPr>
+          <a:xfrm>
+            <a:off x="6852373" y="4169664"/>
+            <a:ext cx="493776" cy="475488"/>
+          </a:xfrm>
+          <a:prstGeom prst="rect">
+            <a:avLst/>
+          </a:prstGeom>
+          <a:noFill/>
+          <a:ln/>
+        </p:spPr>
+        <p:txBody>
+          <a:bodyPr wrap="square" lIns="0" tIns="0" rIns="0" bIns="0" rtlCol="0" anchor="ctr"/>
+          <a:lstStyle/>
+          <a:p>
+            <a:pPr algn="ctr" indent="0" marL="0">
+              <a:buNone/>
+            </a:pPr>
+            <a:r>
+              <a:rPr lang="en-US" sz="900" b="1" dirty="0">
+                <a:solidFill>
+                  <a:srgbClr val="9D174D"/>
+                </a:solidFill>
+                <a:latin typeface="Trebuchet MS" pitchFamily="34" charset="0"/>
+                <a:ea typeface="Trebuchet MS" pitchFamily="34" charset="-122"/>
+                <a:cs typeface="Trebuchet MS" pitchFamily="34" charset="-120"/>
+              </a:rPr>
+              <a:t>t</a:t>
+            </a:r>
+            <a:endParaRPr lang="en-US" sz="900" dirty="0"/>
+          </a:p>
+        </p:txBody>
+      </p:sp>
+      <p:sp>
+        <p:nvSpPr>
+          <p:cNvPr id="65" name="Shape 63"/>
+          <p:cNvSpPr/>
+          <p:nvPr/>
+        </p:nvSpPr>
+        <p:spPr>
+          <a:xfrm>
+            <a:off x="7396793" y="4169664"/>
+            <a:ext cx="493776" cy="475488"/>
+          </a:xfrm>
+          <a:prstGeom prst="rect">
+            <a:avLst>
+              <a:gd name="adj" fmla="val 7692"/>
+            </a:avLst>
+          </a:prstGeom>
+          <a:solidFill>
+            <a:srgbClr val="FFFFFF"/>
+          </a:solidFill>
+          <a:ln w="12700">
+            <a:solidFill>
+              <a:srgbClr val="DB2777"/>
+            </a:solidFill>
+            <a:prstDash val="solid"/>
+          </a:ln>
+        </p:spPr>
+      </p:sp>
+      <p:sp>
+        <p:nvSpPr>
+          <p:cNvPr id="66" name="Text 64"/>
+          <p:cNvSpPr/>
+          <p:nvPr/>
+        </p:nvSpPr>
+        <p:spPr>
+          <a:xfrm>
+            <a:off x="7396793" y="4169664"/>
+            <a:ext cx="493776" cy="475488"/>
+          </a:xfrm>
+          <a:prstGeom prst="rect">
+            <a:avLst/>
+          </a:prstGeom>
+          <a:noFill/>
+          <a:ln/>
+        </p:spPr>
+        <p:txBody>
+          <a:bodyPr wrap="square" lIns="0" tIns="0" rIns="0" bIns="0" rtlCol="0" anchor="ctr"/>
+          <a:lstStyle/>
+          <a:p>
+            <a:pPr algn="ctr" indent="0" marL="0">
+              <a:buNone/>
+            </a:pPr>
+            <a:r>
+              <a:rPr lang="en-US" sz="900" b="1" dirty="0">
+                <a:solidFill>
+                  <a:srgbClr val="9D174D"/>
+                </a:solidFill>
+                <a:latin typeface="Trebuchet MS" pitchFamily="34" charset="0"/>
+                <a:ea typeface="Trebuchet MS" pitchFamily="34" charset="-122"/>
+                <a:cs typeface="Trebuchet MS" pitchFamily="34" charset="-120"/>
+              </a:rPr>
+              <a:t>o</a:t>
+            </a:r>
+            <a:endParaRPr lang="en-US" sz="900" dirty="0"/>
+          </a:p>
+        </p:txBody>
+      </p:sp>
+      <p:sp>
+        <p:nvSpPr>
+          <p:cNvPr id="67" name="Shape 65"/>
+          <p:cNvSpPr/>
+          <p:nvPr/>
+        </p:nvSpPr>
+        <p:spPr>
+          <a:xfrm>
+            <a:off x="7941212" y="4169664"/>
+            <a:ext cx="493776" cy="475488"/>
+          </a:xfrm>
+          <a:prstGeom prst="rect">
+            <a:avLst>
+              <a:gd name="adj" fmla="val 7692"/>
+            </a:avLst>
+          </a:prstGeom>
+          <a:solidFill>
+            <a:srgbClr val="FFFFFF"/>
+          </a:solidFill>
+          <a:ln w="12700">
+            <a:solidFill>
+              <a:srgbClr val="DB2777"/>
+            </a:solidFill>
+            <a:prstDash val="solid"/>
+          </a:ln>
+        </p:spPr>
+      </p:sp>
+      <p:sp>
+        <p:nvSpPr>
+          <p:cNvPr id="68" name="Text 66"/>
+          <p:cNvSpPr/>
+          <p:nvPr/>
+        </p:nvSpPr>
+        <p:spPr>
+          <a:xfrm>
+            <a:off x="7941212" y="4169664"/>
+            <a:ext cx="493776" cy="475488"/>
+          </a:xfrm>
+          <a:prstGeom prst="rect">
+            <a:avLst/>
+          </a:prstGeom>
+          <a:noFill/>
+          <a:ln/>
+        </p:spPr>
+        <p:txBody>
+          <a:bodyPr wrap="square" lIns="0" tIns="0" rIns="0" bIns="0" rtlCol="0" anchor="ctr"/>
+          <a:lstStyle/>
+          <a:p>
+            <a:pPr algn="ctr" indent="0" marL="0">
+              <a:buNone/>
+            </a:pPr>
+            <a:r>
+              <a:rPr lang="en-US" sz="900" b="1" dirty="0">
+                <a:solidFill>
+                  <a:srgbClr val="9D174D"/>
+                </a:solidFill>
+                <a:latin typeface="Trebuchet MS" pitchFamily="34" charset="0"/>
+                <a:ea typeface="Trebuchet MS" pitchFamily="34" charset="-122"/>
+                <a:cs typeface="Trebuchet MS" pitchFamily="34" charset="-120"/>
+              </a:rPr>
+              <a:t>n</a:t>
             </a:r>
             <a:endParaRPr lang="en-US" sz="900" dirty="0"/>
           </a:p>
@@ -33831,7 +34635,7 @@
                 <a:ea typeface="Calibri" pitchFamily="34" charset="-122"/>
                 <a:cs typeface="Calibri" pitchFamily="34" charset="-120"/>
               </a:rPr>
-              <a:t>Word Labs  •  wordlabs.app  •  Root: 'endo' = within, inside, inner</a:t>
+              <a:t>Word Labs  •  wordlabs.app  •  Root: 'endo' = within, inside, internal</a:t>
             </a:r>
             <a:endParaRPr lang="en-US" sz="800" dirty="0"/>
           </a:p>
@@ -35000,7 +35804,7 @@
                 <a:ea typeface="Calibri" pitchFamily="34" charset="-122"/>
                 <a:cs typeface="Calibri" pitchFamily="34" charset="-120"/>
               </a:rPr>
-              <a:t>Word Labs  •  wordlabs.app  •  Root: 'endo' = within, inside, inner</a:t>
+              <a:t>Word Labs  •  wordlabs.app  •  Root: 'endo' = within, inside, internal</a:t>
             </a:r>
             <a:endParaRPr lang="en-US" sz="800" dirty="0"/>
           </a:p>
@@ -35493,7 +36297,7 @@
                 <a:ea typeface="Trebuchet MS" pitchFamily="34" charset="-122"/>
                 <a:cs typeface="Trebuchet MS" pitchFamily="34" charset="-120"/>
               </a:rPr>
-              <a:t>meso-</a:t>
+              <a:t>per-</a:t>
             </a:r>
             <a:endParaRPr lang="en-US" sz="1300" dirty="0"/>
           </a:p>
@@ -35646,7 +36450,7 @@
                 <a:ea typeface="Trebuchet MS" pitchFamily="34" charset="-122"/>
                 <a:cs typeface="Trebuchet MS" pitchFamily="34" charset="-120"/>
               </a:rPr>
-              <a:t>peri-</a:t>
+              <a:t>para-</a:t>
             </a:r>
             <a:endParaRPr lang="en-US" sz="1300" dirty="0"/>
           </a:p>
@@ -35799,7 +36603,7 @@
                 <a:ea typeface="Trebuchet MS" pitchFamily="34" charset="-122"/>
                 <a:cs typeface="Trebuchet MS" pitchFamily="34" charset="-120"/>
               </a:rPr>
-              <a:t>neo-</a:t>
+              <a:t>sub-</a:t>
             </a:r>
             <a:endParaRPr lang="en-US" sz="1300" dirty="0"/>
           </a:p>
@@ -35952,7 +36756,7 @@
                 <a:ea typeface="Trebuchet MS" pitchFamily="34" charset="-122"/>
                 <a:cs typeface="Trebuchet MS" pitchFamily="34" charset="-120"/>
               </a:rPr>
-              <a:t>poly-</a:t>
+              <a:t>micro-</a:t>
             </a:r>
             <a:endParaRPr lang="en-US" sz="1300" dirty="0"/>
           </a:p>
@@ -36410,7 +37214,7 @@
                 <a:ea typeface="Trebuchet MS" pitchFamily="34" charset="-122"/>
                 <a:cs typeface="Trebuchet MS" pitchFamily="34" charset="-120"/>
               </a:rPr>
-              <a:t>endospore</a:t>
+              <a:t>endurance</a:t>
             </a:r>
             <a:endParaRPr lang="en-US" sz="1200" dirty="0"/>
           </a:p>
@@ -36476,7 +37280,7 @@
                 <a:ea typeface="Trebuchet MS" pitchFamily="34" charset="-122"/>
                 <a:cs typeface="Trebuchet MS" pitchFamily="34" charset="-120"/>
               </a:rPr>
-              <a:t>endothermic</a:t>
+              <a:t>endorphin</a:t>
             </a:r>
             <a:endParaRPr lang="en-US" sz="1200" dirty="0"/>
           </a:p>
@@ -36542,7 +37346,7 @@
                 <a:ea typeface="Trebuchet MS" pitchFamily="34" charset="-122"/>
                 <a:cs typeface="Trebuchet MS" pitchFamily="34" charset="-120"/>
               </a:rPr>
-              <a:t>endogenous</a:t>
+              <a:t>endospore</a:t>
             </a:r>
             <a:endParaRPr lang="en-US" sz="1200" dirty="0"/>
           </a:p>
@@ -36608,7 +37412,7 @@
                 <a:ea typeface="Trebuchet MS" pitchFamily="34" charset="-122"/>
                 <a:cs typeface="Trebuchet MS" pitchFamily="34" charset="-120"/>
               </a:rPr>
-              <a:t>endoplasm</a:t>
+              <a:t>endothermic</a:t>
             </a:r>
             <a:endParaRPr lang="en-US" sz="1200" dirty="0"/>
           </a:p>
@@ -36900,7 +37704,7 @@
                 <a:ea typeface="Calibri" pitchFamily="34" charset="-122"/>
                 <a:cs typeface="Calibri" pitchFamily="34" charset="-120"/>
               </a:rPr>
-              <a:t>Word Labs  •  wordlabs.app  •  Root: 'endo' = within, inside, inner</a:t>
+              <a:t>Word Labs  •  wordlabs.app  •  Root: 'endo' = within, inside, internal</a:t>
             </a:r>
             <a:endParaRPr lang="en-US" sz="800" dirty="0"/>
           </a:p>
@@ -37064,7 +37868,7 @@
                 <a:ea typeface="Calibri" pitchFamily="34" charset="-122"/>
                 <a:cs typeface="Calibri" pitchFamily="34" charset="-120"/>
               </a:rPr>
-              <a:t>The core part of a word carrying its basic meaning. For example, 'endo' means 'within, inside, inner'.</a:t>
+              <a:t>The core part of a word carrying its basic meaning. For example, 'endo' means 'within, inside, internal'.</a:t>
             </a:r>
             <a:endParaRPr lang="en-US" sz="1350" dirty="0"/>
           </a:p>
@@ -37684,7 +38488,7 @@
                 <a:ea typeface="Calibri" pitchFamily="34" charset="-122"/>
                 <a:cs typeface="Calibri" pitchFamily="34" charset="-120"/>
               </a:rPr>
-              <a:t>Word Labs  •  wordlabs.app  •  Root: 'endo' = within, inside, inner</a:t>
+              <a:t>Word Labs  •  wordlabs.app  •  Root: 'endo' = within, inside, internal</a:t>
             </a:r>
             <a:endParaRPr lang="en-US" sz="800" dirty="0"/>
           </a:p>
@@ -37796,7 +38600,7 @@
                 <a:ea typeface="Calibri" pitchFamily="34" charset="-122"/>
                 <a:cs typeface="Calibri" pitchFamily="34" charset="-120"/>
               </a:rPr>
-              <a:t>1.  The morpheme 'endo' comes from Greek and means 'within' or 'inside'.</a:t>
+              <a:t>1.  An endoskeleton is a skeleton found on the outside of an animal's body, like a crab's shell.</a:t>
             </a:r>
             <a:endParaRPr lang="en-US" sz="1300" dirty="0"/>
           </a:p>
@@ -37819,11 +38623,11 @@
             </a:avLst>
           </a:prstGeom>
           <a:solidFill>
-            <a:srgbClr val="DCFCE7"/>
-          </a:solidFill>
-          <a:ln w="12700">
-            <a:solidFill>
-              <a:srgbClr val="16A34A"/>
+            <a:srgbClr val="FEE2E2"/>
+          </a:solidFill>
+          <a:ln w="12700">
+            <a:solidFill>
+              <a:srgbClr val="DC2626"/>
             </a:solidFill>
             <a:prstDash val="solid"/>
           </a:ln>
@@ -37856,13 +38660,13 @@
             <a:r>
               <a:rPr lang="en-US" sz="1100" b="1" dirty="0">
                 <a:solidFill>
-                  <a:srgbClr val="16A34A"/>
+                  <a:srgbClr val="DC2626"/>
                 </a:solidFill>
                 <a:latin typeface="Trebuchet MS" pitchFamily="34" charset="0"/>
                 <a:ea typeface="Trebuchet MS" pitchFamily="34" charset="-122"/>
                 <a:cs typeface="Trebuchet MS" pitchFamily="34" charset="-120"/>
               </a:rPr>
-              <a:t>TRUE</a:t>
+              <a:t>FALSE</a:t>
             </a:r>
             <a:endParaRPr lang="en-US" sz="1100" dirty="0"/>
           </a:p>
@@ -37935,7 +38739,7 @@
                 <a:ea typeface="Calibri" pitchFamily="34" charset="-122"/>
                 <a:cs typeface="Calibri" pitchFamily="34" charset="-120"/>
               </a:rPr>
-              <a:t>2.  An endoscope is a tool used to look at things outside the body.</a:t>
+              <a:t>2.  Words containing 'endo' always describe things that are extremely large or outside something.</a:t>
             </a:r>
             <a:endParaRPr lang="en-US" sz="1300" dirty="0"/>
           </a:p>
@@ -38074,7 +38878,7 @@
                 <a:ea typeface="Calibri" pitchFamily="34" charset="-122"/>
                 <a:cs typeface="Calibri" pitchFamily="34" charset="-120"/>
               </a:rPr>
-              <a:t>3.  An endoskeleton is a skeleton found on the inside of the body.</a:t>
+              <a:t>3.  The morpheme 'endo' comes from Greek and means 'within' or 'inside'.</a:t>
             </a:r>
             <a:endParaRPr lang="en-US" sz="1300" dirty="0"/>
           </a:p>
@@ -38213,7 +39017,7 @@
                 <a:ea typeface="Calibri" pitchFamily="34" charset="-122"/>
                 <a:cs typeface="Calibri" pitchFamily="34" charset="-120"/>
               </a:rPr>
-              <a:t>4.  Words containing 'endo' are often used in science and medicine.</a:t>
+              <a:t>4.  An endoscope is a tool doctors use to see inside the body.</a:t>
             </a:r>
             <a:endParaRPr lang="en-US" sz="1300" dirty="0"/>
           </a:p>
@@ -38352,7 +39156,7 @@
                 <a:ea typeface="Calibri" pitchFamily="34" charset="-122"/>
                 <a:cs typeface="Calibri" pitchFamily="34" charset="-120"/>
               </a:rPr>
-              <a:t>5.  The morpheme 'endo' means 'above' or 'beyond'.</a:t>
+              <a:t>5.  The word 'endorphin' contains the root 'endo', relating to chemicals produced inside the brain.</a:t>
             </a:r>
             <a:endParaRPr lang="en-US" sz="1300" dirty="0"/>
           </a:p>
@@ -38375,11 +39179,11 @@
             </a:avLst>
           </a:prstGeom>
           <a:solidFill>
-            <a:srgbClr val="FEE2E2"/>
-          </a:solidFill>
-          <a:ln w="12700">
-            <a:solidFill>
-              <a:srgbClr val="DC2626"/>
+            <a:srgbClr val="DCFCE7"/>
+          </a:solidFill>
+          <a:ln w="12700">
+            <a:solidFill>
+              <a:srgbClr val="16A34A"/>
             </a:solidFill>
             <a:prstDash val="solid"/>
           </a:ln>
@@ -38412,13 +39216,13 @@
             <a:r>
               <a:rPr lang="en-US" sz="1100" b="1" dirty="0">
                 <a:solidFill>
-                  <a:srgbClr val="DC2626"/>
+                  <a:srgbClr val="16A34A"/>
                 </a:solidFill>
                 <a:latin typeface="Trebuchet MS" pitchFamily="34" charset="0"/>
                 <a:ea typeface="Trebuchet MS" pitchFamily="34" charset="-122"/>
                 <a:cs typeface="Trebuchet MS" pitchFamily="34" charset="-120"/>
               </a:rPr>
-              <a:t>FALSE</a:t>
+              <a:t>TRUE</a:t>
             </a:r>
             <a:endParaRPr lang="en-US" sz="1100" dirty="0"/>
           </a:p>
@@ -38710,7 +39514,7 @@
                 <a:ea typeface="Calibri" pitchFamily="34" charset="-122"/>
                 <a:cs typeface="Calibri" pitchFamily="34" charset="-120"/>
               </a:rPr>
-              <a:t>Word Labs  •  wordlabs.app  •  Root: 'endo' = within, inside, inner</a:t>
+              <a:t>Word Labs  •  wordlabs.app  •  Root: 'endo' = within, inside, internal</a:t>
             </a:r>
             <a:endParaRPr lang="en-US" sz="800" dirty="0"/>
           </a:p>
@@ -38847,7 +39651,7 @@
                 <a:ea typeface="Trebuchet MS" pitchFamily="34" charset="-122"/>
                 <a:cs typeface="Trebuchet MS" pitchFamily="34" charset="-120"/>
               </a:rPr>
-              <a:t>within, inside, inner</a:t>
+              <a:t>within, inside, internal</a:t>
             </a:r>
             <a:endParaRPr lang="en-US" sz="2000" dirty="0"/>
           </a:p>
@@ -39255,7 +40059,7 @@
                 <a:ea typeface="Trebuchet MS" pitchFamily="34" charset="-122"/>
                 <a:cs typeface="Trebuchet MS" pitchFamily="34" charset="-120"/>
               </a:rPr>
-              <a:t>endospore</a:t>
+              <a:t>endurance</a:t>
             </a:r>
             <a:endParaRPr lang="en-US" sz="1300" dirty="0"/>
           </a:p>
@@ -39321,7 +40125,7 @@
                 <a:ea typeface="Trebuchet MS" pitchFamily="34" charset="-122"/>
                 <a:cs typeface="Trebuchet MS" pitchFamily="34" charset="-120"/>
               </a:rPr>
-              <a:t>endothermic</a:t>
+              <a:t>endorphin</a:t>
             </a:r>
             <a:endParaRPr lang="en-US" sz="1300" dirty="0"/>
           </a:p>
@@ -39387,7 +40191,7 @@
                 <a:ea typeface="Trebuchet MS" pitchFamily="34" charset="-122"/>
                 <a:cs typeface="Trebuchet MS" pitchFamily="34" charset="-120"/>
               </a:rPr>
-              <a:t>endogenous</a:t>
+              <a:t>endospore</a:t>
             </a:r>
             <a:endParaRPr lang="en-US" sz="1300" dirty="0"/>
           </a:p>
@@ -39679,7 +40483,7 @@
                 <a:ea typeface="Calibri" pitchFamily="34" charset="-122"/>
                 <a:cs typeface="Calibri" pitchFamily="34" charset="-120"/>
               </a:rPr>
-              <a:t>Word Labs  •  wordlabs.app  •  Root: 'endo' = within, inside, inner</a:t>
+              <a:t>Word Labs  •  wordlabs.app  •  Root: 'endo' = within, inside, internal</a:t>
             </a:r>
             <a:endParaRPr lang="en-US" sz="800" dirty="0"/>
           </a:p>
@@ -40172,7 +40976,7 @@
                 <a:ea typeface="Trebuchet MS" pitchFamily="34" charset="-122"/>
                 <a:cs typeface="Trebuchet MS" pitchFamily="34" charset="-120"/>
               </a:rPr>
-              <a:t>meso-</a:t>
+              <a:t>per-</a:t>
             </a:r>
             <a:endParaRPr lang="en-US" sz="1300" dirty="0"/>
           </a:p>
@@ -40325,7 +41129,7 @@
                 <a:ea typeface="Trebuchet MS" pitchFamily="34" charset="-122"/>
                 <a:cs typeface="Trebuchet MS" pitchFamily="34" charset="-120"/>
               </a:rPr>
-              <a:t>peri-</a:t>
+              <a:t>para-</a:t>
             </a:r>
             <a:endParaRPr lang="en-US" sz="1300" dirty="0"/>
           </a:p>
@@ -40478,7 +41282,7 @@
                 <a:ea typeface="Trebuchet MS" pitchFamily="34" charset="-122"/>
                 <a:cs typeface="Trebuchet MS" pitchFamily="34" charset="-120"/>
               </a:rPr>
-              <a:t>neo-</a:t>
+              <a:t>sub-</a:t>
             </a:r>
             <a:endParaRPr lang="en-US" sz="1300" dirty="0"/>
           </a:p>
@@ -40631,7 +41435,7 @@
                 <a:ea typeface="Trebuchet MS" pitchFamily="34" charset="-122"/>
                 <a:cs typeface="Trebuchet MS" pitchFamily="34" charset="-120"/>
               </a:rPr>
-              <a:t>poly-</a:t>
+              <a:t>micro-</a:t>
             </a:r>
             <a:endParaRPr lang="en-US" sz="1300" dirty="0"/>
           </a:p>
@@ -41453,7 +42257,7 @@
                 <a:ea typeface="Calibri" pitchFamily="34" charset="-122"/>
                 <a:cs typeface="Calibri" pitchFamily="34" charset="-120"/>
               </a:rPr>
-              <a:t>Word Labs  •  wordlabs.app  •  Root: 'endo' = within, inside, inner</a:t>
+              <a:t>Word Labs  •  wordlabs.app  •  Root: 'endo' = within, inside, internal</a:t>
             </a:r>
             <a:endParaRPr lang="en-US" sz="800" dirty="0"/>
           </a:p>
@@ -41631,7 +42435,7 @@
                 <a:ea typeface="Calibri" pitchFamily="34" charset="-122"/>
                 <a:cs typeface="Calibri" pitchFamily="34" charset="-120"/>
               </a:rPr>
-              <a:t>A skeleton found on the inside of the body, like the bones inside humans and other animals.</a:t>
+              <a:t>A skeleton that is found on the inside of an animal's body, like the bones inside a human or a fish.</a:t>
             </a:r>
             <a:endParaRPr lang="en-US" sz="1200" dirty="0"/>
           </a:p>
@@ -41770,7 +42574,7 @@
                 <a:ea typeface="Calibri" pitchFamily="34" charset="-122"/>
                 <a:cs typeface="Calibri" pitchFamily="34" charset="-120"/>
               </a:rPr>
-              <a:t>A thin tube with a camera that doctors use to look inside your body.</a:t>
+              <a:t>A long, thin tube with a tiny camera that doctors use to look inside your body without cutting it open.</a:t>
             </a:r>
             <a:endParaRPr lang="en-US" sz="1200" dirty="0"/>
           </a:p>
@@ -41909,7 +42713,7 @@
                 <a:ea typeface="Calibri" pitchFamily="34" charset="-122"/>
                 <a:cs typeface="Calibri" pitchFamily="34" charset="-120"/>
               </a:rPr>
-              <a:t>Something that is produced or grows from within an organism or system rather than coming from outside.</a:t>
+              <a:t>A tough protective coat that some tiny bacteria grow on the inside to help them survive when conditions are harsh.</a:t>
             </a:r>
             <a:endParaRPr lang="en-US" sz="1200" dirty="0"/>
           </a:p>
@@ -42048,7 +42852,7 @@
                 <a:ea typeface="Calibri" pitchFamily="34" charset="-122"/>
                 <a:cs typeface="Calibri" pitchFamily="34" charset="-120"/>
               </a:rPr>
-              <a:t>The innermost layer of cells in an animal's body during early development.</a:t>
+              <a:t>The inner layer of cells that forms first when a baby animal is growing, which later becomes the lining of organs like the stomach.</a:t>
             </a:r>
             <a:endParaRPr lang="en-US" sz="1200" dirty="0"/>
           </a:p>
@@ -42121,7 +42925,7 @@
                 <a:ea typeface="Trebuchet MS" pitchFamily="34" charset="-122"/>
                 <a:cs typeface="Trebuchet MS" pitchFamily="34" charset="-120"/>
               </a:rPr>
-              <a:t>endospore</a:t>
+              <a:t>endurance</a:t>
             </a:r>
             <a:endParaRPr lang="en-US" sz="1200" dirty="0"/>
           </a:p>
@@ -42187,7 +42991,7 @@
                 <a:ea typeface="Calibri" pitchFamily="34" charset="-122"/>
                 <a:cs typeface="Calibri" pitchFamily="34" charset="-120"/>
               </a:rPr>
-              <a:t>Describes a reaction or animal that takes in or produces heat from within, like warm-blooded animals.</a:t>
+              <a:t>A natural chemical made inside your brain that makes you feel happy or reduces pain, especially after exercise.</a:t>
             </a:r>
             <a:endParaRPr lang="en-US" sz="1200" dirty="0"/>
           </a:p>
@@ -42260,7 +43064,7 @@
                 <a:ea typeface="Trebuchet MS" pitchFamily="34" charset="-122"/>
                 <a:cs typeface="Trebuchet MS" pitchFamily="34" charset="-120"/>
               </a:rPr>
-              <a:t>endothermic</a:t>
+              <a:t>endorphin</a:t>
             </a:r>
             <a:endParaRPr lang="en-US" sz="1200" dirty="0"/>
           </a:p>
@@ -42326,7 +43130,7 @@
                 <a:ea typeface="Calibri" pitchFamily="34" charset="-122"/>
                 <a:cs typeface="Calibri" pitchFamily="34" charset="-120"/>
               </a:rPr>
-              <a:t>A tough protective coating that some bacteria form around themselves when conditions get dangerous.</a:t>
+              <a:t>The ability to keep going through something hard or painful for a long time without giving up.</a:t>
             </a:r>
             <a:endParaRPr lang="en-US" sz="1200" dirty="0"/>
           </a:p>
@@ -42399,7 +43203,7 @@
                 <a:ea typeface="Trebuchet MS" pitchFamily="34" charset="-122"/>
                 <a:cs typeface="Trebuchet MS" pitchFamily="34" charset="-120"/>
               </a:rPr>
-              <a:t>endogenous</a:t>
+              <a:t>endospore</a:t>
             </a:r>
             <a:endParaRPr lang="en-US" sz="1200" dirty="0"/>
           </a:p>
@@ -42465,7 +43269,7 @@
                 <a:ea typeface="Calibri" pitchFamily="34" charset="-122"/>
                 <a:cs typeface="Calibri" pitchFamily="34" charset="-120"/>
               </a:rPr>
-              <a:t>Relating to glands inside your body that release chemicals called hormones into your blood.</a:t>
+              <a:t>To do with the glands inside your body that release chemicals called hormones directly into your blood.</a:t>
             </a:r>
             <a:endParaRPr lang="en-US" sz="1200" dirty="0"/>
           </a:p>
@@ -42757,7 +43561,7 @@
                 <a:ea typeface="Calibri" pitchFamily="34" charset="-122"/>
                 <a:cs typeface="Calibri" pitchFamily="34" charset="-120"/>
               </a:rPr>
-              <a:t>Word Labs  •  wordlabs.app  •  Root: 'endo' = within, inside, inner</a:t>
+              <a:t>Word Labs  •  wordlabs.app  •  Root: 'endo' = within, inside, internal</a:t>
             </a:r>
             <a:endParaRPr lang="en-US" sz="800" dirty="0"/>
           </a:p>
@@ -42960,7 +43764,7 @@
                 <a:ea typeface="Calibri" pitchFamily="34" charset="-122"/>
                 <a:cs typeface="Calibri" pitchFamily="34" charset="-120"/>
               </a:rPr>
-              <a:t>The doctor used an endoscope to look inside the patient's stomach without doing surgery.</a:t>
+              <a:t>The doctor used an endoscope to look inside the patient's stomach without performing major surgery.</a:t>
             </a:r>
             <a:endParaRPr lang="en-US" sz="1500" dirty="0"/>
           </a:p>
@@ -43124,7 +43928,7 @@
                 <a:ea typeface="Calibri" pitchFamily="34" charset="-122"/>
                 <a:cs typeface="Calibri" pitchFamily="34" charset="-120"/>
               </a:rPr>
-              <a:t>Humans have an endoskeleton, which means our bones are found on the inside of our bodies.</a:t>
+              <a:t>Our endoskeleton — made up of bones — protects our organs and helps us stand upright.</a:t>
             </a:r>
             <a:endParaRPr lang="en-US" sz="1500" dirty="0"/>
           </a:p>
@@ -43288,7 +44092,7 @@
                 <a:ea typeface="Calibri" pitchFamily="34" charset="-122"/>
                 <a:cs typeface="Calibri" pitchFamily="34" charset="-120"/>
               </a:rPr>
-              <a:t>The endocrine system releases hormones that help control how our bodies grow and work.</a:t>
+              <a:t>Scientists discovered that endorphins are released inside the brain during exercise, which is why people feel happy after a run.</a:t>
             </a:r>
             <a:endParaRPr lang="en-US" sz="1500" dirty="0"/>
           </a:p>
